--- a/slides/sources/J3-fichiers-robustesse.pptx
+++ b/slides/sources/J3-fichiers-robustesse.pptx
@@ -1658,7 +1658,7 @@
     <p:bg>
       <p:bgPr>
         <a:solidFill>
-          <a:srgbClr val="0D3325"/>
+          <a:srgbClr val="0A2E1A"/>
         </a:solidFill>
       </p:bgPr>
     </p:bg>
@@ -1691,7 +1691,7 @@
             <a:avLst/>
           </a:prstGeom>
           <a:solidFill>
-            <a:srgbClr val="14563C"/>
+            <a:srgbClr val="0E7A3D"/>
           </a:solidFill>
           <a:ln/>
         </p:spPr>
@@ -1711,8 +1711,8 @@
             <a:avLst/>
           </a:prstGeom>
           <a:solidFill>
-            <a:srgbClr val="C9A227">
-              <a:alpha val="45000"/>
+            <a:srgbClr val="FCD116">
+              <a:alpha val="55000"/>
             </a:srgbClr>
           </a:solidFill>
           <a:ln/>
@@ -1733,8 +1733,8 @@
             <a:avLst/>
           </a:prstGeom>
           <a:solidFill>
-            <a:srgbClr val="1E7A50">
-              <a:alpha val="60000"/>
+            <a:srgbClr val="CE1126">
+              <a:alpha val="65000"/>
             </a:srgbClr>
           </a:solidFill>
           <a:ln/>
@@ -1742,7 +1742,53 @@
       </p:sp>
       <p:sp>
         <p:nvSpPr>
-          <p:cNvPr id="5" name="Text 3"/>
+          <p:cNvPr id="5" name="Shape 3"/>
+          <p:cNvSpPr/>
+          <p:nvPr/>
+        </p:nvSpPr>
+        <p:spPr>
+          <a:xfrm>
+            <a:off x="9464040" y="502920"/>
+            <a:ext cx="2148840" cy="1828800"/>
+          </a:xfrm>
+          <a:prstGeom prst="roundRect">
+            <a:avLst>
+              <a:gd name="adj" fmla="val 6000"/>
+            </a:avLst>
+          </a:prstGeom>
+          <a:solidFill>
+            <a:srgbClr val="FFFFFF"/>
+          </a:solidFill>
+          <a:ln/>
+        </p:spPr>
+      </p:sp>
+      <p:pic>
+        <p:nvPicPr>
+          <p:cNvPr id="6" name="Image 0" descr="logo-dgi.png">    </p:cNvPr>
+          <p:cNvPicPr>
+            <a:picLocks noChangeAspect="1"/>
+          </p:cNvPicPr>
+          <p:nvPr/>
+        </p:nvPicPr>
+        <p:blipFill>
+          <a:blip r:embed="rId1"/>
+          <a:stretch>
+            <a:fillRect/>
+          </a:stretch>
+        </p:blipFill>
+        <p:spPr>
+          <a:xfrm>
+            <a:off x="9646920" y="740664"/>
+            <a:ext cx="1783080" cy="1353312"/>
+          </a:xfrm>
+          <a:prstGeom prst="rect">
+            <a:avLst/>
+          </a:prstGeom>
+        </p:spPr>
+      </p:pic>
+      <p:sp>
+        <p:nvSpPr>
+          <p:cNvPr id="7" name="Text 4"/>
           <p:cNvSpPr/>
           <p:nvPr/>
         </p:nvSpPr>
@@ -1767,7 +1813,7 @@
             <a:r>
               <a:rPr lang="en-US" sz="1500" b="1" spc="300" kern="0" dirty="0">
                 <a:solidFill>
-                  <a:srgbClr val="C9A227"/>
+                  <a:srgbClr val="FCD116"/>
                 </a:solidFill>
                 <a:latin typeface="Calibri" pitchFamily="34" charset="0"/>
                 <a:ea typeface="Calibri" pitchFamily="34" charset="-122"/>
@@ -1781,7 +1827,7 @@
       </p:sp>
       <p:sp>
         <p:nvSpPr>
-          <p:cNvPr id="6" name="Text 4"/>
+          <p:cNvPr id="8" name="Text 5"/>
           <p:cNvSpPr/>
           <p:nvPr/>
         </p:nvSpPr>
@@ -1820,7 +1866,7 @@
       </p:sp>
       <p:sp>
         <p:nvSpPr>
-          <p:cNvPr id="7" name="Text 5"/>
+          <p:cNvPr id="9" name="Text 6"/>
           <p:cNvSpPr/>
           <p:nvPr/>
         </p:nvSpPr>
@@ -1845,7 +1891,7 @@
             <a:r>
               <a:rPr lang="en-US" sz="3500" b="1" dirty="0">
                 <a:solidFill>
-                  <a:srgbClr val="E8D48A"/>
+                  <a:srgbClr val="FCD116"/>
                 </a:solidFill>
                 <a:latin typeface="Cambria" pitchFamily="34" charset="0"/>
                 <a:ea typeface="Cambria" pitchFamily="34" charset="-122"/>
@@ -1859,7 +1905,7 @@
       </p:sp>
       <p:sp>
         <p:nvSpPr>
-          <p:cNvPr id="8" name="Text 6"/>
+          <p:cNvPr id="10" name="Text 7"/>
           <p:cNvSpPr/>
           <p:nvPr/>
         </p:nvSpPr>
@@ -1921,7 +1967,7 @@
       </p:sp>
       <p:sp>
         <p:nvSpPr>
-          <p:cNvPr id="9" name="Shape 7"/>
+          <p:cNvPr id="11" name="Shape 8"/>
           <p:cNvSpPr/>
           <p:nvPr/>
         </p:nvSpPr>
@@ -1936,14 +1982,14 @@
             </a:avLst>
           </a:prstGeom>
           <a:solidFill>
-            <a:srgbClr val="14563C"/>
+            <a:srgbClr val="0E7A3D"/>
           </a:solidFill>
           <a:ln/>
         </p:spPr>
       </p:sp>
       <p:sp>
         <p:nvSpPr>
-          <p:cNvPr id="10" name="Text 8"/>
+          <p:cNvPr id="12" name="Text 9"/>
           <p:cNvSpPr/>
           <p:nvPr/>
         </p:nvSpPr>
@@ -1982,7 +2028,7 @@
       </p:sp>
       <p:sp>
         <p:nvSpPr>
-          <p:cNvPr id="11" name="Shape 9"/>
+          <p:cNvPr id="13" name="Shape 10"/>
           <p:cNvSpPr/>
           <p:nvPr/>
         </p:nvSpPr>
@@ -1997,14 +2043,14 @@
             </a:avLst>
           </a:prstGeom>
           <a:solidFill>
-            <a:srgbClr val="14563C"/>
+            <a:srgbClr val="0E7A3D"/>
           </a:solidFill>
           <a:ln/>
         </p:spPr>
       </p:sp>
       <p:sp>
         <p:nvSpPr>
-          <p:cNvPr id="12" name="Text 10"/>
+          <p:cNvPr id="14" name="Text 11"/>
           <p:cNvSpPr/>
           <p:nvPr/>
         </p:nvSpPr>
@@ -2043,7 +2089,7 @@
       </p:sp>
       <p:sp>
         <p:nvSpPr>
-          <p:cNvPr id="13" name="Shape 11"/>
+          <p:cNvPr id="15" name="Shape 12"/>
           <p:cNvSpPr/>
           <p:nvPr/>
         </p:nvSpPr>
@@ -2058,14 +2104,14 @@
             </a:avLst>
           </a:prstGeom>
           <a:solidFill>
-            <a:srgbClr val="14563C"/>
+            <a:srgbClr val="0E7A3D"/>
           </a:solidFill>
           <a:ln/>
         </p:spPr>
       </p:sp>
       <p:sp>
         <p:nvSpPr>
-          <p:cNvPr id="14" name="Text 12"/>
+          <p:cNvPr id="16" name="Text 13"/>
           <p:cNvSpPr/>
           <p:nvPr/>
         </p:nvSpPr>
@@ -2104,7 +2150,7 @@
       </p:sp>
       <p:sp>
         <p:nvSpPr>
-          <p:cNvPr id="15" name="Text 13"/>
+          <p:cNvPr id="17" name="Text 14"/>
           <p:cNvSpPr/>
           <p:nvPr/>
         </p:nvSpPr>
@@ -2135,7 +2181,7 @@
                 <a:ea typeface="Calibri" pitchFamily="34" charset="-122"/>
                 <a:cs typeface="Calibri" pitchFamily="34" charset="-120"/>
               </a:rPr>
-              <a:t>Python, Fondamentaux et Analyse de Données  ·  contexte administration fiscale</a:t>
+              <a:t>DGI — Direction Générale des Impôts · Guinée-Bissau · données pédagogiques fictives</a:t>
             </a:r>
             <a:endParaRPr lang="en-US" sz="1200" dirty="0"/>
           </a:p>
@@ -2155,7 +2201,7 @@
     <p:bg>
       <p:bgPr>
         <a:solidFill>
-          <a:srgbClr val="0D3325"/>
+          <a:srgbClr val="0A2E1A"/>
         </a:solidFill>
       </p:bgPr>
     </p:bg>
@@ -2188,14 +2234,36 @@
             <a:avLst/>
           </a:prstGeom>
           <a:solidFill>
-            <a:srgbClr val="14563C"/>
+            <a:srgbClr val="0E7A3D"/>
           </a:solidFill>
           <a:ln/>
         </p:spPr>
       </p:sp>
       <p:sp>
         <p:nvSpPr>
-          <p:cNvPr id="3" name="Text 1"/>
+          <p:cNvPr id="3" name="Shape 1"/>
+          <p:cNvSpPr/>
+          <p:nvPr/>
+        </p:nvSpPr>
+        <p:spPr>
+          <a:xfrm>
+            <a:off x="11430000" y="5394960"/>
+            <a:ext cx="2011680" cy="2011680"/>
+          </a:xfrm>
+          <a:prstGeom prst="ellipse">
+            <a:avLst/>
+          </a:prstGeom>
+          <a:solidFill>
+            <a:srgbClr val="CE1126">
+              <a:alpha val="60000"/>
+            </a:srgbClr>
+          </a:solidFill>
+          <a:ln/>
+        </p:spPr>
+      </p:sp>
+      <p:sp>
+        <p:nvSpPr>
+          <p:cNvPr id="4" name="Text 2"/>
           <p:cNvSpPr/>
           <p:nvPr/>
         </p:nvSpPr>
@@ -2220,7 +2288,7 @@
             <a:r>
               <a:rPr lang="en-US" sz="1300" b="1" spc="200" kern="0" dirty="0">
                 <a:solidFill>
-                  <a:srgbClr val="C9A227"/>
+                  <a:srgbClr val="C79100"/>
                 </a:solidFill>
                 <a:latin typeface="Calibri" pitchFamily="34" charset="0"/>
                 <a:ea typeface="Calibri" pitchFamily="34" charset="-122"/>
@@ -2234,7 +2302,7 @@
       </p:sp>
       <p:sp>
         <p:nvSpPr>
-          <p:cNvPr id="4" name="Text 2"/>
+          <p:cNvPr id="5" name="Text 3"/>
           <p:cNvSpPr/>
           <p:nvPr/>
         </p:nvSpPr>
@@ -2273,7 +2341,7 @@
       </p:sp>
       <p:sp>
         <p:nvSpPr>
-          <p:cNvPr id="5" name="Shape 3"/>
+          <p:cNvPr id="6" name="Shape 4"/>
           <p:cNvSpPr/>
           <p:nvPr/>
         </p:nvSpPr>
@@ -2286,14 +2354,14 @@
             <a:avLst/>
           </a:prstGeom>
           <a:solidFill>
-            <a:srgbClr val="1E7A50"/>
+            <a:srgbClr val="2E9E4F"/>
           </a:solidFill>
           <a:ln/>
         </p:spPr>
       </p:sp>
       <p:pic>
         <p:nvPicPr>
-          <p:cNvPr id="6" name="Image 0" descr="icons/check.png">    </p:cNvPr>
+          <p:cNvPr id="7" name="Image 0" descr="icons/check.png">    </p:cNvPr>
           <p:cNvPicPr>
             <a:picLocks noChangeAspect="1"/>
           </p:cNvPicPr>
@@ -2317,7 +2385,7 @@
       </p:pic>
       <p:sp>
         <p:nvSpPr>
-          <p:cNvPr id="7" name="Text 4"/>
+          <p:cNvPr id="8" name="Text 5"/>
           <p:cNvSpPr/>
           <p:nvPr/>
         </p:nvSpPr>
@@ -2370,7 +2438,7 @@
       </p:sp>
       <p:sp>
         <p:nvSpPr>
-          <p:cNvPr id="8" name="Shape 5"/>
+          <p:cNvPr id="9" name="Shape 6"/>
           <p:cNvSpPr/>
           <p:nvPr/>
         </p:nvSpPr>
@@ -2383,14 +2451,14 @@
             <a:avLst/>
           </a:prstGeom>
           <a:solidFill>
-            <a:srgbClr val="1E7A50"/>
+            <a:srgbClr val="2E9E4F"/>
           </a:solidFill>
           <a:ln/>
         </p:spPr>
       </p:sp>
       <p:pic>
         <p:nvPicPr>
-          <p:cNvPr id="9" name="Image 1" descr="icons/check.png">    </p:cNvPr>
+          <p:cNvPr id="10" name="Image 1" descr="icons/check.png">    </p:cNvPr>
           <p:cNvPicPr>
             <a:picLocks noChangeAspect="1"/>
           </p:cNvPicPr>
@@ -2414,7 +2482,7 @@
       </p:pic>
       <p:sp>
         <p:nvSpPr>
-          <p:cNvPr id="10" name="Text 6"/>
+          <p:cNvPr id="11" name="Text 7"/>
           <p:cNvSpPr/>
           <p:nvPr/>
         </p:nvSpPr>
@@ -2467,7 +2535,7 @@
       </p:sp>
       <p:sp>
         <p:nvSpPr>
-          <p:cNvPr id="11" name="Shape 7"/>
+          <p:cNvPr id="12" name="Shape 8"/>
           <p:cNvSpPr/>
           <p:nvPr/>
         </p:nvSpPr>
@@ -2480,14 +2548,14 @@
             <a:avLst/>
           </a:prstGeom>
           <a:solidFill>
-            <a:srgbClr val="1E7A50"/>
+            <a:srgbClr val="2E9E4F"/>
           </a:solidFill>
           <a:ln/>
         </p:spPr>
       </p:sp>
       <p:pic>
         <p:nvPicPr>
-          <p:cNvPr id="12" name="Image 2" descr="icons/check.png">    </p:cNvPr>
+          <p:cNvPr id="13" name="Image 2" descr="icons/check.png">    </p:cNvPr>
           <p:cNvPicPr>
             <a:picLocks noChangeAspect="1"/>
           </p:cNvPicPr>
@@ -2511,7 +2579,7 @@
       </p:pic>
       <p:sp>
         <p:nvSpPr>
-          <p:cNvPr id="13" name="Text 8"/>
+          <p:cNvPr id="14" name="Text 9"/>
           <p:cNvSpPr/>
           <p:nvPr/>
         </p:nvSpPr>
@@ -2564,7 +2632,7 @@
       </p:sp>
       <p:sp>
         <p:nvSpPr>
-          <p:cNvPr id="14" name="Shape 9"/>
+          <p:cNvPr id="15" name="Shape 10"/>
           <p:cNvSpPr/>
           <p:nvPr/>
         </p:nvSpPr>
@@ -2577,14 +2645,14 @@
             <a:avLst/>
           </a:prstGeom>
           <a:solidFill>
-            <a:srgbClr val="1E7A50"/>
+            <a:srgbClr val="2E9E4F"/>
           </a:solidFill>
           <a:ln/>
         </p:spPr>
       </p:sp>
       <p:pic>
         <p:nvPicPr>
-          <p:cNvPr id="15" name="Image 3" descr="icons/check.png">    </p:cNvPr>
+          <p:cNvPr id="16" name="Image 3" descr="icons/check.png">    </p:cNvPr>
           <p:cNvPicPr>
             <a:picLocks noChangeAspect="1"/>
           </p:cNvPicPr>
@@ -2608,7 +2676,7 @@
       </p:pic>
       <p:sp>
         <p:nvSpPr>
-          <p:cNvPr id="16" name="Text 10"/>
+          <p:cNvPr id="17" name="Text 11"/>
           <p:cNvSpPr/>
           <p:nvPr/>
         </p:nvSpPr>
@@ -2661,7 +2729,7 @@
       </p:sp>
       <p:sp>
         <p:nvSpPr>
-          <p:cNvPr id="17" name="Shape 11"/>
+          <p:cNvPr id="18" name="Shape 12"/>
           <p:cNvSpPr/>
           <p:nvPr/>
         </p:nvSpPr>
@@ -2674,14 +2742,14 @@
             <a:avLst/>
           </a:prstGeom>
           <a:solidFill>
-            <a:srgbClr val="1E7A50"/>
+            <a:srgbClr val="2E9E4F"/>
           </a:solidFill>
           <a:ln/>
         </p:spPr>
       </p:sp>
       <p:pic>
         <p:nvPicPr>
-          <p:cNvPr id="18" name="Image 4" descr="icons/check.png">    </p:cNvPr>
+          <p:cNvPr id="19" name="Image 4" descr="icons/check.png">    </p:cNvPr>
           <p:cNvPicPr>
             <a:picLocks noChangeAspect="1"/>
           </p:cNvPicPr>
@@ -2705,7 +2773,7 @@
       </p:pic>
       <p:sp>
         <p:nvSpPr>
-          <p:cNvPr id="19" name="Text 12"/>
+          <p:cNvPr id="20" name="Text 13"/>
           <p:cNvSpPr/>
           <p:nvPr/>
         </p:nvSpPr>
@@ -2758,7 +2826,7 @@
       </p:sp>
       <p:sp>
         <p:nvSpPr>
-          <p:cNvPr id="20" name="Shape 13"/>
+          <p:cNvPr id="21" name="Shape 14"/>
           <p:cNvSpPr/>
           <p:nvPr/>
         </p:nvSpPr>
@@ -2773,14 +2841,14 @@
             </a:avLst>
           </a:prstGeom>
           <a:solidFill>
-            <a:srgbClr val="14563C"/>
+            <a:srgbClr val="0E7A3D"/>
           </a:solidFill>
           <a:ln/>
         </p:spPr>
       </p:sp>
       <p:sp>
         <p:nvSpPr>
-          <p:cNvPr id="21" name="Shape 14"/>
+          <p:cNvPr id="22" name="Shape 15"/>
           <p:cNvSpPr/>
           <p:nvPr/>
         </p:nvSpPr>
@@ -2793,14 +2861,14 @@
             <a:avLst/>
           </a:prstGeom>
           <a:solidFill>
-            <a:srgbClr val="C9A227"/>
+            <a:srgbClr val="C79100"/>
           </a:solidFill>
           <a:ln/>
         </p:spPr>
       </p:sp>
       <p:pic>
         <p:nvPicPr>
-          <p:cNvPr id="22" name="Image 5" descr="icons/rocket.png">    </p:cNvPr>
+          <p:cNvPr id="23" name="Image 5" descr="icons/rocket.png">    </p:cNvPr>
           <p:cNvPicPr>
             <a:picLocks noChangeAspect="1"/>
           </p:cNvPicPr>
@@ -2824,7 +2892,7 @@
       </p:pic>
       <p:sp>
         <p:nvSpPr>
-          <p:cNvPr id="23" name="Text 15"/>
+          <p:cNvPr id="24" name="Text 16"/>
           <p:cNvSpPr/>
           <p:nvPr/>
         </p:nvSpPr>
@@ -2863,7 +2931,7 @@
       </p:sp>
       <p:sp>
         <p:nvSpPr>
-          <p:cNvPr id="24" name="Text 16"/>
+          <p:cNvPr id="25" name="Text 17"/>
           <p:cNvSpPr/>
           <p:nvPr/>
         </p:nvSpPr>
@@ -2941,7 +3009,7 @@
         <p:spPr>
           <a:xfrm>
             <a:off x="548640" y="384048"/>
-            <a:ext cx="10972800" cy="320040"/>
+            <a:ext cx="9601200" cy="320040"/>
           </a:xfrm>
           <a:prstGeom prst="rect">
             <a:avLst/>
@@ -2959,7 +3027,7 @@
             <a:r>
               <a:rPr lang="en-US" sz="1300" b="1" spc="200" kern="0" dirty="0">
                 <a:solidFill>
-                  <a:srgbClr val="C9A227"/>
+                  <a:srgbClr val="C79100"/>
                 </a:solidFill>
                 <a:latin typeface="Calibri" pitchFamily="34" charset="0"/>
                 <a:ea typeface="Calibri" pitchFamily="34" charset="-122"/>
@@ -2980,7 +3048,7 @@
         <p:spPr>
           <a:xfrm>
             <a:off x="548640" y="658368"/>
-            <a:ext cx="11064240" cy="731520"/>
+            <a:ext cx="9966960" cy="731520"/>
           </a:xfrm>
           <a:prstGeom prst="rect">
             <a:avLst/>
@@ -2998,7 +3066,7 @@
             <a:r>
               <a:rPr lang="en-US" sz="3400" b="1" dirty="0">
                 <a:solidFill>
-                  <a:srgbClr val="14563C"/>
+                  <a:srgbClr val="0E7A3D"/>
                 </a:solidFill>
                 <a:latin typeface="Cambria" pitchFamily="34" charset="0"/>
                 <a:ea typeface="Cambria" pitchFamily="34" charset="-122"/>
@@ -3010,29 +3078,9 @@
           </a:p>
         </p:txBody>
       </p:sp>
-      <p:sp>
-        <p:nvSpPr>
-          <p:cNvPr id="4" name="Shape 2"/>
-          <p:cNvSpPr/>
-          <p:nvPr/>
-        </p:nvSpPr>
-        <p:spPr>
-          <a:xfrm>
-            <a:off x="640080" y="1783080"/>
-            <a:ext cx="566928" cy="566928"/>
-          </a:xfrm>
-          <a:prstGeom prst="ellipse">
-            <a:avLst/>
-          </a:prstGeom>
-          <a:solidFill>
-            <a:srgbClr val="14563C"/>
-          </a:solidFill>
-          <a:ln/>
-        </p:spPr>
-      </p:sp>
       <p:pic>
         <p:nvPicPr>
-          <p:cNvPr id="5" name="Image 0" descr="icons/csv.png">    </p:cNvPr>
+          <p:cNvPr id="4" name="Image 0" descr="logo-dgi.png">    </p:cNvPr>
           <p:cNvPicPr>
             <a:picLocks noChangeAspect="1"/>
           </p:cNvPicPr>
@@ -3046,8 +3094,8 @@
         </p:blipFill>
         <p:spPr>
           <a:xfrm>
-            <a:off x="787481" y="1930481"/>
-            <a:ext cx="272125" cy="272125"/>
+            <a:off x="10744200" y="384048"/>
+            <a:ext cx="1051560" cy="795528"/>
           </a:xfrm>
           <a:prstGeom prst="rect">
             <a:avLst/>
@@ -3056,105 +3104,27 @@
       </p:pic>
       <p:sp>
         <p:nvSpPr>
-          <p:cNvPr id="6" name="Text 3"/>
-          <p:cNvSpPr/>
-          <p:nvPr/>
-        </p:nvSpPr>
-        <p:spPr>
-          <a:xfrm>
-            <a:off x="1417320" y="1728216"/>
-            <a:ext cx="5852160" cy="365760"/>
-          </a:xfrm>
-          <a:prstGeom prst="rect">
-            <a:avLst/>
-          </a:prstGeom>
-          <a:noFill/>
-          <a:ln/>
-        </p:spPr>
-        <p:txBody>
-          <a:bodyPr wrap="square" lIns="0" tIns="0" rIns="0" bIns="0" rtlCol="0" anchor="ctr"/>
-          <a:lstStyle/>
-          <a:p>
-            <a:pPr indent="0" marL="0">
-              <a:buNone/>
-            </a:pPr>
-            <a:r>
-              <a:rPr lang="en-US" sz="1650" b="1" dirty="0">
-                <a:solidFill>
-                  <a:srgbClr val="1C2A24"/>
-                </a:solidFill>
-                <a:latin typeface="Calibri" pitchFamily="34" charset="0"/>
-                <a:ea typeface="Calibri" pitchFamily="34" charset="-122"/>
-                <a:cs typeface="Calibri" pitchFamily="34" charset="-120"/>
-              </a:rPr>
-              <a:t>Lire et écrire CSV / JSON</a:t>
-            </a:r>
-            <a:endParaRPr lang="en-US" sz="1650" dirty="0"/>
-          </a:p>
-        </p:txBody>
-      </p:sp>
-      <p:sp>
-        <p:nvSpPr>
-          <p:cNvPr id="7" name="Text 4"/>
-          <p:cNvSpPr/>
-          <p:nvPr/>
-        </p:nvSpPr>
-        <p:spPr>
-          <a:xfrm>
-            <a:off x="1417320" y="2057400"/>
-            <a:ext cx="5852160" cy="502920"/>
-          </a:xfrm>
-          <a:prstGeom prst="rect">
-            <a:avLst/>
-          </a:prstGeom>
-          <a:noFill/>
-          <a:ln/>
-        </p:spPr>
-        <p:txBody>
-          <a:bodyPr wrap="square" lIns="0" tIns="0" rIns="0" bIns="0" rtlCol="0" anchor="ctr"/>
-          <a:lstStyle/>
-          <a:p>
-            <a:pPr indent="0" marL="0">
-              <a:buNone/>
-            </a:pPr>
-            <a:r>
-              <a:rPr lang="en-US" sz="1300" dirty="0">
-                <a:solidFill>
-                  <a:srgbClr val="5C6B63"/>
-                </a:solidFill>
-                <a:latin typeface="Calibri" pitchFamily="34" charset="0"/>
-                <a:ea typeface="Calibri" pitchFamily="34" charset="-122"/>
-                <a:cs typeface="Calibri" pitchFamily="34" charset="-120"/>
-              </a:rPr>
-              <a:t>DictReader, DictWriter, json.load — avec pathlib et UTF-8.</a:t>
-            </a:r>
-            <a:endParaRPr lang="en-US" sz="1300" dirty="0"/>
-          </a:p>
-        </p:txBody>
-      </p:sp>
-      <p:sp>
-        <p:nvSpPr>
-          <p:cNvPr id="8" name="Shape 5"/>
-          <p:cNvSpPr/>
-          <p:nvPr/>
-        </p:nvSpPr>
-        <p:spPr>
-          <a:xfrm>
-            <a:off x="640080" y="2807208"/>
+          <p:cNvPr id="5" name="Shape 2"/>
+          <p:cNvSpPr/>
+          <p:nvPr/>
+        </p:nvSpPr>
+        <p:spPr>
+          <a:xfrm>
+            <a:off x="640080" y="1783080"/>
             <a:ext cx="566928" cy="566928"/>
           </a:xfrm>
           <a:prstGeom prst="ellipse">
             <a:avLst/>
           </a:prstGeom>
           <a:solidFill>
-            <a:srgbClr val="C9A227"/>
+            <a:srgbClr val="0E7A3D"/>
           </a:solidFill>
           <a:ln/>
         </p:spPr>
       </p:sp>
       <p:pic>
         <p:nvPicPr>
-          <p:cNvPr id="9" name="Image 1" descr="icons/warn.png">    </p:cNvPr>
+          <p:cNvPr id="6" name="Image 1" descr="icons/csv.png">    </p:cNvPr>
           <p:cNvPicPr>
             <a:picLocks noChangeAspect="1"/>
           </p:cNvPicPr>
@@ -3168,7 +3138,7 @@
         </p:blipFill>
         <p:spPr>
           <a:xfrm>
-            <a:off x="787481" y="2954609"/>
+            <a:off x="787481" y="1930481"/>
             <a:ext cx="272125" cy="272125"/>
           </a:xfrm>
           <a:prstGeom prst="rect">
@@ -3178,13 +3148,13 @@
       </p:pic>
       <p:sp>
         <p:nvSpPr>
-          <p:cNvPr id="10" name="Text 6"/>
-          <p:cNvSpPr/>
-          <p:nvPr/>
-        </p:nvSpPr>
-        <p:spPr>
-          <a:xfrm>
-            <a:off x="1417320" y="2752344"/>
+          <p:cNvPr id="7" name="Text 3"/>
+          <p:cNvSpPr/>
+          <p:nvPr/>
+        </p:nvSpPr>
+        <p:spPr>
+          <a:xfrm>
+            <a:off x="1417320" y="1728216"/>
             <a:ext cx="5852160" cy="365760"/>
           </a:xfrm>
           <a:prstGeom prst="rect">
@@ -3209,7 +3179,7 @@
                 <a:ea typeface="Calibri" pitchFamily="34" charset="-122"/>
                 <a:cs typeface="Calibri" pitchFamily="34" charset="-120"/>
               </a:rPr>
-              <a:t>Encaisser les données sales</a:t>
+              <a:t>Lire et écrire CSV / JSON</a:t>
             </a:r>
             <a:endParaRPr lang="en-US" sz="1650" dirty="0"/>
           </a:p>
@@ -3217,13 +3187,13 @@
       </p:sp>
       <p:sp>
         <p:nvSpPr>
-          <p:cNvPr id="11" name="Text 7"/>
-          <p:cNvSpPr/>
-          <p:nvPr/>
-        </p:nvSpPr>
-        <p:spPr>
-          <a:xfrm>
-            <a:off x="1417320" y="3081528"/>
+          <p:cNvPr id="8" name="Text 4"/>
+          <p:cNvSpPr/>
+          <p:nvPr/>
+        </p:nvSpPr>
+        <p:spPr>
+          <a:xfrm>
+            <a:off x="1417320" y="2057400"/>
             <a:ext cx="5852160" cy="502920"/>
           </a:xfrm>
           <a:prstGeom prst="rect">
@@ -3248,7 +3218,7 @@
                 <a:ea typeface="Calibri" pitchFamily="34" charset="-122"/>
                 <a:cs typeface="Calibri" pitchFamily="34" charset="-120"/>
               </a:rPr>
-              <a:t>try/except : quatre formats de date, montants vides ou négatifs.</a:t>
+              <a:t>DictReader, DictWriter, json.load — avec pathlib et UTF-8.</a:t>
             </a:r>
             <a:endParaRPr lang="en-US" sz="1300" dirty="0"/>
           </a:p>
@@ -3256,27 +3226,27 @@
       </p:sp>
       <p:sp>
         <p:nvSpPr>
-          <p:cNvPr id="12" name="Shape 8"/>
-          <p:cNvSpPr/>
-          <p:nvPr/>
-        </p:nvSpPr>
-        <p:spPr>
-          <a:xfrm>
-            <a:off x="640080" y="3831336"/>
+          <p:cNvPr id="9" name="Shape 5"/>
+          <p:cNvSpPr/>
+          <p:nvPr/>
+        </p:nvSpPr>
+        <p:spPr>
+          <a:xfrm>
+            <a:off x="640080" y="2807208"/>
             <a:ext cx="566928" cy="566928"/>
           </a:xfrm>
           <a:prstGeom prst="ellipse">
             <a:avLst/>
           </a:prstGeom>
           <a:solidFill>
-            <a:srgbClr val="1E7A50"/>
+            <a:srgbClr val="C79100"/>
           </a:solidFill>
           <a:ln/>
         </p:spPr>
       </p:sp>
       <p:pic>
         <p:nvPicPr>
-          <p:cNvPr id="13" name="Image 2" descr="icons/folder.png">    </p:cNvPr>
+          <p:cNvPr id="10" name="Image 2" descr="icons/warn.png">    </p:cNvPr>
           <p:cNvPicPr>
             <a:picLocks noChangeAspect="1"/>
           </p:cNvPicPr>
@@ -3290,7 +3260,7 @@
         </p:blipFill>
         <p:spPr>
           <a:xfrm>
-            <a:off x="787481" y="3978737"/>
+            <a:off x="787481" y="2954609"/>
             <a:ext cx="272125" cy="272125"/>
           </a:xfrm>
           <a:prstGeom prst="rect">
@@ -3300,13 +3270,13 @@
       </p:pic>
       <p:sp>
         <p:nvSpPr>
-          <p:cNvPr id="14" name="Text 9"/>
-          <p:cNvSpPr/>
-          <p:nvPr/>
-        </p:nvSpPr>
-        <p:spPr>
-          <a:xfrm>
-            <a:off x="1417320" y="3776472"/>
+          <p:cNvPr id="11" name="Text 6"/>
+          <p:cNvSpPr/>
+          <p:nvPr/>
+        </p:nvSpPr>
+        <p:spPr>
+          <a:xfrm>
+            <a:off x="1417320" y="2752344"/>
             <a:ext cx="5852160" cy="365760"/>
           </a:xfrm>
           <a:prstGeom prst="rect">
@@ -3331,7 +3301,7 @@
                 <a:ea typeface="Calibri" pitchFamily="34" charset="-122"/>
                 <a:cs typeface="Calibri" pitchFamily="34" charset="-120"/>
               </a:rPr>
-              <a:t>Organiser en paquet</a:t>
+              <a:t>Encaisser les données sales</a:t>
             </a:r>
             <a:endParaRPr lang="en-US" sz="1650" dirty="0"/>
           </a:p>
@@ -3339,13 +3309,13 @@
       </p:sp>
       <p:sp>
         <p:nvSpPr>
-          <p:cNvPr id="15" name="Text 10"/>
-          <p:cNvSpPr/>
-          <p:nvPr/>
-        </p:nvSpPr>
-        <p:spPr>
-          <a:xfrm>
-            <a:off x="1417320" y="4105656"/>
+          <p:cNvPr id="12" name="Text 7"/>
+          <p:cNvSpPr/>
+          <p:nvPr/>
+        </p:nvSpPr>
+        <p:spPr>
+          <a:xfrm>
+            <a:off x="1417320" y="3081528"/>
             <a:ext cx="5852160" cy="502920"/>
           </a:xfrm>
           <a:prstGeom prst="rect">
@@ -3370,7 +3340,7 @@
                 <a:ea typeface="Calibri" pitchFamily="34" charset="-122"/>
                 <a:cs typeface="Calibri" pitchFamily="34" charset="-120"/>
               </a:rPr>
-              <a:t>Le paquet fiscalite/ : dates et pénalités réutilisables partout.</a:t>
+              <a:t>try/except : quatre formats de date, montants vides ou négatifs.</a:t>
             </a:r>
             <a:endParaRPr lang="en-US" sz="1300" dirty="0"/>
           </a:p>
@@ -3378,27 +3348,27 @@
       </p:sp>
       <p:sp>
         <p:nvSpPr>
-          <p:cNvPr id="16" name="Shape 11"/>
-          <p:cNvSpPr/>
-          <p:nvPr/>
-        </p:nvSpPr>
-        <p:spPr>
-          <a:xfrm>
-            <a:off x="640080" y="4855464"/>
+          <p:cNvPr id="13" name="Shape 8"/>
+          <p:cNvSpPr/>
+          <p:nvPr/>
+        </p:nvSpPr>
+        <p:spPr>
+          <a:xfrm>
+            <a:off x="640080" y="3831336"/>
             <a:ext cx="566928" cy="566928"/>
           </a:xfrm>
           <a:prstGeom prst="ellipse">
             <a:avLst/>
           </a:prstGeom>
           <a:solidFill>
-            <a:srgbClr val="14563C"/>
+            <a:srgbClr val="2E9E4F"/>
           </a:solidFill>
           <a:ln/>
         </p:spPr>
       </p:sp>
       <p:pic>
         <p:nvPicPr>
-          <p:cNvPr id="17" name="Image 3" descr="icons/box.png">    </p:cNvPr>
+          <p:cNvPr id="14" name="Image 3" descr="icons/folder.png">    </p:cNvPr>
           <p:cNvPicPr>
             <a:picLocks noChangeAspect="1"/>
           </p:cNvPicPr>
@@ -3412,7 +3382,7 @@
         </p:blipFill>
         <p:spPr>
           <a:xfrm>
-            <a:off x="787481" y="5002865"/>
+            <a:off x="787481" y="3978737"/>
             <a:ext cx="272125" cy="272125"/>
           </a:xfrm>
           <a:prstGeom prst="rect">
@@ -3422,13 +3392,13 @@
       </p:pic>
       <p:sp>
         <p:nvSpPr>
-          <p:cNvPr id="18" name="Text 12"/>
-          <p:cNvSpPr/>
-          <p:nvPr/>
-        </p:nvSpPr>
-        <p:spPr>
-          <a:xfrm>
-            <a:off x="1417320" y="4800600"/>
+          <p:cNvPr id="15" name="Text 9"/>
+          <p:cNvSpPr/>
+          <p:nvPr/>
+        </p:nvSpPr>
+        <p:spPr>
+          <a:xfrm>
+            <a:off x="1417320" y="3776472"/>
             <a:ext cx="5852160" cy="365760"/>
           </a:xfrm>
           <a:prstGeom prst="rect">
@@ -3453,7 +3423,7 @@
                 <a:ea typeface="Calibri" pitchFamily="34" charset="-122"/>
                 <a:cs typeface="Calibri" pitchFamily="34" charset="-120"/>
               </a:rPr>
-              <a:t>Comprendre uv</a:t>
+              <a:t>Organiser en paquet</a:t>
             </a:r>
             <a:endParaRPr lang="en-US" sz="1650" dirty="0"/>
           </a:p>
@@ -3461,13 +3431,13 @@
       </p:sp>
       <p:sp>
         <p:nvSpPr>
-          <p:cNvPr id="19" name="Text 13"/>
-          <p:cNvSpPr/>
-          <p:nvPr/>
-        </p:nvSpPr>
-        <p:spPr>
-          <a:xfrm>
-            <a:off x="1417320" y="5129784"/>
+          <p:cNvPr id="16" name="Text 10"/>
+          <p:cNvSpPr/>
+          <p:nvPr/>
+        </p:nvSpPr>
+        <p:spPr>
+          <a:xfrm>
+            <a:off x="1417320" y="4105656"/>
             <a:ext cx="5852160" cy="502920"/>
           </a:xfrm>
           <a:prstGeom prst="rect">
@@ -3492,6 +3462,128 @@
                 <a:ea typeface="Calibri" pitchFamily="34" charset="-122"/>
                 <a:cs typeface="Calibri" pitchFamily="34" charset="-120"/>
               </a:rPr>
+              <a:t>Le paquet fiscalite/ : dates et pénalités réutilisables partout.</a:t>
+            </a:r>
+            <a:endParaRPr lang="en-US" sz="1300" dirty="0"/>
+          </a:p>
+        </p:txBody>
+      </p:sp>
+      <p:sp>
+        <p:nvSpPr>
+          <p:cNvPr id="17" name="Shape 11"/>
+          <p:cNvSpPr/>
+          <p:nvPr/>
+        </p:nvSpPr>
+        <p:spPr>
+          <a:xfrm>
+            <a:off x="640080" y="4855464"/>
+            <a:ext cx="566928" cy="566928"/>
+          </a:xfrm>
+          <a:prstGeom prst="ellipse">
+            <a:avLst/>
+          </a:prstGeom>
+          <a:solidFill>
+            <a:srgbClr val="0E7A3D"/>
+          </a:solidFill>
+          <a:ln/>
+        </p:spPr>
+      </p:sp>
+      <p:pic>
+        <p:nvPicPr>
+          <p:cNvPr id="18" name="Image 4" descr="icons/box.png">    </p:cNvPr>
+          <p:cNvPicPr>
+            <a:picLocks noChangeAspect="1"/>
+          </p:cNvPicPr>
+          <p:nvPr/>
+        </p:nvPicPr>
+        <p:blipFill>
+          <a:blip r:embed="rId5"/>
+          <a:stretch>
+            <a:fillRect/>
+          </a:stretch>
+        </p:blipFill>
+        <p:spPr>
+          <a:xfrm>
+            <a:off x="787481" y="5002865"/>
+            <a:ext cx="272125" cy="272125"/>
+          </a:xfrm>
+          <a:prstGeom prst="rect">
+            <a:avLst/>
+          </a:prstGeom>
+        </p:spPr>
+      </p:pic>
+      <p:sp>
+        <p:nvSpPr>
+          <p:cNvPr id="19" name="Text 12"/>
+          <p:cNvSpPr/>
+          <p:nvPr/>
+        </p:nvSpPr>
+        <p:spPr>
+          <a:xfrm>
+            <a:off x="1417320" y="4800600"/>
+            <a:ext cx="5852160" cy="365760"/>
+          </a:xfrm>
+          <a:prstGeom prst="rect">
+            <a:avLst/>
+          </a:prstGeom>
+          <a:noFill/>
+          <a:ln/>
+        </p:spPr>
+        <p:txBody>
+          <a:bodyPr wrap="square" lIns="0" tIns="0" rIns="0" bIns="0" rtlCol="0" anchor="ctr"/>
+          <a:lstStyle/>
+          <a:p>
+            <a:pPr indent="0" marL="0">
+              <a:buNone/>
+            </a:pPr>
+            <a:r>
+              <a:rPr lang="en-US" sz="1650" b="1" dirty="0">
+                <a:solidFill>
+                  <a:srgbClr val="1C2A24"/>
+                </a:solidFill>
+                <a:latin typeface="Calibri" pitchFamily="34" charset="0"/>
+                <a:ea typeface="Calibri" pitchFamily="34" charset="-122"/>
+                <a:cs typeface="Calibri" pitchFamily="34" charset="-120"/>
+              </a:rPr>
+              <a:t>Comprendre uv</a:t>
+            </a:r>
+            <a:endParaRPr lang="en-US" sz="1650" dirty="0"/>
+          </a:p>
+        </p:txBody>
+      </p:sp>
+      <p:sp>
+        <p:nvSpPr>
+          <p:cNvPr id="20" name="Text 13"/>
+          <p:cNvSpPr/>
+          <p:nvPr/>
+        </p:nvSpPr>
+        <p:spPr>
+          <a:xfrm>
+            <a:off x="1417320" y="5129784"/>
+            <a:ext cx="5852160" cy="502920"/>
+          </a:xfrm>
+          <a:prstGeom prst="rect">
+            <a:avLst/>
+          </a:prstGeom>
+          <a:noFill/>
+          <a:ln/>
+        </p:spPr>
+        <p:txBody>
+          <a:bodyPr wrap="square" lIns="0" tIns="0" rIns="0" bIns="0" rtlCol="0" anchor="ctr"/>
+          <a:lstStyle/>
+          <a:p>
+            <a:pPr indent="0" marL="0">
+              <a:buNone/>
+            </a:pPr>
+            <a:r>
+              <a:rPr lang="en-US" sz="1300" dirty="0">
+                <a:solidFill>
+                  <a:srgbClr val="5C6B63"/>
+                </a:solidFill>
+                <a:latin typeface="Calibri" pitchFamily="34" charset="0"/>
+                <a:ea typeface="Calibri" pitchFamily="34" charset="-122"/>
+                <a:cs typeface="Calibri" pitchFamily="34" charset="-120"/>
+              </a:rPr>
               <a:t>pyproject.toml, uv sync, uv add — d’où viennent les bibliothèques.</a:t>
             </a:r>
             <a:endParaRPr lang="en-US" sz="1300" dirty="0"/>
@@ -3500,7 +3592,7 @@
       </p:sp>
       <p:sp>
         <p:nvSpPr>
-          <p:cNvPr id="20" name="Shape 14"/>
+          <p:cNvPr id="21" name="Shape 14"/>
           <p:cNvSpPr/>
           <p:nvPr/>
         </p:nvSpPr>
@@ -3515,14 +3607,14 @@
             </a:avLst>
           </a:prstGeom>
           <a:solidFill>
-            <a:srgbClr val="0D3325"/>
+            <a:srgbClr val="0A2E1A"/>
           </a:solidFill>
           <a:ln/>
         </p:spPr>
       </p:sp>
       <p:sp>
         <p:nvSpPr>
-          <p:cNvPr id="21" name="Text 15"/>
+          <p:cNvPr id="22" name="Text 15"/>
           <p:cNvSpPr/>
           <p:nvPr/>
         </p:nvSpPr>
@@ -3547,7 +3639,7 @@
             <a:r>
               <a:rPr lang="en-US" sz="1150" b="1" spc="200" kern="0" dirty="0">
                 <a:solidFill>
-                  <a:srgbClr val="C9A227"/>
+                  <a:srgbClr val="C79100"/>
                 </a:solidFill>
                 <a:latin typeface="Calibri" pitchFamily="34" charset="0"/>
                 <a:ea typeface="Calibri" pitchFamily="34" charset="-122"/>
@@ -3561,7 +3653,7 @@
       </p:sp>
       <p:sp>
         <p:nvSpPr>
-          <p:cNvPr id="22" name="Shape 16"/>
+          <p:cNvPr id="23" name="Shape 16"/>
           <p:cNvSpPr/>
           <p:nvPr/>
         </p:nvSpPr>
@@ -3574,14 +3666,14 @@
             <a:avLst/>
           </a:prstGeom>
           <a:solidFill>
-            <a:srgbClr val="14563C"/>
+            <a:srgbClr val="0E7A3D"/>
           </a:solidFill>
           <a:ln/>
         </p:spPr>
       </p:sp>
       <p:sp>
         <p:nvSpPr>
-          <p:cNvPr id="23" name="Text 17"/>
+          <p:cNvPr id="24" name="Text 17"/>
           <p:cNvSpPr/>
           <p:nvPr/>
         </p:nvSpPr>
@@ -3620,7 +3712,7 @@
       </p:sp>
       <p:sp>
         <p:nvSpPr>
-          <p:cNvPr id="24" name="Text 18"/>
+          <p:cNvPr id="25" name="Text 18"/>
           <p:cNvSpPr/>
           <p:nvPr/>
         </p:nvSpPr>
@@ -3659,7 +3751,7 @@
       </p:sp>
       <p:sp>
         <p:nvSpPr>
-          <p:cNvPr id="25" name="Shape 19"/>
+          <p:cNvPr id="26" name="Shape 19"/>
           <p:cNvSpPr/>
           <p:nvPr/>
         </p:nvSpPr>
@@ -3672,14 +3764,14 @@
             <a:avLst/>
           </a:prstGeom>
           <a:solidFill>
-            <a:srgbClr val="14563C"/>
+            <a:srgbClr val="0E7A3D"/>
           </a:solidFill>
           <a:ln/>
         </p:spPr>
       </p:sp>
       <p:sp>
         <p:nvSpPr>
-          <p:cNvPr id="26" name="Text 20"/>
+          <p:cNvPr id="27" name="Text 20"/>
           <p:cNvSpPr/>
           <p:nvPr/>
         </p:nvSpPr>
@@ -3718,7 +3810,7 @@
       </p:sp>
       <p:sp>
         <p:nvSpPr>
-          <p:cNvPr id="27" name="Text 21"/>
+          <p:cNvPr id="28" name="Text 21"/>
           <p:cNvSpPr/>
           <p:nvPr/>
         </p:nvSpPr>
@@ -3757,7 +3849,7 @@
       </p:sp>
       <p:sp>
         <p:nvSpPr>
-          <p:cNvPr id="28" name="Shape 22"/>
+          <p:cNvPr id="29" name="Shape 22"/>
           <p:cNvSpPr/>
           <p:nvPr/>
         </p:nvSpPr>
@@ -3770,14 +3862,14 @@
             <a:avLst/>
           </a:prstGeom>
           <a:solidFill>
-            <a:srgbClr val="C9A227"/>
+            <a:srgbClr val="C79100"/>
           </a:solidFill>
           <a:ln/>
         </p:spPr>
       </p:sp>
       <p:sp>
         <p:nvSpPr>
-          <p:cNvPr id="29" name="Text 23"/>
+          <p:cNvPr id="30" name="Text 23"/>
           <p:cNvSpPr/>
           <p:nvPr/>
         </p:nvSpPr>
@@ -3802,7 +3894,7 @@
             <a:r>
               <a:rPr lang="en-US" sz="1250" b="1" dirty="0">
                 <a:solidFill>
-                  <a:srgbClr val="0D3325"/>
+                  <a:srgbClr val="0A2E1A"/>
                 </a:solidFill>
                 <a:latin typeface="Calibri" pitchFamily="34" charset="0"/>
                 <a:ea typeface="Calibri" pitchFamily="34" charset="-122"/>
@@ -3816,7 +3908,7 @@
       </p:sp>
       <p:sp>
         <p:nvSpPr>
-          <p:cNvPr id="30" name="Text 24"/>
+          <p:cNvPr id="31" name="Text 24"/>
           <p:cNvSpPr/>
           <p:nvPr/>
         </p:nvSpPr>
@@ -3855,7 +3947,7 @@
       </p:sp>
       <p:sp>
         <p:nvSpPr>
-          <p:cNvPr id="31" name="Shape 25"/>
+          <p:cNvPr id="32" name="Shape 25"/>
           <p:cNvSpPr/>
           <p:nvPr/>
         </p:nvSpPr>
@@ -3868,14 +3960,14 @@
             <a:avLst/>
           </a:prstGeom>
           <a:solidFill>
-            <a:srgbClr val="14563C"/>
+            <a:srgbClr val="0E7A3D"/>
           </a:solidFill>
           <a:ln/>
         </p:spPr>
       </p:sp>
       <p:sp>
         <p:nvSpPr>
-          <p:cNvPr id="32" name="Text 26"/>
+          <p:cNvPr id="33" name="Text 26"/>
           <p:cNvSpPr/>
           <p:nvPr/>
         </p:nvSpPr>
@@ -3914,7 +4006,7 @@
       </p:sp>
       <p:sp>
         <p:nvSpPr>
-          <p:cNvPr id="33" name="Text 27"/>
+          <p:cNvPr id="34" name="Text 27"/>
           <p:cNvSpPr/>
           <p:nvPr/>
         </p:nvSpPr>
@@ -3953,7 +4045,7 @@
       </p:sp>
       <p:sp>
         <p:nvSpPr>
-          <p:cNvPr id="34" name="Shape 28"/>
+          <p:cNvPr id="35" name="Shape 28"/>
           <p:cNvSpPr/>
           <p:nvPr/>
         </p:nvSpPr>
@@ -3966,14 +4058,14 @@
             <a:avLst/>
           </a:prstGeom>
           <a:solidFill>
-            <a:srgbClr val="14563C"/>
+            <a:srgbClr val="0E7A3D"/>
           </a:solidFill>
           <a:ln/>
         </p:spPr>
       </p:sp>
       <p:sp>
         <p:nvSpPr>
-          <p:cNvPr id="35" name="Text 29"/>
+          <p:cNvPr id="36" name="Text 29"/>
           <p:cNvSpPr/>
           <p:nvPr/>
         </p:nvSpPr>
@@ -4012,7 +4104,7 @@
       </p:sp>
       <p:sp>
         <p:nvSpPr>
-          <p:cNvPr id="36" name="Text 30"/>
+          <p:cNvPr id="37" name="Text 30"/>
           <p:cNvSpPr/>
           <p:nvPr/>
         </p:nvSpPr>
@@ -4051,7 +4143,7 @@
       </p:sp>
       <p:sp>
         <p:nvSpPr>
-          <p:cNvPr id="37" name="Text 31"/>
+          <p:cNvPr id="38" name="Text 31"/>
           <p:cNvSpPr/>
           <p:nvPr/>
         </p:nvSpPr>
@@ -4076,7 +4168,7 @@
             <a:r>
               <a:rPr lang="en-US" sz="1050" i="1" dirty="0">
                 <a:solidFill>
-                  <a:srgbClr val="E8D48A"/>
+                  <a:srgbClr val="FCD116"/>
                 </a:solidFill>
                 <a:latin typeface="Calibri" pitchFamily="34" charset="0"/>
                 <a:ea typeface="Calibri" pitchFamily="34" charset="-122"/>
@@ -4129,7 +4221,7 @@
         <p:spPr>
           <a:xfrm>
             <a:off x="548640" y="384048"/>
-            <a:ext cx="10972800" cy="320040"/>
+            <a:ext cx="9601200" cy="320040"/>
           </a:xfrm>
           <a:prstGeom prst="rect">
             <a:avLst/>
@@ -4147,7 +4239,7 @@
             <a:r>
               <a:rPr lang="en-US" sz="1300" b="1" spc="200" kern="0" dirty="0">
                 <a:solidFill>
-                  <a:srgbClr val="C9A227"/>
+                  <a:srgbClr val="C79100"/>
                 </a:solidFill>
                 <a:latin typeface="Calibri" pitchFamily="34" charset="0"/>
                 <a:ea typeface="Calibri" pitchFamily="34" charset="-122"/>
@@ -4168,7 +4260,7 @@
         <p:spPr>
           <a:xfrm>
             <a:off x="548640" y="658368"/>
-            <a:ext cx="11064240" cy="731520"/>
+            <a:ext cx="9966960" cy="731520"/>
           </a:xfrm>
           <a:prstGeom prst="rect">
             <a:avLst/>
@@ -4186,7 +4278,7 @@
             <a:r>
               <a:rPr lang="en-US" sz="3400" b="1" dirty="0">
                 <a:solidFill>
-                  <a:srgbClr val="14563C"/>
+                  <a:srgbClr val="0E7A3D"/>
                 </a:solidFill>
                 <a:latin typeface="Cambria" pitchFamily="34" charset="0"/>
                 <a:ea typeface="Cambria" pitchFamily="34" charset="-122"/>
@@ -4198,29 +4290,9 @@
           </a:p>
         </p:txBody>
       </p:sp>
-      <p:sp>
-        <p:nvSpPr>
-          <p:cNvPr id="4" name="Shape 2"/>
-          <p:cNvSpPr/>
-          <p:nvPr/>
-        </p:nvSpPr>
-        <p:spPr>
-          <a:xfrm>
-            <a:off x="640080" y="1874520"/>
-            <a:ext cx="411480" cy="411480"/>
-          </a:xfrm>
-          <a:prstGeom prst="ellipse">
-            <a:avLst/>
-          </a:prstGeom>
-          <a:solidFill>
-            <a:srgbClr val="1E7A50"/>
-          </a:solidFill>
-          <a:ln/>
-        </p:spPr>
-      </p:sp>
       <p:pic>
         <p:nvPicPr>
-          <p:cNvPr id="5" name="Image 0" descr="icons/check.png">    </p:cNvPr>
+          <p:cNvPr id="4" name="Image 0" descr="logo-dgi.png">    </p:cNvPr>
           <p:cNvPicPr>
             <a:picLocks noChangeAspect="1"/>
           </p:cNvPicPr>
@@ -4234,8 +4306,8 @@
         </p:blipFill>
         <p:spPr>
           <a:xfrm>
-            <a:off x="747065" y="1981505"/>
-            <a:ext cx="197510" cy="197510"/>
+            <a:off x="10744200" y="384048"/>
+            <a:ext cx="1051560" cy="795528"/>
           </a:xfrm>
           <a:prstGeom prst="rect">
             <a:avLst/>
@@ -4244,89 +4316,27 @@
       </p:pic>
       <p:sp>
         <p:nvSpPr>
-          <p:cNvPr id="6" name="Text 3"/>
-          <p:cNvSpPr/>
-          <p:nvPr/>
-        </p:nvSpPr>
-        <p:spPr>
-          <a:xfrm>
-            <a:off x="1234440" y="1801368"/>
-            <a:ext cx="4800600" cy="960120"/>
-          </a:xfrm>
-          <a:prstGeom prst="rect">
-            <a:avLst/>
-          </a:prstGeom>
-          <a:noFill/>
-          <a:ln/>
-        </p:spPr>
-        <p:txBody>
-          <a:bodyPr wrap="square" lIns="0" tIns="0" rIns="0" bIns="0" rtlCol="0" anchor="ctr"/>
-          <a:lstStyle/>
-          <a:p>
-            <a:pPr indent="0" marL="0">
-              <a:lnSpc>
-                <a:spcPct val="105000"/>
-              </a:lnSpc>
-              <a:buNone/>
-            </a:pPr>
-            <a:r>
-              <a:rPr lang="en-US" sz="1450" b="1" dirty="0">
-                <a:solidFill>
-                  <a:srgbClr val="1C2A24"/>
-                </a:solidFill>
-                <a:latin typeface="Calibri" pitchFamily="34" charset="0"/>
-                <a:ea typeface="Calibri" pitchFamily="34" charset="-122"/>
-                <a:cs typeface="Calibri" pitchFamily="34" charset="-120"/>
-              </a:rPr>
-              <a:t>pathlib.Path, pas de chaînes collées</a:t>
-            </a:r>
-            <a:endParaRPr lang="en-US" sz="1450" dirty="0"/>
-          </a:p>
-          <a:p>
-            <a:pPr indent="0" marL="0">
-              <a:lnSpc>
-                <a:spcPct val="105000"/>
-              </a:lnSpc>
-              <a:buNone/>
-            </a:pPr>
-            <a:r>
-              <a:rPr lang="en-US" sz="1250" dirty="0">
-                <a:solidFill>
-                  <a:srgbClr val="5C6B63"/>
-                </a:solidFill>
-                <a:latin typeface="Calibri" pitchFamily="34" charset="0"/>
-                <a:ea typeface="Calibri" pitchFamily="34" charset="-122"/>
-                <a:cs typeface="Calibri" pitchFamily="34" charset="-120"/>
-              </a:rPr>
-              <a:t>DATA / "regions.csv" — portable Windows et Linux.</a:t>
-            </a:r>
-            <a:endParaRPr lang="en-US" sz="1450" dirty="0"/>
-          </a:p>
-        </p:txBody>
-      </p:sp>
-      <p:sp>
-        <p:nvSpPr>
-          <p:cNvPr id="7" name="Shape 4"/>
-          <p:cNvSpPr/>
-          <p:nvPr/>
-        </p:nvSpPr>
-        <p:spPr>
-          <a:xfrm>
-            <a:off x="640080" y="2926080"/>
+          <p:cNvPr id="5" name="Shape 2"/>
+          <p:cNvSpPr/>
+          <p:nvPr/>
+        </p:nvSpPr>
+        <p:spPr>
+          <a:xfrm>
+            <a:off x="640080" y="1874520"/>
             <a:ext cx="411480" cy="411480"/>
           </a:xfrm>
           <a:prstGeom prst="ellipse">
             <a:avLst/>
           </a:prstGeom>
           <a:solidFill>
-            <a:srgbClr val="1E7A50"/>
+            <a:srgbClr val="2E9E4F"/>
           </a:solidFill>
           <a:ln/>
         </p:spPr>
       </p:sp>
       <p:pic>
         <p:nvPicPr>
-          <p:cNvPr id="8" name="Image 1" descr="icons/check.png">    </p:cNvPr>
+          <p:cNvPr id="6" name="Image 1" descr="icons/check.png">    </p:cNvPr>
           <p:cNvPicPr>
             <a:picLocks noChangeAspect="1"/>
           </p:cNvPicPr>
@@ -4340,7 +4350,7 @@
         </p:blipFill>
         <p:spPr>
           <a:xfrm>
-            <a:off x="747065" y="3033065"/>
+            <a:off x="747065" y="1981505"/>
             <a:ext cx="197510" cy="197510"/>
           </a:xfrm>
           <a:prstGeom prst="rect">
@@ -4350,13 +4360,13 @@
       </p:pic>
       <p:sp>
         <p:nvSpPr>
-          <p:cNvPr id="9" name="Text 5"/>
-          <p:cNvSpPr/>
-          <p:nvPr/>
-        </p:nvSpPr>
-        <p:spPr>
-          <a:xfrm>
-            <a:off x="1234440" y="2852928"/>
+          <p:cNvPr id="7" name="Text 3"/>
+          <p:cNvSpPr/>
+          <p:nvPr/>
+        </p:nvSpPr>
+        <p:spPr>
+          <a:xfrm>
+            <a:off x="1234440" y="1801368"/>
             <a:ext cx="4800600" cy="960120"/>
           </a:xfrm>
           <a:prstGeom prst="rect">
@@ -4384,7 +4394,7 @@
                 <a:ea typeface="Calibri" pitchFamily="34" charset="-122"/>
                 <a:cs typeface="Calibri" pitchFamily="34" charset="-120"/>
               </a:rPr>
-              <a:t>with ferme toujours</a:t>
+              <a:t>pathlib.Path, pas de chaînes collées</a:t>
             </a:r>
             <a:endParaRPr lang="en-US" sz="1450" dirty="0"/>
           </a:p>
@@ -4404,7 +4414,7 @@
                 <a:ea typeface="Calibri" pitchFamily="34" charset="-122"/>
                 <a:cs typeface="Calibri" pitchFamily="34" charset="-120"/>
               </a:rPr>
-              <a:t>Même en cas d’erreur au milieu — plus de fichiers zombies.</a:t>
+              <a:t>DATA / "regions.csv" — portable Windows et Linux.</a:t>
             </a:r>
             <a:endParaRPr lang="en-US" sz="1450" dirty="0"/>
           </a:p>
@@ -4412,27 +4422,27 @@
       </p:sp>
       <p:sp>
         <p:nvSpPr>
-          <p:cNvPr id="10" name="Shape 6"/>
-          <p:cNvSpPr/>
-          <p:nvPr/>
-        </p:nvSpPr>
-        <p:spPr>
-          <a:xfrm>
-            <a:off x="640080" y="3977640"/>
+          <p:cNvPr id="8" name="Shape 4"/>
+          <p:cNvSpPr/>
+          <p:nvPr/>
+        </p:nvSpPr>
+        <p:spPr>
+          <a:xfrm>
+            <a:off x="640080" y="2926080"/>
             <a:ext cx="411480" cy="411480"/>
           </a:xfrm>
           <a:prstGeom prst="ellipse">
             <a:avLst/>
           </a:prstGeom>
           <a:solidFill>
-            <a:srgbClr val="1E7A50"/>
+            <a:srgbClr val="2E9E4F"/>
           </a:solidFill>
           <a:ln/>
         </p:spPr>
       </p:sp>
       <p:pic>
         <p:nvPicPr>
-          <p:cNvPr id="11" name="Image 2" descr="icons/check.png">    </p:cNvPr>
+          <p:cNvPr id="9" name="Image 2" descr="icons/check.png">    </p:cNvPr>
           <p:cNvPicPr>
             <a:picLocks noChangeAspect="1"/>
           </p:cNvPicPr>
@@ -4446,7 +4456,7 @@
         </p:blipFill>
         <p:spPr>
           <a:xfrm>
-            <a:off x="747065" y="4084625"/>
+            <a:off x="747065" y="3033065"/>
             <a:ext cx="197510" cy="197510"/>
           </a:xfrm>
           <a:prstGeom prst="rect">
@@ -4456,13 +4466,13 @@
       </p:pic>
       <p:sp>
         <p:nvSpPr>
-          <p:cNvPr id="12" name="Text 7"/>
-          <p:cNvSpPr/>
-          <p:nvPr/>
-        </p:nvSpPr>
-        <p:spPr>
-          <a:xfrm>
-            <a:off x="1234440" y="3904488"/>
+          <p:cNvPr id="10" name="Text 5"/>
+          <p:cNvSpPr/>
+          <p:nvPr/>
+        </p:nvSpPr>
+        <p:spPr>
+          <a:xfrm>
+            <a:off x="1234440" y="2852928"/>
             <a:ext cx="4800600" cy="960120"/>
           </a:xfrm>
           <a:prstGeom prst="rect">
@@ -4490,7 +4500,7 @@
                 <a:ea typeface="Calibri" pitchFamily="34" charset="-122"/>
                 <a:cs typeface="Calibri" pitchFamily="34" charset="-120"/>
               </a:rPr>
-              <a:t>encoding="utf-8", toujours</a:t>
+              <a:t>with ferme toujours</a:t>
             </a:r>
             <a:endParaRPr lang="en-US" sz="1450" dirty="0"/>
           </a:p>
@@ -4510,7 +4520,7 @@
                 <a:ea typeface="Calibri" pitchFamily="34" charset="-122"/>
                 <a:cs typeface="Calibri" pitchFamily="34" charset="-120"/>
               </a:rPr>
-              <a:t>Sinon les accents cassent selon le poste. Non négociable.</a:t>
+              <a:t>Même en cas d’erreur au milieu — plus de fichiers zombies.</a:t>
             </a:r>
             <a:endParaRPr lang="en-US" sz="1450" dirty="0"/>
           </a:p>
@@ -4518,27 +4528,27 @@
       </p:sp>
       <p:sp>
         <p:nvSpPr>
-          <p:cNvPr id="13" name="Shape 8"/>
-          <p:cNvSpPr/>
-          <p:nvPr/>
-        </p:nvSpPr>
-        <p:spPr>
-          <a:xfrm>
-            <a:off x="640080" y="5029200"/>
+          <p:cNvPr id="11" name="Shape 6"/>
+          <p:cNvSpPr/>
+          <p:nvPr/>
+        </p:nvSpPr>
+        <p:spPr>
+          <a:xfrm>
+            <a:off x="640080" y="3977640"/>
             <a:ext cx="411480" cy="411480"/>
           </a:xfrm>
           <a:prstGeom prst="ellipse">
             <a:avLst/>
           </a:prstGeom>
           <a:solidFill>
-            <a:srgbClr val="1E7A50"/>
+            <a:srgbClr val="2E9E4F"/>
           </a:solidFill>
           <a:ln/>
         </p:spPr>
       </p:sp>
       <p:pic>
         <p:nvPicPr>
-          <p:cNvPr id="14" name="Image 3" descr="icons/check.png">    </p:cNvPr>
+          <p:cNvPr id="12" name="Image 3" descr="icons/check.png">    </p:cNvPr>
           <p:cNvPicPr>
             <a:picLocks noChangeAspect="1"/>
           </p:cNvPicPr>
@@ -4552,7 +4562,7 @@
         </p:blipFill>
         <p:spPr>
           <a:xfrm>
-            <a:off x="747065" y="5136185"/>
+            <a:off x="747065" y="4084625"/>
             <a:ext cx="197510" cy="197510"/>
           </a:xfrm>
           <a:prstGeom prst="rect">
@@ -4562,13 +4572,13 @@
       </p:pic>
       <p:sp>
         <p:nvSpPr>
-          <p:cNvPr id="15" name="Text 9"/>
-          <p:cNvSpPr/>
-          <p:nvPr/>
-        </p:nvSpPr>
-        <p:spPr>
-          <a:xfrm>
-            <a:off x="1234440" y="4956048"/>
+          <p:cNvPr id="13" name="Text 7"/>
+          <p:cNvSpPr/>
+          <p:nvPr/>
+        </p:nvSpPr>
+        <p:spPr>
+          <a:xfrm>
+            <a:off x="1234440" y="3904488"/>
             <a:ext cx="4800600" cy="960120"/>
           </a:xfrm>
           <a:prstGeom prst="rect">
@@ -4596,7 +4606,7 @@
                 <a:ea typeface="Calibri" pitchFamily="34" charset="-122"/>
                 <a:cs typeface="Calibri" pitchFamily="34" charset="-120"/>
               </a:rPr>
-              <a:t>Chemins relatifs au script</a:t>
+              <a:t>encoding="utf-8", toujours</a:t>
             </a:r>
             <a:endParaRPr lang="en-US" sz="1450" dirty="0"/>
           </a:p>
@@ -4616,6 +4626,112 @@
                 <a:ea typeface="Calibri" pitchFamily="34" charset="-122"/>
                 <a:cs typeface="Calibri" pitchFamily="34" charset="-120"/>
               </a:rPr>
+              <a:t>Sinon les accents cassent selon le poste. Non négociable.</a:t>
+            </a:r>
+            <a:endParaRPr lang="en-US" sz="1450" dirty="0"/>
+          </a:p>
+        </p:txBody>
+      </p:sp>
+      <p:sp>
+        <p:nvSpPr>
+          <p:cNvPr id="14" name="Shape 8"/>
+          <p:cNvSpPr/>
+          <p:nvPr/>
+        </p:nvSpPr>
+        <p:spPr>
+          <a:xfrm>
+            <a:off x="640080" y="5029200"/>
+            <a:ext cx="411480" cy="411480"/>
+          </a:xfrm>
+          <a:prstGeom prst="ellipse">
+            <a:avLst/>
+          </a:prstGeom>
+          <a:solidFill>
+            <a:srgbClr val="2E9E4F"/>
+          </a:solidFill>
+          <a:ln/>
+        </p:spPr>
+      </p:sp>
+      <p:pic>
+        <p:nvPicPr>
+          <p:cNvPr id="15" name="Image 4" descr="icons/check.png">    </p:cNvPr>
+          <p:cNvPicPr>
+            <a:picLocks noChangeAspect="1"/>
+          </p:cNvPicPr>
+          <p:nvPr/>
+        </p:nvPicPr>
+        <p:blipFill>
+          <a:blip r:embed="rId5"/>
+          <a:stretch>
+            <a:fillRect/>
+          </a:stretch>
+        </p:blipFill>
+        <p:spPr>
+          <a:xfrm>
+            <a:off x="747065" y="5136185"/>
+            <a:ext cx="197510" cy="197510"/>
+          </a:xfrm>
+          <a:prstGeom prst="rect">
+            <a:avLst/>
+          </a:prstGeom>
+        </p:spPr>
+      </p:pic>
+      <p:sp>
+        <p:nvSpPr>
+          <p:cNvPr id="16" name="Text 9"/>
+          <p:cNvSpPr/>
+          <p:nvPr/>
+        </p:nvSpPr>
+        <p:spPr>
+          <a:xfrm>
+            <a:off x="1234440" y="4956048"/>
+            <a:ext cx="4800600" cy="960120"/>
+          </a:xfrm>
+          <a:prstGeom prst="rect">
+            <a:avLst/>
+          </a:prstGeom>
+          <a:noFill/>
+          <a:ln/>
+        </p:spPr>
+        <p:txBody>
+          <a:bodyPr wrap="square" lIns="0" tIns="0" rIns="0" bIns="0" rtlCol="0" anchor="ctr"/>
+          <a:lstStyle/>
+          <a:p>
+            <a:pPr indent="0" marL="0">
+              <a:lnSpc>
+                <a:spcPct val="105000"/>
+              </a:lnSpc>
+              <a:buNone/>
+            </a:pPr>
+            <a:r>
+              <a:rPr lang="en-US" sz="1450" b="1" dirty="0">
+                <a:solidFill>
+                  <a:srgbClr val="1C2A24"/>
+                </a:solidFill>
+                <a:latin typeface="Calibri" pitchFamily="34" charset="0"/>
+                <a:ea typeface="Calibri" pitchFamily="34" charset="-122"/>
+                <a:cs typeface="Calibri" pitchFamily="34" charset="-120"/>
+              </a:rPr>
+              <a:t>Chemins relatifs au script</a:t>
+            </a:r>
+            <a:endParaRPr lang="en-US" sz="1450" dirty="0"/>
+          </a:p>
+          <a:p>
+            <a:pPr indent="0" marL="0">
+              <a:lnSpc>
+                <a:spcPct val="105000"/>
+              </a:lnSpc>
+              <a:buNone/>
+            </a:pPr>
+            <a:r>
+              <a:rPr lang="en-US" sz="1250" dirty="0">
+                <a:solidFill>
+                  <a:srgbClr val="5C6B63"/>
+                </a:solidFill>
+                <a:latin typeface="Calibri" pitchFamily="34" charset="0"/>
+                <a:ea typeface="Calibri" pitchFamily="34" charset="-122"/>
+                <a:cs typeface="Calibri" pitchFamily="34" charset="-120"/>
+              </a:rPr>
               <a:t>Path(__file__).parent : le script marche d’où qu’on le lance.</a:t>
             </a:r>
             <a:endParaRPr lang="en-US" sz="1450" dirty="0"/>
@@ -4624,7 +4740,7 @@
       </p:sp>
       <p:sp>
         <p:nvSpPr>
-          <p:cNvPr id="16" name="Shape 10"/>
+          <p:cNvPr id="17" name="Shape 10"/>
           <p:cNvSpPr/>
           <p:nvPr/>
         </p:nvSpPr>
@@ -4639,14 +4755,14 @@
             </a:avLst>
           </a:prstGeom>
           <a:solidFill>
-            <a:srgbClr val="10241B"/>
+            <a:srgbClr val="0F2418"/>
           </a:solidFill>
           <a:ln/>
         </p:spPr>
       </p:sp>
       <p:sp>
         <p:nvSpPr>
-          <p:cNvPr id="17" name="Shape 11"/>
+          <p:cNvPr id="18" name="Shape 11"/>
           <p:cNvSpPr/>
           <p:nvPr/>
         </p:nvSpPr>
@@ -4666,7 +4782,7 @@
       </p:sp>
       <p:sp>
         <p:nvSpPr>
-          <p:cNvPr id="18" name="Shape 12"/>
+          <p:cNvPr id="19" name="Shape 12"/>
           <p:cNvSpPr/>
           <p:nvPr/>
         </p:nvSpPr>
@@ -4679,14 +4795,14 @@
             <a:avLst/>
           </a:prstGeom>
           <a:solidFill>
-            <a:srgbClr val="C9A227"/>
+            <a:srgbClr val="C79100"/>
           </a:solidFill>
           <a:ln/>
         </p:spPr>
       </p:sp>
       <p:sp>
         <p:nvSpPr>
-          <p:cNvPr id="19" name="Shape 13"/>
+          <p:cNvPr id="20" name="Shape 13"/>
           <p:cNvSpPr/>
           <p:nvPr/>
         </p:nvSpPr>
@@ -4706,7 +4822,7 @@
       </p:sp>
       <p:sp>
         <p:nvSpPr>
-          <p:cNvPr id="20" name="Text 14"/>
+          <p:cNvPr id="21" name="Text 14"/>
           <p:cNvSpPr/>
           <p:nvPr/>
         </p:nvSpPr>
@@ -4745,7 +4861,7 @@
       </p:sp>
       <p:sp>
         <p:nvSpPr>
-          <p:cNvPr id="21" name="Text 15"/>
+          <p:cNvPr id="22" name="Text 15"/>
           <p:cNvSpPr/>
           <p:nvPr/>
         </p:nvSpPr>
@@ -5349,7 +5465,7 @@
         <p:spPr>
           <a:xfrm>
             <a:off x="548640" y="384048"/>
-            <a:ext cx="10972800" cy="320040"/>
+            <a:ext cx="9601200" cy="320040"/>
           </a:xfrm>
           <a:prstGeom prst="rect">
             <a:avLst/>
@@ -5367,7 +5483,7 @@
             <a:r>
               <a:rPr lang="en-US" sz="1300" b="1" spc="200" kern="0" dirty="0">
                 <a:solidFill>
-                  <a:srgbClr val="C9A227"/>
+                  <a:srgbClr val="C79100"/>
                 </a:solidFill>
                 <a:latin typeface="Calibri" pitchFamily="34" charset="0"/>
                 <a:ea typeface="Calibri" pitchFamily="34" charset="-122"/>
@@ -5388,7 +5504,7 @@
         <p:spPr>
           <a:xfrm>
             <a:off x="548640" y="658368"/>
-            <a:ext cx="11064240" cy="731520"/>
+            <a:ext cx="9966960" cy="731520"/>
           </a:xfrm>
           <a:prstGeom prst="rect">
             <a:avLst/>
@@ -5406,7 +5522,7 @@
             <a:r>
               <a:rPr lang="en-US" sz="3400" b="1" dirty="0">
                 <a:solidFill>
-                  <a:srgbClr val="14563C"/>
+                  <a:srgbClr val="0E7A3D"/>
                 </a:solidFill>
                 <a:latin typeface="Cambria" pitchFamily="34" charset="0"/>
                 <a:ea typeface="Cambria" pitchFamily="34" charset="-122"/>
@@ -5418,29 +5534,9 @@
           </a:p>
         </p:txBody>
       </p:sp>
-      <p:sp>
-        <p:nvSpPr>
-          <p:cNvPr id="4" name="Shape 2"/>
-          <p:cNvSpPr/>
-          <p:nvPr/>
-        </p:nvSpPr>
-        <p:spPr>
-          <a:xfrm>
-            <a:off x="640080" y="1874520"/>
-            <a:ext cx="411480" cy="411480"/>
-          </a:xfrm>
-          <a:prstGeom prst="ellipse">
-            <a:avLst/>
-          </a:prstGeom>
-          <a:solidFill>
-            <a:srgbClr val="1E7A50"/>
-          </a:solidFill>
-          <a:ln/>
-        </p:spPr>
-      </p:sp>
       <p:pic>
         <p:nvPicPr>
-          <p:cNvPr id="5" name="Image 0" descr="icons/check.png">    </p:cNvPr>
+          <p:cNvPr id="4" name="Image 0" descr="logo-dgi.png">    </p:cNvPr>
           <p:cNvPicPr>
             <a:picLocks noChangeAspect="1"/>
           </p:cNvPicPr>
@@ -5454,8 +5550,8 @@
         </p:blipFill>
         <p:spPr>
           <a:xfrm>
-            <a:off x="747065" y="1981505"/>
-            <a:ext cx="197510" cy="197510"/>
+            <a:off x="10744200" y="384048"/>
+            <a:ext cx="1051560" cy="795528"/>
           </a:xfrm>
           <a:prstGeom prst="rect">
             <a:avLst/>
@@ -5464,89 +5560,27 @@
       </p:pic>
       <p:sp>
         <p:nvSpPr>
-          <p:cNvPr id="6" name="Text 3"/>
-          <p:cNvSpPr/>
-          <p:nvPr/>
-        </p:nvSpPr>
-        <p:spPr>
-          <a:xfrm>
-            <a:off x="1234440" y="1801368"/>
-            <a:ext cx="4800600" cy="960120"/>
-          </a:xfrm>
-          <a:prstGeom prst="rect">
-            <a:avLst/>
-          </a:prstGeom>
-          <a:noFill/>
-          <a:ln/>
-        </p:spPr>
-        <p:txBody>
-          <a:bodyPr wrap="square" lIns="0" tIns="0" rIns="0" bIns="0" rtlCol="0" anchor="ctr"/>
-          <a:lstStyle/>
-          <a:p>
-            <a:pPr indent="0" marL="0">
-              <a:lnSpc>
-                <a:spcPct val="105000"/>
-              </a:lnSpc>
-              <a:buNone/>
-            </a:pPr>
-            <a:r>
-              <a:rPr lang="en-US" sz="1450" b="1" dirty="0">
-                <a:solidFill>
-                  <a:srgbClr val="1C2A24"/>
-                </a:solidFill>
-                <a:latin typeface="Calibri" pitchFamily="34" charset="0"/>
-                <a:ea typeface="Calibri" pitchFamily="34" charset="-122"/>
-                <a:cs typeface="Calibri" pitchFamily="34" charset="-120"/>
-              </a:rPr>
-              <a:t>csv.DictReader</a:t>
-            </a:r>
-            <a:endParaRPr lang="en-US" sz="1450" dirty="0"/>
-          </a:p>
-          <a:p>
-            <a:pPr indent="0" marL="0">
-              <a:lnSpc>
-                <a:spcPct val="105000"/>
-              </a:lnSpc>
-              <a:buNone/>
-            </a:pPr>
-            <a:r>
-              <a:rPr lang="en-US" sz="1250" dirty="0">
-                <a:solidFill>
-                  <a:srgbClr val="5C6B63"/>
-                </a:solidFill>
-                <a:latin typeface="Calibri" pitchFamily="34" charset="0"/>
-                <a:ea typeface="Calibri" pitchFamily="34" charset="-122"/>
-                <a:cs typeface="Calibri" pitchFamily="34" charset="-120"/>
-              </a:rPr>
-              <a:t>La 1re ligne donne les clés : ligne["nif"], ligne["code_region"].</a:t>
-            </a:r>
-            <a:endParaRPr lang="en-US" sz="1450" dirty="0"/>
-          </a:p>
-        </p:txBody>
-      </p:sp>
-      <p:sp>
-        <p:nvSpPr>
-          <p:cNvPr id="7" name="Shape 4"/>
-          <p:cNvSpPr/>
-          <p:nvPr/>
-        </p:nvSpPr>
-        <p:spPr>
-          <a:xfrm>
-            <a:off x="640080" y="2926080"/>
+          <p:cNvPr id="5" name="Shape 2"/>
+          <p:cNvSpPr/>
+          <p:nvPr/>
+        </p:nvSpPr>
+        <p:spPr>
+          <a:xfrm>
+            <a:off x="640080" y="1874520"/>
             <a:ext cx="411480" cy="411480"/>
           </a:xfrm>
           <a:prstGeom prst="ellipse">
             <a:avLst/>
           </a:prstGeom>
           <a:solidFill>
-            <a:srgbClr val="1E7A50"/>
+            <a:srgbClr val="2E9E4F"/>
           </a:solidFill>
           <a:ln/>
         </p:spPr>
       </p:sp>
       <p:pic>
         <p:nvPicPr>
-          <p:cNvPr id="8" name="Image 1" descr="icons/check.png">    </p:cNvPr>
+          <p:cNvPr id="6" name="Image 1" descr="icons/check.png">    </p:cNvPr>
           <p:cNvPicPr>
             <a:picLocks noChangeAspect="1"/>
           </p:cNvPicPr>
@@ -5560,7 +5594,7 @@
         </p:blipFill>
         <p:spPr>
           <a:xfrm>
-            <a:off x="747065" y="3033065"/>
+            <a:off x="747065" y="1981505"/>
             <a:ext cx="197510" cy="197510"/>
           </a:xfrm>
           <a:prstGeom prst="rect">
@@ -5570,13 +5604,13 @@
       </p:pic>
       <p:sp>
         <p:nvSpPr>
-          <p:cNvPr id="9" name="Text 5"/>
-          <p:cNvSpPr/>
-          <p:nvPr/>
-        </p:nvSpPr>
-        <p:spPr>
-          <a:xfrm>
-            <a:off x="1234440" y="2852928"/>
+          <p:cNvPr id="7" name="Text 3"/>
+          <p:cNvSpPr/>
+          <p:nvPr/>
+        </p:nvSpPr>
+        <p:spPr>
+          <a:xfrm>
+            <a:off x="1234440" y="1801368"/>
             <a:ext cx="4800600" cy="960120"/>
           </a:xfrm>
           <a:prstGeom prst="rect">
@@ -5604,7 +5638,7 @@
                 <a:ea typeface="Calibri" pitchFamily="34" charset="-122"/>
                 <a:cs typeface="Calibri" pitchFamily="34" charset="-120"/>
               </a:rPr>
-              <a:t>Tout arrive en str</a:t>
+              <a:t>csv.DictReader</a:t>
             </a:r>
             <a:endParaRPr lang="en-US" sz="1450" dirty="0"/>
           </a:p>
@@ -5624,7 +5658,7 @@
                 <a:ea typeface="Calibri" pitchFamily="34" charset="-122"/>
                 <a:cs typeface="Calibri" pitchFamily="34" charset="-120"/>
               </a:rPr>
-              <a:t>Les montants se convertissent avec int() — et ça peut planter (cf. module 06).</a:t>
+              <a:t>La 1re ligne donne les clés : ligne["nif"], ligne["code_region"].</a:t>
             </a:r>
             <a:endParaRPr lang="en-US" sz="1450" dirty="0"/>
           </a:p>
@@ -5632,27 +5666,27 @@
       </p:sp>
       <p:sp>
         <p:nvSpPr>
-          <p:cNvPr id="10" name="Shape 6"/>
-          <p:cNvSpPr/>
-          <p:nvPr/>
-        </p:nvSpPr>
-        <p:spPr>
-          <a:xfrm>
-            <a:off x="640080" y="3977640"/>
+          <p:cNvPr id="8" name="Shape 4"/>
+          <p:cNvSpPr/>
+          <p:nvPr/>
+        </p:nvSpPr>
+        <p:spPr>
+          <a:xfrm>
+            <a:off x="640080" y="2926080"/>
             <a:ext cx="411480" cy="411480"/>
           </a:xfrm>
           <a:prstGeom prst="ellipse">
             <a:avLst/>
           </a:prstGeom>
           <a:solidFill>
-            <a:srgbClr val="1E7A50"/>
+            <a:srgbClr val="2E9E4F"/>
           </a:solidFill>
           <a:ln/>
         </p:spPr>
       </p:sp>
       <p:pic>
         <p:nvPicPr>
-          <p:cNvPr id="11" name="Image 2" descr="icons/check.png">    </p:cNvPr>
+          <p:cNvPr id="9" name="Image 2" descr="icons/check.png">    </p:cNvPr>
           <p:cNvPicPr>
             <a:picLocks noChangeAspect="1"/>
           </p:cNvPicPr>
@@ -5666,7 +5700,7 @@
         </p:blipFill>
         <p:spPr>
           <a:xfrm>
-            <a:off x="747065" y="4084625"/>
+            <a:off x="747065" y="3033065"/>
             <a:ext cx="197510" cy="197510"/>
           </a:xfrm>
           <a:prstGeom prst="rect">
@@ -5676,13 +5710,13 @@
       </p:pic>
       <p:sp>
         <p:nvSpPr>
-          <p:cNvPr id="12" name="Text 7"/>
-          <p:cNvSpPr/>
-          <p:nvPr/>
-        </p:nvSpPr>
-        <p:spPr>
-          <a:xfrm>
-            <a:off x="1234440" y="3904488"/>
+          <p:cNvPr id="10" name="Text 5"/>
+          <p:cNvSpPr/>
+          <p:nvPr/>
+        </p:nvSpPr>
+        <p:spPr>
+          <a:xfrm>
+            <a:off x="1234440" y="2852928"/>
             <a:ext cx="4800600" cy="960120"/>
           </a:xfrm>
           <a:prstGeom prst="rect">
@@ -5710,7 +5744,7 @@
                 <a:ea typeface="Calibri" pitchFamily="34" charset="-122"/>
                 <a:cs typeface="Calibri" pitchFamily="34" charset="-120"/>
               </a:rPr>
-              <a:t>DictWriter pour produire</a:t>
+              <a:t>Tout arrive en str</a:t>
             </a:r>
             <a:endParaRPr lang="en-US" sz="1450" dirty="0"/>
           </a:p>
@@ -5730,7 +5764,7 @@
                 <a:ea typeface="Calibri" pitchFamily="34" charset="-122"/>
                 <a:cs typeface="Calibri" pitchFamily="34" charset="-120"/>
               </a:rPr>
-              <a:t>writeheader() puis writerow(dict) — l’extrait Conakry du TP.</a:t>
+              <a:t>Les montants se convertissent avec int() — et ça peut planter (cf. module 06).</a:t>
             </a:r>
             <a:endParaRPr lang="en-US" sz="1450" dirty="0"/>
           </a:p>
@@ -5738,27 +5772,27 @@
       </p:sp>
       <p:sp>
         <p:nvSpPr>
-          <p:cNvPr id="13" name="Shape 8"/>
-          <p:cNvSpPr/>
-          <p:nvPr/>
-        </p:nvSpPr>
-        <p:spPr>
-          <a:xfrm>
-            <a:off x="640080" y="5029200"/>
+          <p:cNvPr id="11" name="Shape 6"/>
+          <p:cNvSpPr/>
+          <p:nvPr/>
+        </p:nvSpPr>
+        <p:spPr>
+          <a:xfrm>
+            <a:off x="640080" y="3977640"/>
             <a:ext cx="411480" cy="411480"/>
           </a:xfrm>
           <a:prstGeom prst="ellipse">
             <a:avLst/>
           </a:prstGeom>
           <a:solidFill>
-            <a:srgbClr val="1E7A50"/>
+            <a:srgbClr val="2E9E4F"/>
           </a:solidFill>
           <a:ln/>
         </p:spPr>
       </p:sp>
       <p:pic>
         <p:nvPicPr>
-          <p:cNvPr id="14" name="Image 3" descr="icons/check.png">    </p:cNvPr>
+          <p:cNvPr id="12" name="Image 3" descr="icons/check.png">    </p:cNvPr>
           <p:cNvPicPr>
             <a:picLocks noChangeAspect="1"/>
           </p:cNvPicPr>
@@ -5772,7 +5806,7 @@
         </p:blipFill>
         <p:spPr>
           <a:xfrm>
-            <a:off x="747065" y="5136185"/>
+            <a:off x="747065" y="4084625"/>
             <a:ext cx="197510" cy="197510"/>
           </a:xfrm>
           <a:prstGeom prst="rect">
@@ -5782,13 +5816,13 @@
       </p:pic>
       <p:sp>
         <p:nvSpPr>
-          <p:cNvPr id="15" name="Text 9"/>
-          <p:cNvSpPr/>
-          <p:nvPr/>
-        </p:nvSpPr>
-        <p:spPr>
-          <a:xfrm>
-            <a:off x="1234440" y="4956048"/>
+          <p:cNvPr id="13" name="Text 7"/>
+          <p:cNvSpPr/>
+          <p:nvPr/>
+        </p:nvSpPr>
+        <p:spPr>
+          <a:xfrm>
+            <a:off x="1234440" y="3904488"/>
             <a:ext cx="4800600" cy="960120"/>
           </a:xfrm>
           <a:prstGeom prst="rect">
@@ -5816,7 +5850,7 @@
                 <a:ea typeface="Calibri" pitchFamily="34" charset="-122"/>
                 <a:cs typeface="Calibri" pitchFamily="34" charset="-120"/>
               </a:rPr>
-              <a:t>newline="" en écriture</a:t>
+              <a:t>DictWriter pour produire</a:t>
             </a:r>
             <a:endParaRPr lang="en-US" sz="1450" dirty="0"/>
           </a:p>
@@ -5836,6 +5870,112 @@
                 <a:ea typeface="Calibri" pitchFamily="34" charset="-122"/>
                 <a:cs typeface="Calibri" pitchFamily="34" charset="-120"/>
               </a:rPr>
+              <a:t>writeheader() puis writerow(dict) — l’extrait Bissau du TP.</a:t>
+            </a:r>
+            <a:endParaRPr lang="en-US" sz="1450" dirty="0"/>
+          </a:p>
+        </p:txBody>
+      </p:sp>
+      <p:sp>
+        <p:nvSpPr>
+          <p:cNvPr id="14" name="Shape 8"/>
+          <p:cNvSpPr/>
+          <p:nvPr/>
+        </p:nvSpPr>
+        <p:spPr>
+          <a:xfrm>
+            <a:off x="640080" y="5029200"/>
+            <a:ext cx="411480" cy="411480"/>
+          </a:xfrm>
+          <a:prstGeom prst="ellipse">
+            <a:avLst/>
+          </a:prstGeom>
+          <a:solidFill>
+            <a:srgbClr val="2E9E4F"/>
+          </a:solidFill>
+          <a:ln/>
+        </p:spPr>
+      </p:sp>
+      <p:pic>
+        <p:nvPicPr>
+          <p:cNvPr id="15" name="Image 4" descr="icons/check.png">    </p:cNvPr>
+          <p:cNvPicPr>
+            <a:picLocks noChangeAspect="1"/>
+          </p:cNvPicPr>
+          <p:nvPr/>
+        </p:nvPicPr>
+        <p:blipFill>
+          <a:blip r:embed="rId5"/>
+          <a:stretch>
+            <a:fillRect/>
+          </a:stretch>
+        </p:blipFill>
+        <p:spPr>
+          <a:xfrm>
+            <a:off x="747065" y="5136185"/>
+            <a:ext cx="197510" cy="197510"/>
+          </a:xfrm>
+          <a:prstGeom prst="rect">
+            <a:avLst/>
+          </a:prstGeom>
+        </p:spPr>
+      </p:pic>
+      <p:sp>
+        <p:nvSpPr>
+          <p:cNvPr id="16" name="Text 9"/>
+          <p:cNvSpPr/>
+          <p:nvPr/>
+        </p:nvSpPr>
+        <p:spPr>
+          <a:xfrm>
+            <a:off x="1234440" y="4956048"/>
+            <a:ext cx="4800600" cy="960120"/>
+          </a:xfrm>
+          <a:prstGeom prst="rect">
+            <a:avLst/>
+          </a:prstGeom>
+          <a:noFill/>
+          <a:ln/>
+        </p:spPr>
+        <p:txBody>
+          <a:bodyPr wrap="square" lIns="0" tIns="0" rIns="0" bIns="0" rtlCol="0" anchor="ctr"/>
+          <a:lstStyle/>
+          <a:p>
+            <a:pPr indent="0" marL="0">
+              <a:lnSpc>
+                <a:spcPct val="105000"/>
+              </a:lnSpc>
+              <a:buNone/>
+            </a:pPr>
+            <a:r>
+              <a:rPr lang="en-US" sz="1450" b="1" dirty="0">
+                <a:solidFill>
+                  <a:srgbClr val="1C2A24"/>
+                </a:solidFill>
+                <a:latin typeface="Calibri" pitchFamily="34" charset="0"/>
+                <a:ea typeface="Calibri" pitchFamily="34" charset="-122"/>
+                <a:cs typeface="Calibri" pitchFamily="34" charset="-120"/>
+              </a:rPr>
+              <a:t>newline="" en écriture</a:t>
+            </a:r>
+            <a:endParaRPr lang="en-US" sz="1450" dirty="0"/>
+          </a:p>
+          <a:p>
+            <a:pPr indent="0" marL="0">
+              <a:lnSpc>
+                <a:spcPct val="105000"/>
+              </a:lnSpc>
+              <a:buNone/>
+            </a:pPr>
+            <a:r>
+              <a:rPr lang="en-US" sz="1250" dirty="0">
+                <a:solidFill>
+                  <a:srgbClr val="5C6B63"/>
+                </a:solidFill>
+                <a:latin typeface="Calibri" pitchFamily="34" charset="0"/>
+                <a:ea typeface="Calibri" pitchFamily="34" charset="-122"/>
+                <a:cs typeface="Calibri" pitchFamily="34" charset="-120"/>
+              </a:rPr>
               <a:t>Sinon Windows double les sauts de ligne.</a:t>
             </a:r>
             <a:endParaRPr lang="en-US" sz="1450" dirty="0"/>
@@ -5844,7 +5984,7 @@
       </p:sp>
       <p:sp>
         <p:nvSpPr>
-          <p:cNvPr id="16" name="Shape 10"/>
+          <p:cNvPr id="17" name="Shape 10"/>
           <p:cNvSpPr/>
           <p:nvPr/>
         </p:nvSpPr>
@@ -5859,14 +5999,14 @@
             </a:avLst>
           </a:prstGeom>
           <a:solidFill>
-            <a:srgbClr val="10241B"/>
+            <a:srgbClr val="0F2418"/>
           </a:solidFill>
           <a:ln/>
         </p:spPr>
       </p:sp>
       <p:sp>
         <p:nvSpPr>
-          <p:cNvPr id="17" name="Shape 11"/>
+          <p:cNvPr id="18" name="Shape 11"/>
           <p:cNvSpPr/>
           <p:nvPr/>
         </p:nvSpPr>
@@ -5886,7 +6026,7 @@
       </p:sp>
       <p:sp>
         <p:nvSpPr>
-          <p:cNvPr id="18" name="Shape 12"/>
+          <p:cNvPr id="19" name="Shape 12"/>
           <p:cNvSpPr/>
           <p:nvPr/>
         </p:nvSpPr>
@@ -5899,14 +6039,14 @@
             <a:avLst/>
           </a:prstGeom>
           <a:solidFill>
-            <a:srgbClr val="C9A227"/>
+            <a:srgbClr val="C79100"/>
           </a:solidFill>
           <a:ln/>
         </p:spPr>
       </p:sp>
       <p:sp>
         <p:nvSpPr>
-          <p:cNvPr id="19" name="Shape 13"/>
+          <p:cNvPr id="20" name="Shape 13"/>
           <p:cNvSpPr/>
           <p:nvPr/>
         </p:nvSpPr>
@@ -5926,7 +6066,7 @@
       </p:sp>
       <p:sp>
         <p:nvSpPr>
-          <p:cNvPr id="20" name="Text 14"/>
+          <p:cNvPr id="21" name="Text 14"/>
           <p:cNvSpPr/>
           <p:nvPr/>
         </p:nvSpPr>
@@ -5965,7 +6105,7 @@
       </p:sp>
       <p:sp>
         <p:nvSpPr>
-          <p:cNvPr id="21" name="Text 15"/>
+          <p:cNvPr id="22" name="Text 15"/>
           <p:cNvSpPr/>
           <p:nvPr/>
         </p:nvSpPr>
@@ -6502,7 +6642,7 @@
                 <a:ea typeface="Courier New" pitchFamily="34" charset="-122"/>
                 <a:cs typeface="Courier New" pitchFamily="34" charset="-120"/>
               </a:rPr>
-              <a:t>Conakry : 2513   Kankan : 2461 …</a:t>
+              <a:t>Bissau : 2513    Gabú : 2461 …</a:t>
             </a:r>
             <a:endParaRPr lang="en-US" sz="1250" dirty="0"/>
           </a:p>
@@ -6549,7 +6689,7 @@
         <p:spPr>
           <a:xfrm>
             <a:off x="548640" y="384048"/>
-            <a:ext cx="10972800" cy="320040"/>
+            <a:ext cx="9601200" cy="320040"/>
           </a:xfrm>
           <a:prstGeom prst="rect">
             <a:avLst/>
@@ -6567,7 +6707,7 @@
             <a:r>
               <a:rPr lang="en-US" sz="1300" b="1" spc="200" kern="0" dirty="0">
                 <a:solidFill>
-                  <a:srgbClr val="C9A227"/>
+                  <a:srgbClr val="C79100"/>
                 </a:solidFill>
                 <a:latin typeface="Calibri" pitchFamily="34" charset="0"/>
                 <a:ea typeface="Calibri" pitchFamily="34" charset="-122"/>
@@ -6588,7 +6728,7 @@
         <p:spPr>
           <a:xfrm>
             <a:off x="548640" y="658368"/>
-            <a:ext cx="11064240" cy="731520"/>
+            <a:ext cx="9966960" cy="731520"/>
           </a:xfrm>
           <a:prstGeom prst="rect">
             <a:avLst/>
@@ -6606,7 +6746,7 @@
             <a:r>
               <a:rPr lang="en-US" sz="3400" b="1" dirty="0">
                 <a:solidFill>
-                  <a:srgbClr val="14563C"/>
+                  <a:srgbClr val="0E7A3D"/>
                 </a:solidFill>
                 <a:latin typeface="Cambria" pitchFamily="34" charset="0"/>
                 <a:ea typeface="Cambria" pitchFamily="34" charset="-122"/>
@@ -6618,29 +6758,9 @@
           </a:p>
         </p:txBody>
       </p:sp>
-      <p:sp>
-        <p:nvSpPr>
-          <p:cNvPr id="4" name="Shape 2"/>
-          <p:cNvSpPr/>
-          <p:nvPr/>
-        </p:nvSpPr>
-        <p:spPr>
-          <a:xfrm>
-            <a:off x="640080" y="1874520"/>
-            <a:ext cx="411480" cy="411480"/>
-          </a:xfrm>
-          <a:prstGeom prst="ellipse">
-            <a:avLst/>
-          </a:prstGeom>
-          <a:solidFill>
-            <a:srgbClr val="1E7A50"/>
-          </a:solidFill>
-          <a:ln/>
-        </p:spPr>
-      </p:sp>
       <p:pic>
         <p:nvPicPr>
-          <p:cNvPr id="5" name="Image 0" descr="icons/check.png">    </p:cNvPr>
+          <p:cNvPr id="4" name="Image 0" descr="logo-dgi.png">    </p:cNvPr>
           <p:cNvPicPr>
             <a:picLocks noChangeAspect="1"/>
           </p:cNvPicPr>
@@ -6654,8 +6774,8 @@
         </p:blipFill>
         <p:spPr>
           <a:xfrm>
-            <a:off x="747065" y="1981505"/>
-            <a:ext cx="197510" cy="197510"/>
+            <a:off x="10744200" y="384048"/>
+            <a:ext cx="1051560" cy="795528"/>
           </a:xfrm>
           <a:prstGeom prst="rect">
             <a:avLst/>
@@ -6664,89 +6784,27 @@
       </p:pic>
       <p:sp>
         <p:nvSpPr>
-          <p:cNvPr id="6" name="Text 3"/>
-          <p:cNvSpPr/>
-          <p:nvPr/>
-        </p:nvSpPr>
-        <p:spPr>
-          <a:xfrm>
-            <a:off x="1234440" y="1801368"/>
-            <a:ext cx="4800600" cy="960120"/>
-          </a:xfrm>
-          <a:prstGeom prst="rect">
-            <a:avLst/>
-          </a:prstGeom>
-          <a:noFill/>
-          <a:ln/>
-        </p:spPr>
-        <p:txBody>
-          <a:bodyPr wrap="square" lIns="0" tIns="0" rIns="0" bIns="0" rtlCol="0" anchor="ctr"/>
-          <a:lstStyle/>
-          <a:p>
-            <a:pPr indent="0" marL="0">
-              <a:lnSpc>
-                <a:spcPct val="105000"/>
-              </a:lnSpc>
-              <a:buNone/>
-            </a:pPr>
-            <a:r>
-              <a:rPr lang="en-US" sz="1450" b="1" dirty="0">
-                <a:solidFill>
-                  <a:srgbClr val="1C2A24"/>
-                </a:solidFill>
-                <a:latin typeface="Calibri" pitchFamily="34" charset="0"/>
-                <a:ea typeface="Calibri" pitchFamily="34" charset="-122"/>
-                <a:cs typeface="Calibri" pitchFamily="34" charset="-120"/>
-              </a:rPr>
-              <a:t>json.load → dicts et listes</a:t>
-            </a:r>
-            <a:endParaRPr lang="en-US" sz="1450" dirty="0"/>
-          </a:p>
-          <a:p>
-            <a:pPr indent="0" marL="0">
-              <a:lnSpc>
-                <a:spcPct val="105000"/>
-              </a:lnSpc>
-              <a:buNone/>
-            </a:pPr>
-            <a:r>
-              <a:rPr lang="en-US" sz="1250" dirty="0">
-                <a:solidFill>
-                  <a:srgbClr val="5C6B63"/>
-                </a:solidFill>
-                <a:latin typeface="Calibri" pitchFamily="34" charset="0"/>
-                <a:ea typeface="Calibri" pitchFamily="34" charset="-122"/>
-                <a:cs typeface="Calibri" pitchFamily="34" charset="-120"/>
-              </a:rPr>
-              <a:t>Le fichier devient exactement les structures du J2.</a:t>
-            </a:r>
-            <a:endParaRPr lang="en-US" sz="1450" dirty="0"/>
-          </a:p>
-        </p:txBody>
-      </p:sp>
-      <p:sp>
-        <p:nvSpPr>
-          <p:cNvPr id="7" name="Shape 4"/>
-          <p:cNvSpPr/>
-          <p:nvPr/>
-        </p:nvSpPr>
-        <p:spPr>
-          <a:xfrm>
-            <a:off x="640080" y="2926080"/>
+          <p:cNvPr id="5" name="Shape 2"/>
+          <p:cNvSpPr/>
+          <p:nvPr/>
+        </p:nvSpPr>
+        <p:spPr>
+          <a:xfrm>
+            <a:off x="640080" y="1874520"/>
             <a:ext cx="411480" cy="411480"/>
           </a:xfrm>
           <a:prstGeom prst="ellipse">
             <a:avLst/>
           </a:prstGeom>
           <a:solidFill>
-            <a:srgbClr val="1E7A50"/>
+            <a:srgbClr val="2E9E4F"/>
           </a:solidFill>
           <a:ln/>
         </p:spPr>
       </p:sp>
       <p:pic>
         <p:nvPicPr>
-          <p:cNvPr id="8" name="Image 1" descr="icons/check.png">    </p:cNvPr>
+          <p:cNvPr id="6" name="Image 1" descr="icons/check.png">    </p:cNvPr>
           <p:cNvPicPr>
             <a:picLocks noChangeAspect="1"/>
           </p:cNvPicPr>
@@ -6760,7 +6818,7 @@
         </p:blipFill>
         <p:spPr>
           <a:xfrm>
-            <a:off x="747065" y="3033065"/>
+            <a:off x="747065" y="1981505"/>
             <a:ext cx="197510" cy="197510"/>
           </a:xfrm>
           <a:prstGeom prst="rect">
@@ -6770,13 +6828,13 @@
       </p:pic>
       <p:sp>
         <p:nvSpPr>
-          <p:cNvPr id="9" name="Text 5"/>
-          <p:cNvSpPr/>
-          <p:nvPr/>
-        </p:nvSpPr>
-        <p:spPr>
-          <a:xfrm>
-            <a:off x="1234440" y="2852928"/>
+          <p:cNvPr id="7" name="Text 3"/>
+          <p:cNvSpPr/>
+          <p:nvPr/>
+        </p:nvSpPr>
+        <p:spPr>
+          <a:xfrm>
+            <a:off x="1234440" y="1801368"/>
             <a:ext cx="4800600" cy="960120"/>
           </a:xfrm>
           <a:prstGeom prst="rect">
@@ -6804,7 +6862,7 @@
                 <a:ea typeface="Calibri" pitchFamily="34" charset="-122"/>
                 <a:cs typeface="Calibri" pitchFamily="34" charset="-120"/>
               </a:rPr>
-              <a:t>On navigue par clés</a:t>
+              <a:t>json.load → dicts et listes</a:t>
             </a:r>
             <a:endParaRPr lang="en-US" sz="1450" dirty="0"/>
           </a:p>
@@ -6824,7 +6882,7 @@
                 <a:ea typeface="Calibri" pitchFamily="34" charset="-122"/>
                 <a:cs typeface="Calibri" pitchFamily="34" charset="-120"/>
               </a:rPr>
-              <a:t>d["identite"]["ville"], d["etablissements"][0]["actif"].</a:t>
+              <a:t>Le fichier devient exactement les structures du J2.</a:t>
             </a:r>
             <a:endParaRPr lang="en-US" sz="1450" dirty="0"/>
           </a:p>
@@ -6832,27 +6890,27 @@
       </p:sp>
       <p:sp>
         <p:nvSpPr>
-          <p:cNvPr id="10" name="Shape 6"/>
-          <p:cNvSpPr/>
-          <p:nvPr/>
-        </p:nvSpPr>
-        <p:spPr>
-          <a:xfrm>
-            <a:off x="640080" y="3977640"/>
+          <p:cNvPr id="8" name="Shape 4"/>
+          <p:cNvSpPr/>
+          <p:nvPr/>
+        </p:nvSpPr>
+        <p:spPr>
+          <a:xfrm>
+            <a:off x="640080" y="2926080"/>
             <a:ext cx="411480" cy="411480"/>
           </a:xfrm>
           <a:prstGeom prst="ellipse">
             <a:avLst/>
           </a:prstGeom>
           <a:solidFill>
-            <a:srgbClr val="1E7A50"/>
+            <a:srgbClr val="2E9E4F"/>
           </a:solidFill>
           <a:ln/>
         </p:spPr>
       </p:sp>
       <p:pic>
         <p:nvPicPr>
-          <p:cNvPr id="11" name="Image 2" descr="icons/check.png">    </p:cNvPr>
+          <p:cNvPr id="9" name="Image 2" descr="icons/check.png">    </p:cNvPr>
           <p:cNvPicPr>
             <a:picLocks noChangeAspect="1"/>
           </p:cNvPicPr>
@@ -6866,7 +6924,7 @@
         </p:blipFill>
         <p:spPr>
           <a:xfrm>
-            <a:off x="747065" y="4084625"/>
+            <a:off x="747065" y="3033065"/>
             <a:ext cx="197510" cy="197510"/>
           </a:xfrm>
           <a:prstGeom prst="rect">
@@ -6876,13 +6934,13 @@
       </p:pic>
       <p:sp>
         <p:nvSpPr>
-          <p:cNvPr id="12" name="Text 7"/>
-          <p:cNvSpPr/>
-          <p:nvPr/>
-        </p:nvSpPr>
-        <p:spPr>
-          <a:xfrm>
-            <a:off x="1234440" y="3904488"/>
+          <p:cNvPr id="10" name="Text 5"/>
+          <p:cNvSpPr/>
+          <p:nvPr/>
+        </p:nvSpPr>
+        <p:spPr>
+          <a:xfrm>
+            <a:off x="1234440" y="2852928"/>
             <a:ext cx="4800600" cy="960120"/>
           </a:xfrm>
           <a:prstGeom prst="rect">
@@ -6910,7 +6968,7 @@
                 <a:ea typeface="Calibri" pitchFamily="34" charset="-122"/>
                 <a:cs typeface="Calibri" pitchFamily="34" charset="-120"/>
               </a:rPr>
-              <a:t>any() et all()</a:t>
+              <a:t>On navigue par clés</a:t>
             </a:r>
             <a:endParaRPr lang="en-US" sz="1450" dirty="0"/>
           </a:p>
@@ -6930,7 +6988,7 @@
                 <a:ea typeface="Calibri" pitchFamily="34" charset="-122"/>
                 <a:cs typeface="Calibri" pitchFamily="34" charset="-120"/>
               </a:rPr>
-              <a:t>« au moins un établissement actif » tient en une ligne.</a:t>
+              <a:t>d["identite"]["ville"], d["etablissements"][0]["actif"].</a:t>
             </a:r>
             <a:endParaRPr lang="en-US" sz="1450" dirty="0"/>
           </a:p>
@@ -6938,27 +6996,27 @@
       </p:sp>
       <p:sp>
         <p:nvSpPr>
-          <p:cNvPr id="13" name="Shape 8"/>
-          <p:cNvSpPr/>
-          <p:nvPr/>
-        </p:nvSpPr>
-        <p:spPr>
-          <a:xfrm>
-            <a:off x="640080" y="5029200"/>
+          <p:cNvPr id="11" name="Shape 6"/>
+          <p:cNvSpPr/>
+          <p:nvPr/>
+        </p:nvSpPr>
+        <p:spPr>
+          <a:xfrm>
+            <a:off x="640080" y="3977640"/>
             <a:ext cx="411480" cy="411480"/>
           </a:xfrm>
           <a:prstGeom prst="ellipse">
             <a:avLst/>
           </a:prstGeom>
           <a:solidFill>
-            <a:srgbClr val="1E7A50"/>
+            <a:srgbClr val="2E9E4F"/>
           </a:solidFill>
           <a:ln/>
         </p:spPr>
       </p:sp>
       <p:pic>
         <p:nvPicPr>
-          <p:cNvPr id="14" name="Image 3" descr="icons/check.png">    </p:cNvPr>
+          <p:cNvPr id="12" name="Image 3" descr="icons/check.png">    </p:cNvPr>
           <p:cNvPicPr>
             <a:picLocks noChangeAspect="1"/>
           </p:cNvPicPr>
@@ -6972,7 +7030,7 @@
         </p:blipFill>
         <p:spPr>
           <a:xfrm>
-            <a:off x="747065" y="5136185"/>
+            <a:off x="747065" y="4084625"/>
             <a:ext cx="197510" cy="197510"/>
           </a:xfrm>
           <a:prstGeom prst="rect">
@@ -6982,13 +7040,13 @@
       </p:pic>
       <p:sp>
         <p:nvSpPr>
-          <p:cNvPr id="15" name="Text 9"/>
-          <p:cNvSpPr/>
-          <p:nvPr/>
-        </p:nvSpPr>
-        <p:spPr>
-          <a:xfrm>
-            <a:off x="1234440" y="4956048"/>
+          <p:cNvPr id="13" name="Text 7"/>
+          <p:cNvSpPr/>
+          <p:nvPr/>
+        </p:nvSpPr>
+        <p:spPr>
+          <a:xfrm>
+            <a:off x="1234440" y="3904488"/>
             <a:ext cx="4800600" cy="960120"/>
           </a:xfrm>
           <a:prstGeom prst="rect">
@@ -7016,7 +7074,7 @@
                 <a:ea typeface="Calibri" pitchFamily="34" charset="-122"/>
                 <a:cs typeface="Calibri" pitchFamily="34" charset="-120"/>
               </a:rPr>
-              <a:t>Cas réel du dépôt</a:t>
+              <a:t>any() et all()</a:t>
             </a:r>
             <a:endParaRPr lang="en-US" sz="1450" dirty="0"/>
           </a:p>
@@ -7036,6 +7094,112 @@
                 <a:ea typeface="Calibri" pitchFamily="34" charset="-122"/>
                 <a:cs typeface="Calibri" pitchFamily="34" charset="-120"/>
               </a:rPr>
+              <a:t>« au moins un établissement actif » tient en une ligne.</a:t>
+            </a:r>
+            <a:endParaRPr lang="en-US" sz="1450" dirty="0"/>
+          </a:p>
+        </p:txBody>
+      </p:sp>
+      <p:sp>
+        <p:nvSpPr>
+          <p:cNvPr id="14" name="Shape 8"/>
+          <p:cNvSpPr/>
+          <p:nvPr/>
+        </p:nvSpPr>
+        <p:spPr>
+          <a:xfrm>
+            <a:off x="640080" y="5029200"/>
+            <a:ext cx="411480" cy="411480"/>
+          </a:xfrm>
+          <a:prstGeom prst="ellipse">
+            <a:avLst/>
+          </a:prstGeom>
+          <a:solidFill>
+            <a:srgbClr val="2E9E4F"/>
+          </a:solidFill>
+          <a:ln/>
+        </p:spPr>
+      </p:sp>
+      <p:pic>
+        <p:nvPicPr>
+          <p:cNvPr id="15" name="Image 4" descr="icons/check.png">    </p:cNvPr>
+          <p:cNvPicPr>
+            <a:picLocks noChangeAspect="1"/>
+          </p:cNvPicPr>
+          <p:nvPr/>
+        </p:nvPicPr>
+        <p:blipFill>
+          <a:blip r:embed="rId5"/>
+          <a:stretch>
+            <a:fillRect/>
+          </a:stretch>
+        </p:blipFill>
+        <p:spPr>
+          <a:xfrm>
+            <a:off x="747065" y="5136185"/>
+            <a:ext cx="197510" cy="197510"/>
+          </a:xfrm>
+          <a:prstGeom prst="rect">
+            <a:avLst/>
+          </a:prstGeom>
+        </p:spPr>
+      </p:pic>
+      <p:sp>
+        <p:nvSpPr>
+          <p:cNvPr id="16" name="Text 9"/>
+          <p:cNvSpPr/>
+          <p:nvPr/>
+        </p:nvSpPr>
+        <p:spPr>
+          <a:xfrm>
+            <a:off x="1234440" y="4956048"/>
+            <a:ext cx="4800600" cy="960120"/>
+          </a:xfrm>
+          <a:prstGeom prst="rect">
+            <a:avLst/>
+          </a:prstGeom>
+          <a:noFill/>
+          <a:ln/>
+        </p:spPr>
+        <p:txBody>
+          <a:bodyPr wrap="square" lIns="0" tIns="0" rIns="0" bIns="0" rtlCol="0" anchor="ctr"/>
+          <a:lstStyle/>
+          <a:p>
+            <a:pPr indent="0" marL="0">
+              <a:lnSpc>
+                <a:spcPct val="105000"/>
+              </a:lnSpc>
+              <a:buNone/>
+            </a:pPr>
+            <a:r>
+              <a:rPr lang="en-US" sz="1450" b="1" dirty="0">
+                <a:solidFill>
+                  <a:srgbClr val="1C2A24"/>
+                </a:solidFill>
+                <a:latin typeface="Calibri" pitchFamily="34" charset="0"/>
+                <a:ea typeface="Calibri" pitchFamily="34" charset="-122"/>
+                <a:cs typeface="Calibri" pitchFamily="34" charset="-120"/>
+              </a:rPr>
+              <a:t>Cas réel du dépôt</a:t>
+            </a:r>
+            <a:endParaRPr lang="en-US" sz="1450" dirty="0"/>
+          </a:p>
+          <a:p>
+            <a:pPr indent="0" marL="0">
+              <a:lnSpc>
+                <a:spcPct val="105000"/>
+              </a:lnSpc>
+              <a:buNone/>
+            </a:pPr>
+            <a:r>
+              <a:rPr lang="en-US" sz="1250" dirty="0">
+                <a:solidFill>
+                  <a:srgbClr val="5C6B63"/>
+                </a:solidFill>
+                <a:latin typeface="Calibri" pitchFamily="34" charset="0"/>
+                <a:ea typeface="Calibri" pitchFamily="34" charset="-122"/>
+                <a:cs typeface="Calibri" pitchFamily="34" charset="-120"/>
+              </a:rPr>
               <a:t>dossiers_fiscaux.json : identité + établissements + historique.</a:t>
             </a:r>
             <a:endParaRPr lang="en-US" sz="1450" dirty="0"/>
@@ -7044,7 +7208,7 @@
       </p:sp>
       <p:sp>
         <p:nvSpPr>
-          <p:cNvPr id="16" name="Shape 10"/>
+          <p:cNvPr id="17" name="Shape 10"/>
           <p:cNvSpPr/>
           <p:nvPr/>
         </p:nvSpPr>
@@ -7059,14 +7223,14 @@
             </a:avLst>
           </a:prstGeom>
           <a:solidFill>
-            <a:srgbClr val="10241B"/>
+            <a:srgbClr val="0F2418"/>
           </a:solidFill>
           <a:ln/>
         </p:spPr>
       </p:sp>
       <p:sp>
         <p:nvSpPr>
-          <p:cNvPr id="17" name="Shape 11"/>
+          <p:cNvPr id="18" name="Shape 11"/>
           <p:cNvSpPr/>
           <p:nvPr/>
         </p:nvSpPr>
@@ -7086,7 +7250,7 @@
       </p:sp>
       <p:sp>
         <p:nvSpPr>
-          <p:cNvPr id="18" name="Shape 12"/>
+          <p:cNvPr id="19" name="Shape 12"/>
           <p:cNvSpPr/>
           <p:nvPr/>
         </p:nvSpPr>
@@ -7099,14 +7263,14 @@
             <a:avLst/>
           </a:prstGeom>
           <a:solidFill>
-            <a:srgbClr val="C9A227"/>
+            <a:srgbClr val="C79100"/>
           </a:solidFill>
           <a:ln/>
         </p:spPr>
       </p:sp>
       <p:sp>
         <p:nvSpPr>
-          <p:cNvPr id="19" name="Shape 13"/>
+          <p:cNvPr id="20" name="Shape 13"/>
           <p:cNvSpPr/>
           <p:nvPr/>
         </p:nvSpPr>
@@ -7126,7 +7290,7 @@
       </p:sp>
       <p:sp>
         <p:nvSpPr>
-          <p:cNvPr id="20" name="Text 14"/>
+          <p:cNvPr id="21" name="Text 14"/>
           <p:cNvSpPr/>
           <p:nvPr/>
         </p:nvSpPr>
@@ -7165,7 +7329,7 @@
       </p:sp>
       <p:sp>
         <p:nvSpPr>
-          <p:cNvPr id="21" name="Text 15"/>
+          <p:cNvPr id="22" name="Text 15"/>
           <p:cNvSpPr/>
           <p:nvPr/>
         </p:nvSpPr>
@@ -7936,7 +8100,7 @@
         <p:spPr>
           <a:xfrm>
             <a:off x="548640" y="384048"/>
-            <a:ext cx="10972800" cy="320040"/>
+            <a:ext cx="9601200" cy="320040"/>
           </a:xfrm>
           <a:prstGeom prst="rect">
             <a:avLst/>
@@ -7954,7 +8118,7 @@
             <a:r>
               <a:rPr lang="en-US" sz="1300" b="1" spc="200" kern="0" dirty="0">
                 <a:solidFill>
-                  <a:srgbClr val="C9A227"/>
+                  <a:srgbClr val="C79100"/>
                 </a:solidFill>
                 <a:latin typeface="Calibri" pitchFamily="34" charset="0"/>
                 <a:ea typeface="Calibri" pitchFamily="34" charset="-122"/>
@@ -7975,7 +8139,7 @@
         <p:spPr>
           <a:xfrm>
             <a:off x="548640" y="658368"/>
-            <a:ext cx="11064240" cy="731520"/>
+            <a:ext cx="9966960" cy="731520"/>
           </a:xfrm>
           <a:prstGeom prst="rect">
             <a:avLst/>
@@ -7993,7 +8157,7 @@
             <a:r>
               <a:rPr lang="en-US" sz="3400" b="1" dirty="0">
                 <a:solidFill>
-                  <a:srgbClr val="14563C"/>
+                  <a:srgbClr val="0E7A3D"/>
                 </a:solidFill>
                 <a:latin typeface="Cambria" pitchFamily="34" charset="0"/>
                 <a:ea typeface="Cambria" pitchFamily="34" charset="-122"/>
@@ -8005,29 +8169,9 @@
           </a:p>
         </p:txBody>
       </p:sp>
-      <p:sp>
-        <p:nvSpPr>
-          <p:cNvPr id="4" name="Shape 2"/>
-          <p:cNvSpPr/>
-          <p:nvPr/>
-        </p:nvSpPr>
-        <p:spPr>
-          <a:xfrm>
-            <a:off x="640080" y="1874520"/>
-            <a:ext cx="411480" cy="411480"/>
-          </a:xfrm>
-          <a:prstGeom prst="ellipse">
-            <a:avLst/>
-          </a:prstGeom>
-          <a:solidFill>
-            <a:srgbClr val="1E7A50"/>
-          </a:solidFill>
-          <a:ln/>
-        </p:spPr>
-      </p:sp>
       <p:pic>
         <p:nvPicPr>
-          <p:cNvPr id="5" name="Image 0" descr="icons/check.png">    </p:cNvPr>
+          <p:cNvPr id="4" name="Image 0" descr="logo-dgi.png">    </p:cNvPr>
           <p:cNvPicPr>
             <a:picLocks noChangeAspect="1"/>
           </p:cNvPicPr>
@@ -8041,8 +8185,8 @@
         </p:blipFill>
         <p:spPr>
           <a:xfrm>
-            <a:off x="747065" y="1981505"/>
-            <a:ext cx="197510" cy="197510"/>
+            <a:off x="10744200" y="384048"/>
+            <a:ext cx="1051560" cy="795528"/>
           </a:xfrm>
           <a:prstGeom prst="rect">
             <a:avLst/>
@@ -8051,89 +8195,27 @@
       </p:pic>
       <p:sp>
         <p:nvSpPr>
-          <p:cNvPr id="6" name="Text 3"/>
-          <p:cNvSpPr/>
-          <p:nvPr/>
-        </p:nvSpPr>
-        <p:spPr>
-          <a:xfrm>
-            <a:off x="1234440" y="1801368"/>
-            <a:ext cx="4800600" cy="960120"/>
-          </a:xfrm>
-          <a:prstGeom prst="rect">
-            <a:avLst/>
-          </a:prstGeom>
-          <a:noFill/>
-          <a:ln/>
-        </p:spPr>
-        <p:txBody>
-          <a:bodyPr wrap="square" lIns="0" tIns="0" rIns="0" bIns="0" rtlCol="0" anchor="ctr"/>
-          <a:lstStyle/>
-          <a:p>
-            <a:pPr indent="0" marL="0">
-              <a:lnSpc>
-                <a:spcPct val="105000"/>
-              </a:lnSpc>
-              <a:buNone/>
-            </a:pPr>
-            <a:r>
-              <a:rPr lang="en-US" sz="1450" b="1" dirty="0">
-                <a:solidFill>
-                  <a:srgbClr val="1C2A24"/>
-                </a:solidFill>
-                <a:latin typeface="Calibri" pitchFamily="34" charset="0"/>
-                <a:ea typeface="Calibri" pitchFamily="34" charset="-122"/>
-                <a:cs typeface="Calibri" pitchFamily="34" charset="-120"/>
-              </a:rPr>
-              <a:t>Lire un traceback de bas en haut</a:t>
-            </a:r>
-            <a:endParaRPr lang="en-US" sz="1450" dirty="0"/>
-          </a:p>
-          <a:p>
-            <a:pPr indent="0" marL="0">
-              <a:lnSpc>
-                <a:spcPct val="105000"/>
-              </a:lnSpc>
-              <a:buNone/>
-            </a:pPr>
-            <a:r>
-              <a:rPr lang="en-US" sz="1250" dirty="0">
-                <a:solidFill>
-                  <a:srgbClr val="5C6B63"/>
-                </a:solidFill>
-                <a:latin typeface="Calibri" pitchFamily="34" charset="0"/>
-                <a:ea typeface="Calibri" pitchFamily="34" charset="-122"/>
-                <a:cs typeface="Calibri" pitchFamily="34" charset="-120"/>
-              </a:rPr>
-              <a:t>Dernière ligne : QUOI. Remontée : OÙ. Ne pas paniquer.</a:t>
-            </a:r>
-            <a:endParaRPr lang="en-US" sz="1450" dirty="0"/>
-          </a:p>
-        </p:txBody>
-      </p:sp>
-      <p:sp>
-        <p:nvSpPr>
-          <p:cNvPr id="7" name="Shape 4"/>
-          <p:cNvSpPr/>
-          <p:nvPr/>
-        </p:nvSpPr>
-        <p:spPr>
-          <a:xfrm>
-            <a:off x="640080" y="2926080"/>
+          <p:cNvPr id="5" name="Shape 2"/>
+          <p:cNvSpPr/>
+          <p:nvPr/>
+        </p:nvSpPr>
+        <p:spPr>
+          <a:xfrm>
+            <a:off x="640080" y="1874520"/>
             <a:ext cx="411480" cy="411480"/>
           </a:xfrm>
           <a:prstGeom prst="ellipse">
             <a:avLst/>
           </a:prstGeom>
           <a:solidFill>
-            <a:srgbClr val="1E7A50"/>
+            <a:srgbClr val="2E9E4F"/>
           </a:solidFill>
           <a:ln/>
         </p:spPr>
       </p:sp>
       <p:pic>
         <p:nvPicPr>
-          <p:cNvPr id="8" name="Image 1" descr="icons/check.png">    </p:cNvPr>
+          <p:cNvPr id="6" name="Image 1" descr="icons/check.png">    </p:cNvPr>
           <p:cNvPicPr>
             <a:picLocks noChangeAspect="1"/>
           </p:cNvPicPr>
@@ -8147,7 +8229,7 @@
         </p:blipFill>
         <p:spPr>
           <a:xfrm>
-            <a:off x="747065" y="3033065"/>
+            <a:off x="747065" y="1981505"/>
             <a:ext cx="197510" cy="197510"/>
           </a:xfrm>
           <a:prstGeom prst="rect">
@@ -8157,13 +8239,13 @@
       </p:pic>
       <p:sp>
         <p:nvSpPr>
-          <p:cNvPr id="9" name="Text 5"/>
-          <p:cNvSpPr/>
-          <p:nvPr/>
-        </p:nvSpPr>
-        <p:spPr>
-          <a:xfrm>
-            <a:off x="1234440" y="2852928"/>
+          <p:cNvPr id="7" name="Text 3"/>
+          <p:cNvSpPr/>
+          <p:nvPr/>
+        </p:nvSpPr>
+        <p:spPr>
+          <a:xfrm>
+            <a:off x="1234440" y="1801368"/>
             <a:ext cx="4800600" cy="960120"/>
           </a:xfrm>
           <a:prstGeom prst="rect">
@@ -8191,7 +8273,7 @@
                 <a:ea typeface="Calibri" pitchFamily="34" charset="-122"/>
                 <a:cs typeface="Calibri" pitchFamily="34" charset="-120"/>
               </a:rPr>
-              <a:t>Attraper PRÉCIS</a:t>
+              <a:t>Lire un traceback de bas en haut</a:t>
             </a:r>
             <a:endParaRPr lang="en-US" sz="1450" dirty="0"/>
           </a:p>
@@ -8211,7 +8293,7 @@
                 <a:ea typeface="Calibri" pitchFamily="34" charset="-122"/>
                 <a:cs typeface="Calibri" pitchFamily="34" charset="-120"/>
               </a:rPr>
-              <a:t>except ValueError — jamais except: nu, qui masque tout.</a:t>
+              <a:t>Dernière ligne : QUOI. Remontée : OÙ. Ne pas paniquer.</a:t>
             </a:r>
             <a:endParaRPr lang="en-US" sz="1450" dirty="0"/>
           </a:p>
@@ -8219,27 +8301,27 @@
       </p:sp>
       <p:sp>
         <p:nvSpPr>
-          <p:cNvPr id="10" name="Shape 6"/>
-          <p:cNvSpPr/>
-          <p:nvPr/>
-        </p:nvSpPr>
-        <p:spPr>
-          <a:xfrm>
-            <a:off x="640080" y="3977640"/>
+          <p:cNvPr id="8" name="Shape 4"/>
+          <p:cNvSpPr/>
+          <p:nvPr/>
+        </p:nvSpPr>
+        <p:spPr>
+          <a:xfrm>
+            <a:off x="640080" y="2926080"/>
             <a:ext cx="411480" cy="411480"/>
           </a:xfrm>
           <a:prstGeom prst="ellipse">
             <a:avLst/>
           </a:prstGeom>
           <a:solidFill>
-            <a:srgbClr val="1E7A50"/>
+            <a:srgbClr val="2E9E4F"/>
           </a:solidFill>
           <a:ln/>
         </p:spPr>
       </p:sp>
       <p:pic>
         <p:nvPicPr>
-          <p:cNvPr id="11" name="Image 2" descr="icons/check.png">    </p:cNvPr>
+          <p:cNvPr id="9" name="Image 2" descr="icons/check.png">    </p:cNvPr>
           <p:cNvPicPr>
             <a:picLocks noChangeAspect="1"/>
           </p:cNvPicPr>
@@ -8253,7 +8335,7 @@
         </p:blipFill>
         <p:spPr>
           <a:xfrm>
-            <a:off x="747065" y="4084625"/>
+            <a:off x="747065" y="3033065"/>
             <a:ext cx="197510" cy="197510"/>
           </a:xfrm>
           <a:prstGeom prst="rect">
@@ -8263,13 +8345,13 @@
       </p:pic>
       <p:sp>
         <p:nvSpPr>
-          <p:cNvPr id="12" name="Text 7"/>
-          <p:cNvSpPr/>
-          <p:nvPr/>
-        </p:nvSpPr>
-        <p:spPr>
-          <a:xfrm>
-            <a:off x="1234440" y="3904488"/>
+          <p:cNvPr id="10" name="Text 5"/>
+          <p:cNvSpPr/>
+          <p:nvPr/>
+        </p:nvSpPr>
+        <p:spPr>
+          <a:xfrm>
+            <a:off x="1234440" y="2852928"/>
             <a:ext cx="4800600" cy="960120"/>
           </a:xfrm>
           <a:prstGeom prst="rect">
@@ -8297,7 +8379,7 @@
                 <a:ea typeface="Calibri" pitchFamily="34" charset="-122"/>
                 <a:cs typeface="Calibri" pitchFamily="34" charset="-120"/>
               </a:rPr>
-              <a:t>raise pour vos propres règles</a:t>
+              <a:t>Attraper PRÉCIS</a:t>
             </a:r>
             <a:endParaRPr lang="en-US" sz="1450" dirty="0"/>
           </a:p>
@@ -8317,7 +8399,7 @@
                 <a:ea typeface="Calibri" pitchFamily="34" charset="-122"/>
                 <a:cs typeface="Calibri" pitchFamily="34" charset="-120"/>
               </a:rPr>
-              <a:t>Montant vide ou négatif → ValueError avec un message clair.</a:t>
+              <a:t>except ValueError — jamais except: nu, qui masque tout.</a:t>
             </a:r>
             <a:endParaRPr lang="en-US" sz="1450" dirty="0"/>
           </a:p>
@@ -8325,27 +8407,27 @@
       </p:sp>
       <p:sp>
         <p:nvSpPr>
-          <p:cNvPr id="13" name="Shape 8"/>
-          <p:cNvSpPr/>
-          <p:nvPr/>
-        </p:nvSpPr>
-        <p:spPr>
-          <a:xfrm>
-            <a:off x="640080" y="5029200"/>
+          <p:cNvPr id="11" name="Shape 6"/>
+          <p:cNvSpPr/>
+          <p:nvPr/>
+        </p:nvSpPr>
+        <p:spPr>
+          <a:xfrm>
+            <a:off x="640080" y="3977640"/>
             <a:ext cx="411480" cy="411480"/>
           </a:xfrm>
           <a:prstGeom prst="ellipse">
             <a:avLst/>
           </a:prstGeom>
           <a:solidFill>
-            <a:srgbClr val="1E7A50"/>
+            <a:srgbClr val="2E9E4F"/>
           </a:solidFill>
           <a:ln/>
         </p:spPr>
       </p:sp>
       <p:pic>
         <p:nvPicPr>
-          <p:cNvPr id="14" name="Image 3" descr="icons/check.png">    </p:cNvPr>
+          <p:cNvPr id="12" name="Image 3" descr="icons/check.png">    </p:cNvPr>
           <p:cNvPicPr>
             <a:picLocks noChangeAspect="1"/>
           </p:cNvPicPr>
@@ -8359,7 +8441,7 @@
         </p:blipFill>
         <p:spPr>
           <a:xfrm>
-            <a:off x="747065" y="5136185"/>
+            <a:off x="747065" y="4084625"/>
             <a:ext cx="197510" cy="197510"/>
           </a:xfrm>
           <a:prstGeom prst="rect">
@@ -8369,13 +8451,13 @@
       </p:pic>
       <p:sp>
         <p:nvSpPr>
-          <p:cNvPr id="15" name="Text 9"/>
-          <p:cNvSpPr/>
-          <p:nvPr/>
-        </p:nvSpPr>
-        <p:spPr>
-          <a:xfrm>
-            <a:off x="1234440" y="4956048"/>
+          <p:cNvPr id="13" name="Text 7"/>
+          <p:cNvSpPr/>
+          <p:nvPr/>
+        </p:nvSpPr>
+        <p:spPr>
+          <a:xfrm>
+            <a:off x="1234440" y="3904488"/>
             <a:ext cx="4800600" cy="960120"/>
           </a:xfrm>
           <a:prstGeom prst="rect">
@@ -8403,7 +8485,7 @@
                 <a:ea typeface="Calibri" pitchFamily="34" charset="-122"/>
                 <a:cs typeface="Calibri" pitchFamily="34" charset="-120"/>
               </a:rPr>
-              <a:t>Écarter EN COMPTANT</a:t>
+              <a:t>raise pour vos propres règles</a:t>
             </a:r>
             <a:endParaRPr lang="en-US" sz="1450" dirty="0"/>
           </a:p>
@@ -8423,6 +8505,112 @@
                 <a:ea typeface="Calibri" pitchFamily="34" charset="-122"/>
                 <a:cs typeface="Calibri" pitchFamily="34" charset="-120"/>
               </a:rPr>
+              <a:t>Montant vide ou négatif → ValueError avec un message clair.</a:t>
+            </a:r>
+            <a:endParaRPr lang="en-US" sz="1450" dirty="0"/>
+          </a:p>
+        </p:txBody>
+      </p:sp>
+      <p:sp>
+        <p:nvSpPr>
+          <p:cNvPr id="14" name="Shape 8"/>
+          <p:cNvSpPr/>
+          <p:nvPr/>
+        </p:nvSpPr>
+        <p:spPr>
+          <a:xfrm>
+            <a:off x="640080" y="5029200"/>
+            <a:ext cx="411480" cy="411480"/>
+          </a:xfrm>
+          <a:prstGeom prst="ellipse">
+            <a:avLst/>
+          </a:prstGeom>
+          <a:solidFill>
+            <a:srgbClr val="2E9E4F"/>
+          </a:solidFill>
+          <a:ln/>
+        </p:spPr>
+      </p:sp>
+      <p:pic>
+        <p:nvPicPr>
+          <p:cNvPr id="15" name="Image 4" descr="icons/check.png">    </p:cNvPr>
+          <p:cNvPicPr>
+            <a:picLocks noChangeAspect="1"/>
+          </p:cNvPicPr>
+          <p:nvPr/>
+        </p:nvPicPr>
+        <p:blipFill>
+          <a:blip r:embed="rId5"/>
+          <a:stretch>
+            <a:fillRect/>
+          </a:stretch>
+        </p:blipFill>
+        <p:spPr>
+          <a:xfrm>
+            <a:off x="747065" y="5136185"/>
+            <a:ext cx="197510" cy="197510"/>
+          </a:xfrm>
+          <a:prstGeom prst="rect">
+            <a:avLst/>
+          </a:prstGeom>
+        </p:spPr>
+      </p:pic>
+      <p:sp>
+        <p:nvSpPr>
+          <p:cNvPr id="16" name="Text 9"/>
+          <p:cNvSpPr/>
+          <p:nvPr/>
+        </p:nvSpPr>
+        <p:spPr>
+          <a:xfrm>
+            <a:off x="1234440" y="4956048"/>
+            <a:ext cx="4800600" cy="960120"/>
+          </a:xfrm>
+          <a:prstGeom prst="rect">
+            <a:avLst/>
+          </a:prstGeom>
+          <a:noFill/>
+          <a:ln/>
+        </p:spPr>
+        <p:txBody>
+          <a:bodyPr wrap="square" lIns="0" tIns="0" rIns="0" bIns="0" rtlCol="0" anchor="ctr"/>
+          <a:lstStyle/>
+          <a:p>
+            <a:pPr indent="0" marL="0">
+              <a:lnSpc>
+                <a:spcPct val="105000"/>
+              </a:lnSpc>
+              <a:buNone/>
+            </a:pPr>
+            <a:r>
+              <a:rPr lang="en-US" sz="1450" b="1" dirty="0">
+                <a:solidFill>
+                  <a:srgbClr val="1C2A24"/>
+                </a:solidFill>
+                <a:latin typeface="Calibri" pitchFamily="34" charset="0"/>
+                <a:ea typeface="Calibri" pitchFamily="34" charset="-122"/>
+                <a:cs typeface="Calibri" pitchFamily="34" charset="-120"/>
+              </a:rPr>
+              <a:t>Écarter EN COMPTANT</a:t>
+            </a:r>
+            <a:endParaRPr lang="en-US" sz="1450" dirty="0"/>
+          </a:p>
+          <a:p>
+            <a:pPr indent="0" marL="0">
+              <a:lnSpc>
+                <a:spcPct val="105000"/>
+              </a:lnSpc>
+              <a:buNone/>
+            </a:pPr>
+            <a:r>
+              <a:rPr lang="en-US" sz="1250" dirty="0">
+                <a:solidFill>
+                  <a:srgbClr val="5C6B63"/>
+                </a:solidFill>
+                <a:latin typeface="Calibri" pitchFamily="34" charset="0"/>
+                <a:ea typeface="Calibri" pitchFamily="34" charset="-122"/>
+                <a:cs typeface="Calibri" pitchFamily="34" charset="-120"/>
+              </a:rPr>
               <a:t>Une ligne rejetée en silence est une ligne perdue.</a:t>
             </a:r>
             <a:endParaRPr lang="en-US" sz="1450" dirty="0"/>
@@ -8431,7 +8619,7 @@
       </p:sp>
       <p:sp>
         <p:nvSpPr>
-          <p:cNvPr id="16" name="Shape 10"/>
+          <p:cNvPr id="17" name="Shape 10"/>
           <p:cNvSpPr/>
           <p:nvPr/>
         </p:nvSpPr>
@@ -8446,14 +8634,14 @@
             </a:avLst>
           </a:prstGeom>
           <a:solidFill>
-            <a:srgbClr val="10241B"/>
+            <a:srgbClr val="0F2418"/>
           </a:solidFill>
           <a:ln/>
         </p:spPr>
       </p:sp>
       <p:sp>
         <p:nvSpPr>
-          <p:cNvPr id="17" name="Shape 11"/>
+          <p:cNvPr id="18" name="Shape 11"/>
           <p:cNvSpPr/>
           <p:nvPr/>
         </p:nvSpPr>
@@ -8473,7 +8661,7 @@
       </p:sp>
       <p:sp>
         <p:nvSpPr>
-          <p:cNvPr id="18" name="Shape 12"/>
+          <p:cNvPr id="19" name="Shape 12"/>
           <p:cNvSpPr/>
           <p:nvPr/>
         </p:nvSpPr>
@@ -8486,14 +8674,14 @@
             <a:avLst/>
           </a:prstGeom>
           <a:solidFill>
-            <a:srgbClr val="C9A227"/>
+            <a:srgbClr val="C79100"/>
           </a:solidFill>
           <a:ln/>
         </p:spPr>
       </p:sp>
       <p:sp>
         <p:nvSpPr>
-          <p:cNvPr id="19" name="Shape 13"/>
+          <p:cNvPr id="20" name="Shape 13"/>
           <p:cNvSpPr/>
           <p:nvPr/>
         </p:nvSpPr>
@@ -8513,7 +8701,7 @@
       </p:sp>
       <p:sp>
         <p:nvSpPr>
-          <p:cNvPr id="20" name="Text 14"/>
+          <p:cNvPr id="21" name="Text 14"/>
           <p:cNvSpPr/>
           <p:nvPr/>
         </p:nvSpPr>
@@ -8552,7 +8740,7 @@
       </p:sp>
       <p:sp>
         <p:nvSpPr>
-          <p:cNvPr id="21" name="Text 15"/>
+          <p:cNvPr id="22" name="Text 15"/>
           <p:cNvSpPr/>
           <p:nvPr/>
         </p:nvSpPr>
@@ -9340,7 +9528,7 @@
         <p:spPr>
           <a:xfrm>
             <a:off x="548640" y="384048"/>
-            <a:ext cx="10972800" cy="320040"/>
+            <a:ext cx="9601200" cy="320040"/>
           </a:xfrm>
           <a:prstGeom prst="rect">
             <a:avLst/>
@@ -9358,7 +9546,7 @@
             <a:r>
               <a:rPr lang="en-US" sz="1300" b="1" spc="200" kern="0" dirty="0">
                 <a:solidFill>
-                  <a:srgbClr val="C9A227"/>
+                  <a:srgbClr val="C79100"/>
                 </a:solidFill>
                 <a:latin typeface="Calibri" pitchFamily="34" charset="0"/>
                 <a:ea typeface="Calibri" pitchFamily="34" charset="-122"/>
@@ -9379,7 +9567,7 @@
         <p:spPr>
           <a:xfrm>
             <a:off x="548640" y="658368"/>
-            <a:ext cx="11064240" cy="731520"/>
+            <a:ext cx="9966960" cy="731520"/>
           </a:xfrm>
           <a:prstGeom prst="rect">
             <a:avLst/>
@@ -9397,7 +9585,7 @@
             <a:r>
               <a:rPr lang="en-US" sz="3400" b="1" dirty="0">
                 <a:solidFill>
-                  <a:srgbClr val="14563C"/>
+                  <a:srgbClr val="0E7A3D"/>
                 </a:solidFill>
                 <a:latin typeface="Cambria" pitchFamily="34" charset="0"/>
                 <a:ea typeface="Cambria" pitchFamily="34" charset="-122"/>
@@ -9409,312 +9597,9 @@
           </a:p>
         </p:txBody>
       </p:sp>
-      <p:sp>
-        <p:nvSpPr>
-          <p:cNvPr id="4" name="Shape 2"/>
-          <p:cNvSpPr/>
-          <p:nvPr/>
-        </p:nvSpPr>
-        <p:spPr>
-          <a:xfrm>
-            <a:off x="640080" y="1828800"/>
-            <a:ext cx="2331720" cy="566928"/>
-          </a:xfrm>
-          <a:prstGeom prst="roundRect">
-            <a:avLst>
-              <a:gd name="adj" fmla="val 14516"/>
-            </a:avLst>
-          </a:prstGeom>
-          <a:solidFill>
-            <a:srgbClr val="0D3325"/>
-          </a:solidFill>
-          <a:ln/>
-        </p:spPr>
-      </p:sp>
-      <p:sp>
-        <p:nvSpPr>
-          <p:cNvPr id="5" name="Text 3"/>
-          <p:cNvSpPr/>
-          <p:nvPr/>
-        </p:nvSpPr>
-        <p:spPr>
-          <a:xfrm>
-            <a:off x="640080" y="1828800"/>
-            <a:ext cx="2331720" cy="566928"/>
-          </a:xfrm>
-          <a:prstGeom prst="rect">
-            <a:avLst/>
-          </a:prstGeom>
-          <a:noFill/>
-          <a:ln/>
-        </p:spPr>
-        <p:txBody>
-          <a:bodyPr wrap="square" lIns="0" tIns="0" rIns="0" bIns="0" rtlCol="0" anchor="ctr"/>
-          <a:lstStyle/>
-          <a:p>
-            <a:pPr algn="ctr" indent="0" marL="0">
-              <a:buNone/>
-            </a:pPr>
-            <a:r>
-              <a:rPr lang="en-US" sz="1400" b="1" dirty="0">
-                <a:solidFill>
-                  <a:srgbClr val="E8D48A"/>
-                </a:solidFill>
-                <a:latin typeface="Courier New" pitchFamily="34" charset="0"/>
-                <a:ea typeface="Courier New" pitchFamily="34" charset="-122"/>
-                <a:cs typeface="Courier New" pitchFamily="34" charset="-120"/>
-              </a:rPr>
-              <a:t>2025-03-14</a:t>
-            </a:r>
-            <a:endParaRPr lang="en-US" sz="1400" dirty="0"/>
-          </a:p>
-        </p:txBody>
-      </p:sp>
-      <p:sp>
-        <p:nvSpPr>
-          <p:cNvPr id="6" name="Shape 4"/>
-          <p:cNvSpPr/>
-          <p:nvPr/>
-        </p:nvSpPr>
-        <p:spPr>
-          <a:xfrm>
-            <a:off x="3154680" y="1828800"/>
-            <a:ext cx="2331720" cy="566928"/>
-          </a:xfrm>
-          <a:prstGeom prst="roundRect">
-            <a:avLst>
-              <a:gd name="adj" fmla="val 14516"/>
-            </a:avLst>
-          </a:prstGeom>
-          <a:solidFill>
-            <a:srgbClr val="0D3325"/>
-          </a:solidFill>
-          <a:ln/>
-        </p:spPr>
-      </p:sp>
-      <p:sp>
-        <p:nvSpPr>
-          <p:cNvPr id="7" name="Text 5"/>
-          <p:cNvSpPr/>
-          <p:nvPr/>
-        </p:nvSpPr>
-        <p:spPr>
-          <a:xfrm>
-            <a:off x="3154680" y="1828800"/>
-            <a:ext cx="2331720" cy="566928"/>
-          </a:xfrm>
-          <a:prstGeom prst="rect">
-            <a:avLst/>
-          </a:prstGeom>
-          <a:noFill/>
-          <a:ln/>
-        </p:spPr>
-        <p:txBody>
-          <a:bodyPr wrap="square" lIns="0" tIns="0" rIns="0" bIns="0" rtlCol="0" anchor="ctr"/>
-          <a:lstStyle/>
-          <a:p>
-            <a:pPr algn="ctr" indent="0" marL="0">
-              <a:buNone/>
-            </a:pPr>
-            <a:r>
-              <a:rPr lang="en-US" sz="1400" b="1" dirty="0">
-                <a:solidFill>
-                  <a:srgbClr val="E8D48A"/>
-                </a:solidFill>
-                <a:latin typeface="Courier New" pitchFamily="34" charset="0"/>
-                <a:ea typeface="Courier New" pitchFamily="34" charset="-122"/>
-                <a:cs typeface="Courier New" pitchFamily="34" charset="-120"/>
-              </a:rPr>
-              <a:t>14/03/2025</a:t>
-            </a:r>
-            <a:endParaRPr lang="en-US" sz="1400" dirty="0"/>
-          </a:p>
-        </p:txBody>
-      </p:sp>
-      <p:sp>
-        <p:nvSpPr>
-          <p:cNvPr id="8" name="Shape 6"/>
-          <p:cNvSpPr/>
-          <p:nvPr/>
-        </p:nvSpPr>
-        <p:spPr>
-          <a:xfrm>
-            <a:off x="5669280" y="1828800"/>
-            <a:ext cx="2331720" cy="566928"/>
-          </a:xfrm>
-          <a:prstGeom prst="roundRect">
-            <a:avLst>
-              <a:gd name="adj" fmla="val 14516"/>
-            </a:avLst>
-          </a:prstGeom>
-          <a:solidFill>
-            <a:srgbClr val="0D3325"/>
-          </a:solidFill>
-          <a:ln/>
-        </p:spPr>
-      </p:sp>
-      <p:sp>
-        <p:nvSpPr>
-          <p:cNvPr id="9" name="Text 7"/>
-          <p:cNvSpPr/>
-          <p:nvPr/>
-        </p:nvSpPr>
-        <p:spPr>
-          <a:xfrm>
-            <a:off x="5669280" y="1828800"/>
-            <a:ext cx="2331720" cy="566928"/>
-          </a:xfrm>
-          <a:prstGeom prst="rect">
-            <a:avLst/>
-          </a:prstGeom>
-          <a:noFill/>
-          <a:ln/>
-        </p:spPr>
-        <p:txBody>
-          <a:bodyPr wrap="square" lIns="0" tIns="0" rIns="0" bIns="0" rtlCol="0" anchor="ctr"/>
-          <a:lstStyle/>
-          <a:p>
-            <a:pPr algn="ctr" indent="0" marL="0">
-              <a:buNone/>
-            </a:pPr>
-            <a:r>
-              <a:rPr lang="en-US" sz="1400" b="1" dirty="0">
-                <a:solidFill>
-                  <a:srgbClr val="E8D48A"/>
-                </a:solidFill>
-                <a:latin typeface="Courier New" pitchFamily="34" charset="0"/>
-                <a:ea typeface="Courier New" pitchFamily="34" charset="-122"/>
-                <a:cs typeface="Courier New" pitchFamily="34" charset="-120"/>
-              </a:rPr>
-              <a:t>14-3-2025</a:t>
-            </a:r>
-            <a:endParaRPr lang="en-US" sz="1400" dirty="0"/>
-          </a:p>
-        </p:txBody>
-      </p:sp>
-      <p:sp>
-        <p:nvSpPr>
-          <p:cNvPr id="10" name="Shape 8"/>
-          <p:cNvSpPr/>
-          <p:nvPr/>
-        </p:nvSpPr>
-        <p:spPr>
-          <a:xfrm>
-            <a:off x="8183880" y="1828800"/>
-            <a:ext cx="2331720" cy="566928"/>
-          </a:xfrm>
-          <a:prstGeom prst="roundRect">
-            <a:avLst>
-              <a:gd name="adj" fmla="val 14516"/>
-            </a:avLst>
-          </a:prstGeom>
-          <a:solidFill>
-            <a:srgbClr val="0D3325"/>
-          </a:solidFill>
-          <a:ln/>
-        </p:spPr>
-      </p:sp>
-      <p:sp>
-        <p:nvSpPr>
-          <p:cNvPr id="11" name="Text 9"/>
-          <p:cNvSpPr/>
-          <p:nvPr/>
-        </p:nvSpPr>
-        <p:spPr>
-          <a:xfrm>
-            <a:off x="8183880" y="1828800"/>
-            <a:ext cx="2331720" cy="566928"/>
-          </a:xfrm>
-          <a:prstGeom prst="rect">
-            <a:avLst/>
-          </a:prstGeom>
-          <a:noFill/>
-          <a:ln/>
-        </p:spPr>
-        <p:txBody>
-          <a:bodyPr wrap="square" lIns="0" tIns="0" rIns="0" bIns="0" rtlCol="0" anchor="ctr"/>
-          <a:lstStyle/>
-          <a:p>
-            <a:pPr algn="ctr" indent="0" marL="0">
-              <a:buNone/>
-            </a:pPr>
-            <a:r>
-              <a:rPr lang="en-US" sz="1400" b="1" dirty="0">
-                <a:solidFill>
-                  <a:srgbClr val="E8D48A"/>
-                </a:solidFill>
-                <a:latin typeface="Courier New" pitchFamily="34" charset="0"/>
-                <a:ea typeface="Courier New" pitchFamily="34" charset="-122"/>
-                <a:cs typeface="Courier New" pitchFamily="34" charset="-120"/>
-              </a:rPr>
-              <a:t>20250314</a:t>
-            </a:r>
-            <a:endParaRPr lang="en-US" sz="1400" dirty="0"/>
-          </a:p>
-        </p:txBody>
-      </p:sp>
-      <p:sp>
-        <p:nvSpPr>
-          <p:cNvPr id="12" name="Text 10"/>
-          <p:cNvSpPr/>
-          <p:nvPr/>
-        </p:nvSpPr>
-        <p:spPr>
-          <a:xfrm>
-            <a:off x="640080" y="2514600"/>
-            <a:ext cx="10515600" cy="320040"/>
-          </a:xfrm>
-          <a:prstGeom prst="rect">
-            <a:avLst/>
-          </a:prstGeom>
-          <a:noFill/>
-          <a:ln/>
-        </p:spPr>
-        <p:txBody>
-          <a:bodyPr wrap="square" lIns="0" tIns="0" rIns="0" bIns="0" rtlCol="0" anchor="ctr"/>
-          <a:lstStyle/>
-          <a:p>
-            <a:pPr indent="0" marL="0">
-              <a:buNone/>
-            </a:pPr>
-            <a:r>
-              <a:rPr lang="en-US" sz="1200" i="1" dirty="0">
-                <a:solidFill>
-                  <a:srgbClr val="5C6B63"/>
-                </a:solidFill>
-                <a:latin typeface="Calibri" pitchFamily="34" charset="0"/>
-                <a:ea typeface="Calibri" pitchFamily="34" charset="-122"/>
-                <a:cs typeface="Calibri" pitchFamily="34" charset="-120"/>
-              </a:rPr>
-              <a:t>date_depot dans declarations.csv — exactement comme dans les fichiers administratifs réels</a:t>
-            </a:r>
-            <a:endParaRPr lang="en-US" sz="1200" dirty="0"/>
-          </a:p>
-        </p:txBody>
-      </p:sp>
-      <p:sp>
-        <p:nvSpPr>
-          <p:cNvPr id="13" name="Shape 11"/>
-          <p:cNvSpPr/>
-          <p:nvPr/>
-        </p:nvSpPr>
-        <p:spPr>
-          <a:xfrm>
-            <a:off x="640080" y="3154680"/>
-            <a:ext cx="411480" cy="411480"/>
-          </a:xfrm>
-          <a:prstGeom prst="ellipse">
-            <a:avLst/>
-          </a:prstGeom>
-          <a:solidFill>
-            <a:srgbClr val="1E7A50"/>
-          </a:solidFill>
-          <a:ln/>
-        </p:spPr>
-      </p:sp>
       <p:pic>
         <p:nvPicPr>
-          <p:cNvPr id="14" name="Image 0" descr="icons/check.png">    </p:cNvPr>
+          <p:cNvPr id="4" name="Image 0" descr="logo-dgi.png">    </p:cNvPr>
           <p:cNvPicPr>
             <a:picLocks noChangeAspect="1"/>
           </p:cNvPicPr>
@@ -9728,8 +9613,8 @@
         </p:blipFill>
         <p:spPr>
           <a:xfrm>
-            <a:off x="747065" y="3261665"/>
-            <a:ext cx="197510" cy="197510"/>
+            <a:off x="10744200" y="384048"/>
+            <a:ext cx="1051560" cy="795528"/>
           </a:xfrm>
           <a:prstGeom prst="rect">
             <a:avLst/>
@@ -9738,14 +9623,36 @@
       </p:pic>
       <p:sp>
         <p:nvSpPr>
-          <p:cNvPr id="15" name="Text 12"/>
-          <p:cNvSpPr/>
-          <p:nvPr/>
-        </p:nvSpPr>
-        <p:spPr>
-          <a:xfrm>
-            <a:off x="1234440" y="3081528"/>
-            <a:ext cx="4800600" cy="914400"/>
+          <p:cNvPr id="5" name="Shape 2"/>
+          <p:cNvSpPr/>
+          <p:nvPr/>
+        </p:nvSpPr>
+        <p:spPr>
+          <a:xfrm>
+            <a:off x="640080" y="1828800"/>
+            <a:ext cx="2331720" cy="566928"/>
+          </a:xfrm>
+          <a:prstGeom prst="roundRect">
+            <a:avLst>
+              <a:gd name="adj" fmla="val 14516"/>
+            </a:avLst>
+          </a:prstGeom>
+          <a:solidFill>
+            <a:srgbClr val="0A2E1A"/>
+          </a:solidFill>
+          <a:ln/>
+        </p:spPr>
+      </p:sp>
+      <p:sp>
+        <p:nvSpPr>
+          <p:cNvPr id="6" name="Text 3"/>
+          <p:cNvSpPr/>
+          <p:nvPr/>
+        </p:nvSpPr>
+        <p:spPr>
+          <a:xfrm>
+            <a:off x="640080" y="1828800"/>
+            <a:ext cx="2331720" cy="566928"/>
           </a:xfrm>
           <a:prstGeom prst="rect">
             <a:avLst/>
@@ -9757,70 +9664,269 @@
           <a:bodyPr wrap="square" lIns="0" tIns="0" rIns="0" bIns="0" rtlCol="0" anchor="ctr"/>
           <a:lstStyle/>
           <a:p>
-            <a:pPr indent="0" marL="0">
-              <a:lnSpc>
-                <a:spcPct val="105000"/>
-              </a:lnSpc>
-              <a:buNone/>
-            </a:pPr>
-            <a:r>
-              <a:rPr lang="en-US" sz="1450" b="1" dirty="0">
-                <a:solidFill>
-                  <a:srgbClr val="1C2A24"/>
+            <a:pPr algn="ctr" indent="0" marL="0">
+              <a:buNone/>
+            </a:pPr>
+            <a:r>
+              <a:rPr lang="en-US" sz="1400" b="1" dirty="0">
+                <a:solidFill>
+                  <a:srgbClr val="FCD116"/>
+                </a:solidFill>
+                <a:latin typeface="Courier New" pitchFamily="34" charset="0"/>
+                <a:ea typeface="Courier New" pitchFamily="34" charset="-122"/>
+                <a:cs typeface="Courier New" pitchFamily="34" charset="-120"/>
+              </a:rPr>
+              <a:t>2025-03-14</a:t>
+            </a:r>
+            <a:endParaRPr lang="en-US" sz="1400" dirty="0"/>
+          </a:p>
+        </p:txBody>
+      </p:sp>
+      <p:sp>
+        <p:nvSpPr>
+          <p:cNvPr id="7" name="Shape 4"/>
+          <p:cNvSpPr/>
+          <p:nvPr/>
+        </p:nvSpPr>
+        <p:spPr>
+          <a:xfrm>
+            <a:off x="3154680" y="1828800"/>
+            <a:ext cx="2331720" cy="566928"/>
+          </a:xfrm>
+          <a:prstGeom prst="roundRect">
+            <a:avLst>
+              <a:gd name="adj" fmla="val 14516"/>
+            </a:avLst>
+          </a:prstGeom>
+          <a:solidFill>
+            <a:srgbClr val="0A2E1A"/>
+          </a:solidFill>
+          <a:ln/>
+        </p:spPr>
+      </p:sp>
+      <p:sp>
+        <p:nvSpPr>
+          <p:cNvPr id="8" name="Text 5"/>
+          <p:cNvSpPr/>
+          <p:nvPr/>
+        </p:nvSpPr>
+        <p:spPr>
+          <a:xfrm>
+            <a:off x="3154680" y="1828800"/>
+            <a:ext cx="2331720" cy="566928"/>
+          </a:xfrm>
+          <a:prstGeom prst="rect">
+            <a:avLst/>
+          </a:prstGeom>
+          <a:noFill/>
+          <a:ln/>
+        </p:spPr>
+        <p:txBody>
+          <a:bodyPr wrap="square" lIns="0" tIns="0" rIns="0" bIns="0" rtlCol="0" anchor="ctr"/>
+          <a:lstStyle/>
+          <a:p>
+            <a:pPr algn="ctr" indent="0" marL="0">
+              <a:buNone/>
+            </a:pPr>
+            <a:r>
+              <a:rPr lang="en-US" sz="1400" b="1" dirty="0">
+                <a:solidFill>
+                  <a:srgbClr val="FCD116"/>
+                </a:solidFill>
+                <a:latin typeface="Courier New" pitchFamily="34" charset="0"/>
+                <a:ea typeface="Courier New" pitchFamily="34" charset="-122"/>
+                <a:cs typeface="Courier New" pitchFamily="34" charset="-120"/>
+              </a:rPr>
+              <a:t>14/03/2025</a:t>
+            </a:r>
+            <a:endParaRPr lang="en-US" sz="1400" dirty="0"/>
+          </a:p>
+        </p:txBody>
+      </p:sp>
+      <p:sp>
+        <p:nvSpPr>
+          <p:cNvPr id="9" name="Shape 6"/>
+          <p:cNvSpPr/>
+          <p:nvPr/>
+        </p:nvSpPr>
+        <p:spPr>
+          <a:xfrm>
+            <a:off x="5669280" y="1828800"/>
+            <a:ext cx="2331720" cy="566928"/>
+          </a:xfrm>
+          <a:prstGeom prst="roundRect">
+            <a:avLst>
+              <a:gd name="adj" fmla="val 14516"/>
+            </a:avLst>
+          </a:prstGeom>
+          <a:solidFill>
+            <a:srgbClr val="0A2E1A"/>
+          </a:solidFill>
+          <a:ln/>
+        </p:spPr>
+      </p:sp>
+      <p:sp>
+        <p:nvSpPr>
+          <p:cNvPr id="10" name="Text 7"/>
+          <p:cNvSpPr/>
+          <p:nvPr/>
+        </p:nvSpPr>
+        <p:spPr>
+          <a:xfrm>
+            <a:off x="5669280" y="1828800"/>
+            <a:ext cx="2331720" cy="566928"/>
+          </a:xfrm>
+          <a:prstGeom prst="rect">
+            <a:avLst/>
+          </a:prstGeom>
+          <a:noFill/>
+          <a:ln/>
+        </p:spPr>
+        <p:txBody>
+          <a:bodyPr wrap="square" lIns="0" tIns="0" rIns="0" bIns="0" rtlCol="0" anchor="ctr"/>
+          <a:lstStyle/>
+          <a:p>
+            <a:pPr algn="ctr" indent="0" marL="0">
+              <a:buNone/>
+            </a:pPr>
+            <a:r>
+              <a:rPr lang="en-US" sz="1400" b="1" dirty="0">
+                <a:solidFill>
+                  <a:srgbClr val="FCD116"/>
+                </a:solidFill>
+                <a:latin typeface="Courier New" pitchFamily="34" charset="0"/>
+                <a:ea typeface="Courier New" pitchFamily="34" charset="-122"/>
+                <a:cs typeface="Courier New" pitchFamily="34" charset="-120"/>
+              </a:rPr>
+              <a:t>14-3-2025</a:t>
+            </a:r>
+            <a:endParaRPr lang="en-US" sz="1400" dirty="0"/>
+          </a:p>
+        </p:txBody>
+      </p:sp>
+      <p:sp>
+        <p:nvSpPr>
+          <p:cNvPr id="11" name="Shape 8"/>
+          <p:cNvSpPr/>
+          <p:nvPr/>
+        </p:nvSpPr>
+        <p:spPr>
+          <a:xfrm>
+            <a:off x="8183880" y="1828800"/>
+            <a:ext cx="2331720" cy="566928"/>
+          </a:xfrm>
+          <a:prstGeom prst="roundRect">
+            <a:avLst>
+              <a:gd name="adj" fmla="val 14516"/>
+            </a:avLst>
+          </a:prstGeom>
+          <a:solidFill>
+            <a:srgbClr val="0A2E1A"/>
+          </a:solidFill>
+          <a:ln/>
+        </p:spPr>
+      </p:sp>
+      <p:sp>
+        <p:nvSpPr>
+          <p:cNvPr id="12" name="Text 9"/>
+          <p:cNvSpPr/>
+          <p:nvPr/>
+        </p:nvSpPr>
+        <p:spPr>
+          <a:xfrm>
+            <a:off x="8183880" y="1828800"/>
+            <a:ext cx="2331720" cy="566928"/>
+          </a:xfrm>
+          <a:prstGeom prst="rect">
+            <a:avLst/>
+          </a:prstGeom>
+          <a:noFill/>
+          <a:ln/>
+        </p:spPr>
+        <p:txBody>
+          <a:bodyPr wrap="square" lIns="0" tIns="0" rIns="0" bIns="0" rtlCol="0" anchor="ctr"/>
+          <a:lstStyle/>
+          <a:p>
+            <a:pPr algn="ctr" indent="0" marL="0">
+              <a:buNone/>
+            </a:pPr>
+            <a:r>
+              <a:rPr lang="en-US" sz="1400" b="1" dirty="0">
+                <a:solidFill>
+                  <a:srgbClr val="FCD116"/>
+                </a:solidFill>
+                <a:latin typeface="Courier New" pitchFamily="34" charset="0"/>
+                <a:ea typeface="Courier New" pitchFamily="34" charset="-122"/>
+                <a:cs typeface="Courier New" pitchFamily="34" charset="-120"/>
+              </a:rPr>
+              <a:t>20250314</a:t>
+            </a:r>
+            <a:endParaRPr lang="en-US" sz="1400" dirty="0"/>
+          </a:p>
+        </p:txBody>
+      </p:sp>
+      <p:sp>
+        <p:nvSpPr>
+          <p:cNvPr id="13" name="Text 10"/>
+          <p:cNvSpPr/>
+          <p:nvPr/>
+        </p:nvSpPr>
+        <p:spPr>
+          <a:xfrm>
+            <a:off x="640080" y="2514600"/>
+            <a:ext cx="10515600" cy="320040"/>
+          </a:xfrm>
+          <a:prstGeom prst="rect">
+            <a:avLst/>
+          </a:prstGeom>
+          <a:noFill/>
+          <a:ln/>
+        </p:spPr>
+        <p:txBody>
+          <a:bodyPr wrap="square" lIns="0" tIns="0" rIns="0" bIns="0" rtlCol="0" anchor="ctr"/>
+          <a:lstStyle/>
+          <a:p>
+            <a:pPr indent="0" marL="0">
+              <a:buNone/>
+            </a:pPr>
+            <a:r>
+              <a:rPr lang="en-US" sz="1200" i="1" dirty="0">
+                <a:solidFill>
+                  <a:srgbClr val="5C6B63"/>
                 </a:solidFill>
                 <a:latin typeface="Calibri" pitchFamily="34" charset="0"/>
                 <a:ea typeface="Calibri" pitchFamily="34" charset="-122"/>
                 <a:cs typeface="Calibri" pitchFamily="34" charset="-120"/>
               </a:rPr>
-              <a:t>Essayer chaque format</a:t>
-            </a:r>
-            <a:endParaRPr lang="en-US" sz="1450" dirty="0"/>
-          </a:p>
-          <a:p>
-            <a:pPr indent="0" marL="0">
-              <a:lnSpc>
-                <a:spcPct val="105000"/>
-              </a:lnSpc>
-              <a:buNone/>
-            </a:pPr>
-            <a:r>
-              <a:rPr lang="en-US" sz="1250" dirty="0">
-                <a:solidFill>
-                  <a:srgbClr val="5C6B63"/>
-                </a:solidFill>
-                <a:latin typeface="Calibri" pitchFamily="34" charset="0"/>
-                <a:ea typeface="Calibri" pitchFamily="34" charset="-122"/>
-                <a:cs typeface="Calibri" pitchFamily="34" charset="-120"/>
-              </a:rPr>
-              <a:t>strptime dans un try/except ValueError, format après format.</a:t>
-            </a:r>
-            <a:endParaRPr lang="en-US" sz="1450" dirty="0"/>
+              <a:t>date_depot dans declarations.csv — exactement comme dans les fichiers administratifs réels</a:t>
+            </a:r>
+            <a:endParaRPr lang="en-US" sz="1200" dirty="0"/>
           </a:p>
         </p:txBody>
       </p:sp>
       <p:sp>
         <p:nvSpPr>
-          <p:cNvPr id="16" name="Shape 13"/>
-          <p:cNvSpPr/>
-          <p:nvPr/>
-        </p:nvSpPr>
-        <p:spPr>
-          <a:xfrm>
-            <a:off x="640080" y="4160520"/>
+          <p:cNvPr id="14" name="Shape 11"/>
+          <p:cNvSpPr/>
+          <p:nvPr/>
+        </p:nvSpPr>
+        <p:spPr>
+          <a:xfrm>
+            <a:off x="640080" y="3154680"/>
             <a:ext cx="411480" cy="411480"/>
           </a:xfrm>
           <a:prstGeom prst="ellipse">
             <a:avLst/>
           </a:prstGeom>
           <a:solidFill>
-            <a:srgbClr val="1E7A50"/>
+            <a:srgbClr val="2E9E4F"/>
           </a:solidFill>
           <a:ln/>
         </p:spPr>
       </p:sp>
       <p:pic>
         <p:nvPicPr>
-          <p:cNvPr id="17" name="Image 1" descr="icons/check.png">    </p:cNvPr>
+          <p:cNvPr id="15" name="Image 1" descr="icons/check.png">    </p:cNvPr>
           <p:cNvPicPr>
             <a:picLocks noChangeAspect="1"/>
           </p:cNvPicPr>
@@ -9834,7 +9940,7 @@
         </p:blipFill>
         <p:spPr>
           <a:xfrm>
-            <a:off x="747065" y="4267505"/>
+            <a:off x="747065" y="3261665"/>
             <a:ext cx="197510" cy="197510"/>
           </a:xfrm>
           <a:prstGeom prst="rect">
@@ -9844,13 +9950,13 @@
       </p:pic>
       <p:sp>
         <p:nvSpPr>
-          <p:cNvPr id="18" name="Text 14"/>
-          <p:cNvSpPr/>
-          <p:nvPr/>
-        </p:nvSpPr>
-        <p:spPr>
-          <a:xfrm>
-            <a:off x="1234440" y="4087368"/>
+          <p:cNvPr id="16" name="Text 12"/>
+          <p:cNvSpPr/>
+          <p:nvPr/>
+        </p:nvSpPr>
+        <p:spPr>
+          <a:xfrm>
+            <a:off x="1234440" y="3081528"/>
             <a:ext cx="4800600" cy="914400"/>
           </a:xfrm>
           <a:prstGeom prst="rect">
@@ -9878,7 +9984,7 @@
                 <a:ea typeface="Calibri" pitchFamily="34" charset="-122"/>
                 <a:cs typeface="Calibri" pitchFamily="34" charset="-120"/>
               </a:rPr>
-              <a:t>Renvoyer None si tout échoue</a:t>
+              <a:t>Essayer chaque format</a:t>
             </a:r>
             <a:endParaRPr lang="en-US" sz="1450" dirty="0"/>
           </a:p>
@@ -9898,6 +10004,112 @@
                 <a:ea typeface="Calibri" pitchFamily="34" charset="-122"/>
                 <a:cs typeface="Calibri" pitchFamily="34" charset="-120"/>
               </a:rPr>
+              <a:t>strptime dans un try/except ValueError, format après format.</a:t>
+            </a:r>
+            <a:endParaRPr lang="en-US" sz="1450" dirty="0"/>
+          </a:p>
+        </p:txBody>
+      </p:sp>
+      <p:sp>
+        <p:nvSpPr>
+          <p:cNvPr id="17" name="Shape 13"/>
+          <p:cNvSpPr/>
+          <p:nvPr/>
+        </p:nvSpPr>
+        <p:spPr>
+          <a:xfrm>
+            <a:off x="640080" y="4160520"/>
+            <a:ext cx="411480" cy="411480"/>
+          </a:xfrm>
+          <a:prstGeom prst="ellipse">
+            <a:avLst/>
+          </a:prstGeom>
+          <a:solidFill>
+            <a:srgbClr val="2E9E4F"/>
+          </a:solidFill>
+          <a:ln/>
+        </p:spPr>
+      </p:sp>
+      <p:pic>
+        <p:nvPicPr>
+          <p:cNvPr id="18" name="Image 2" descr="icons/check.png">    </p:cNvPr>
+          <p:cNvPicPr>
+            <a:picLocks noChangeAspect="1"/>
+          </p:cNvPicPr>
+          <p:nvPr/>
+        </p:nvPicPr>
+        <p:blipFill>
+          <a:blip r:embed="rId3"/>
+          <a:stretch>
+            <a:fillRect/>
+          </a:stretch>
+        </p:blipFill>
+        <p:spPr>
+          <a:xfrm>
+            <a:off x="747065" y="4267505"/>
+            <a:ext cx="197510" cy="197510"/>
+          </a:xfrm>
+          <a:prstGeom prst="rect">
+            <a:avLst/>
+          </a:prstGeom>
+        </p:spPr>
+      </p:pic>
+      <p:sp>
+        <p:nvSpPr>
+          <p:cNvPr id="19" name="Text 14"/>
+          <p:cNvSpPr/>
+          <p:nvPr/>
+        </p:nvSpPr>
+        <p:spPr>
+          <a:xfrm>
+            <a:off x="1234440" y="4087368"/>
+            <a:ext cx="4800600" cy="914400"/>
+          </a:xfrm>
+          <a:prstGeom prst="rect">
+            <a:avLst/>
+          </a:prstGeom>
+          <a:noFill/>
+          <a:ln/>
+        </p:spPr>
+        <p:txBody>
+          <a:bodyPr wrap="square" lIns="0" tIns="0" rIns="0" bIns="0" rtlCol="0" anchor="ctr"/>
+          <a:lstStyle/>
+          <a:p>
+            <a:pPr indent="0" marL="0">
+              <a:lnSpc>
+                <a:spcPct val="105000"/>
+              </a:lnSpc>
+              <a:buNone/>
+            </a:pPr>
+            <a:r>
+              <a:rPr lang="en-US" sz="1450" b="1" dirty="0">
+                <a:solidFill>
+                  <a:srgbClr val="1C2A24"/>
+                </a:solidFill>
+                <a:latin typeface="Calibri" pitchFamily="34" charset="0"/>
+                <a:ea typeface="Calibri" pitchFamily="34" charset="-122"/>
+                <a:cs typeface="Calibri" pitchFamily="34" charset="-120"/>
+              </a:rPr>
+              <a:t>Renvoyer None si tout échoue</a:t>
+            </a:r>
+            <a:endParaRPr lang="en-US" sz="1450" dirty="0"/>
+          </a:p>
+          <a:p>
+            <a:pPr indent="0" marL="0">
+              <a:lnSpc>
+                <a:spcPct val="105000"/>
+              </a:lnSpc>
+              <a:buNone/>
+            </a:pPr>
+            <a:r>
+              <a:rPr lang="en-US" sz="1250" dirty="0">
+                <a:solidFill>
+                  <a:srgbClr val="5C6B63"/>
+                </a:solidFill>
+                <a:latin typeface="Calibri" pitchFamily="34" charset="0"/>
+                <a:ea typeface="Calibri" pitchFamily="34" charset="-122"/>
+                <a:cs typeface="Calibri" pitchFamily="34" charset="-120"/>
+              </a:rPr>
               <a:t>L’appelant décide : écarter, corriger, signaler.</a:t>
             </a:r>
             <a:endParaRPr lang="en-US" sz="1450" dirty="0"/>
@@ -9906,7 +10118,7 @@
       </p:sp>
       <p:sp>
         <p:nvSpPr>
-          <p:cNvPr id="19" name="Shape 15"/>
+          <p:cNvPr id="20" name="Shape 15"/>
           <p:cNvSpPr/>
           <p:nvPr/>
         </p:nvSpPr>
@@ -9921,14 +10133,14 @@
             </a:avLst>
           </a:prstGeom>
           <a:solidFill>
-            <a:srgbClr val="10241B"/>
+            <a:srgbClr val="0F2418"/>
           </a:solidFill>
           <a:ln/>
         </p:spPr>
       </p:sp>
       <p:sp>
         <p:nvSpPr>
-          <p:cNvPr id="20" name="Shape 16"/>
+          <p:cNvPr id="21" name="Shape 16"/>
           <p:cNvSpPr/>
           <p:nvPr/>
         </p:nvSpPr>
@@ -9948,7 +10160,7 @@
       </p:sp>
       <p:sp>
         <p:nvSpPr>
-          <p:cNvPr id="21" name="Shape 17"/>
+          <p:cNvPr id="22" name="Shape 17"/>
           <p:cNvSpPr/>
           <p:nvPr/>
         </p:nvSpPr>
@@ -9961,14 +10173,14 @@
             <a:avLst/>
           </a:prstGeom>
           <a:solidFill>
-            <a:srgbClr val="C9A227"/>
+            <a:srgbClr val="C79100"/>
           </a:solidFill>
           <a:ln/>
         </p:spPr>
       </p:sp>
       <p:sp>
         <p:nvSpPr>
-          <p:cNvPr id="22" name="Shape 18"/>
+          <p:cNvPr id="23" name="Shape 18"/>
           <p:cNvSpPr/>
           <p:nvPr/>
         </p:nvSpPr>
@@ -9988,7 +10200,7 @@
       </p:sp>
       <p:sp>
         <p:nvSpPr>
-          <p:cNvPr id="23" name="Text 19"/>
+          <p:cNvPr id="24" name="Text 19"/>
           <p:cNvSpPr/>
           <p:nvPr/>
         </p:nvSpPr>
@@ -10027,7 +10239,7 @@
       </p:sp>
       <p:sp>
         <p:nvSpPr>
-          <p:cNvPr id="24" name="Text 20"/>
+          <p:cNvPr id="25" name="Text 20"/>
           <p:cNvSpPr/>
           <p:nvPr/>
         </p:nvSpPr>
@@ -10679,7 +10891,7 @@
         <p:spPr>
           <a:xfrm>
             <a:off x="548640" y="384048"/>
-            <a:ext cx="10972800" cy="320040"/>
+            <a:ext cx="9601200" cy="320040"/>
           </a:xfrm>
           <a:prstGeom prst="rect">
             <a:avLst/>
@@ -10697,7 +10909,7 @@
             <a:r>
               <a:rPr lang="en-US" sz="1300" b="1" spc="200" kern="0" dirty="0">
                 <a:solidFill>
-                  <a:srgbClr val="C9A227"/>
+                  <a:srgbClr val="C79100"/>
                 </a:solidFill>
                 <a:latin typeface="Calibri" pitchFamily="34" charset="0"/>
                 <a:ea typeface="Calibri" pitchFamily="34" charset="-122"/>
@@ -10718,7 +10930,7 @@
         <p:spPr>
           <a:xfrm>
             <a:off x="548640" y="658368"/>
-            <a:ext cx="11064240" cy="731520"/>
+            <a:ext cx="9966960" cy="731520"/>
           </a:xfrm>
           <a:prstGeom prst="rect">
             <a:avLst/>
@@ -10736,7 +10948,7 @@
             <a:r>
               <a:rPr lang="en-US" sz="3400" b="1" dirty="0">
                 <a:solidFill>
-                  <a:srgbClr val="14563C"/>
+                  <a:srgbClr val="0E7A3D"/>
                 </a:solidFill>
                 <a:latin typeface="Cambria" pitchFamily="34" charset="0"/>
                 <a:ea typeface="Cambria" pitchFamily="34" charset="-122"/>
@@ -10748,623 +10960,9 @@
           </a:p>
         </p:txBody>
       </p:sp>
-      <p:sp>
-        <p:nvSpPr>
-          <p:cNvPr id="4" name="Shape 2"/>
-          <p:cNvSpPr/>
-          <p:nvPr/>
-        </p:nvSpPr>
-        <p:spPr>
-          <a:xfrm>
-            <a:off x="640080" y="1783080"/>
-            <a:ext cx="5120640" cy="3108960"/>
-          </a:xfrm>
-          <a:prstGeom prst="roundRect">
-            <a:avLst>
-              <a:gd name="adj" fmla="val 2353"/>
-            </a:avLst>
-          </a:prstGeom>
-          <a:solidFill>
-            <a:srgbClr val="10241B"/>
-          </a:solidFill>
-          <a:ln/>
-        </p:spPr>
-      </p:sp>
-      <p:sp>
-        <p:nvSpPr>
-          <p:cNvPr id="5" name="Shape 3"/>
-          <p:cNvSpPr/>
-          <p:nvPr/>
-        </p:nvSpPr>
-        <p:spPr>
-          <a:xfrm>
-            <a:off x="841248" y="1947672"/>
-            <a:ext cx="109728" cy="109728"/>
-          </a:xfrm>
-          <a:prstGeom prst="ellipse">
-            <a:avLst/>
-          </a:prstGeom>
-          <a:solidFill>
-            <a:srgbClr val="E06C60"/>
-          </a:solidFill>
-          <a:ln/>
-        </p:spPr>
-      </p:sp>
-      <p:sp>
-        <p:nvSpPr>
-          <p:cNvPr id="6" name="Shape 4"/>
-          <p:cNvSpPr/>
-          <p:nvPr/>
-        </p:nvSpPr>
-        <p:spPr>
-          <a:xfrm>
-            <a:off x="1024128" y="1947672"/>
-            <a:ext cx="109728" cy="109728"/>
-          </a:xfrm>
-          <a:prstGeom prst="ellipse">
-            <a:avLst/>
-          </a:prstGeom>
-          <a:solidFill>
-            <a:srgbClr val="C9A227"/>
-          </a:solidFill>
-          <a:ln/>
-        </p:spPr>
-      </p:sp>
-      <p:sp>
-        <p:nvSpPr>
-          <p:cNvPr id="7" name="Shape 5"/>
-          <p:cNvSpPr/>
-          <p:nvPr/>
-        </p:nvSpPr>
-        <p:spPr>
-          <a:xfrm>
-            <a:off x="1207008" y="1947672"/>
-            <a:ext cx="109728" cy="109728"/>
-          </a:xfrm>
-          <a:prstGeom prst="ellipse">
-            <a:avLst/>
-          </a:prstGeom>
-          <a:solidFill>
-            <a:srgbClr val="61B888"/>
-          </a:solidFill>
-          <a:ln/>
-        </p:spPr>
-      </p:sp>
-      <p:sp>
-        <p:nvSpPr>
-          <p:cNvPr id="8" name="Text 6"/>
-          <p:cNvSpPr/>
-          <p:nvPr/>
-        </p:nvSpPr>
-        <p:spPr>
-          <a:xfrm>
-            <a:off x="1417320" y="1874520"/>
-            <a:ext cx="4206240" cy="274320"/>
-          </a:xfrm>
-          <a:prstGeom prst="rect">
-            <a:avLst/>
-          </a:prstGeom>
-          <a:noFill/>
-          <a:ln/>
-        </p:spPr>
-        <p:txBody>
-          <a:bodyPr wrap="square" lIns="0" tIns="0" rIns="0" bIns="0" rtlCol="0" anchor="ctr"/>
-          <a:lstStyle/>
-          <a:p>
-            <a:pPr algn="r" indent="0" marL="0">
-              <a:buNone/>
-            </a:pPr>
-            <a:r>
-              <a:rPr lang="en-US" sz="1050" dirty="0">
-                <a:solidFill>
-                  <a:srgbClr val="9FBFAF"/>
-                </a:solidFill>
-                <a:latin typeface="Courier New" pitchFamily="34" charset="0"/>
-                <a:ea typeface="Courier New" pitchFamily="34" charset="-122"/>
-                <a:cs typeface="Courier New" pitchFamily="34" charset="-120"/>
-              </a:rPr>
-              <a:t>arborescence</a:t>
-            </a:r>
-            <a:endParaRPr lang="en-US" sz="1050" dirty="0"/>
-          </a:p>
-        </p:txBody>
-      </p:sp>
-      <p:sp>
-        <p:nvSpPr>
-          <p:cNvPr id="9" name="Text 7"/>
-          <p:cNvSpPr/>
-          <p:nvPr/>
-        </p:nvSpPr>
-        <p:spPr>
-          <a:xfrm>
-            <a:off x="914400" y="2167128"/>
-            <a:ext cx="4572000" cy="2560320"/>
-          </a:xfrm>
-          <a:prstGeom prst="rect">
-            <a:avLst/>
-          </a:prstGeom>
-          <a:noFill/>
-          <a:ln/>
-        </p:spPr>
-        <p:txBody>
-          <a:bodyPr wrap="square" lIns="0" tIns="0" rIns="0" bIns="0" rtlCol="0" anchor="t"/>
-          <a:lstStyle/>
-          <a:p>
-            <a:pPr indent="0" marL="0">
-              <a:lnSpc>
-                <a:spcPct val="116000"/>
-              </a:lnSpc>
-              <a:buNone/>
-            </a:pPr>
-            <a:r>
-              <a:rPr lang="en-US" sz="1200" dirty="0">
-                <a:solidFill>
-                  <a:srgbClr val="E8F0EA"/>
-                </a:solidFill>
-                <a:latin typeface="Courier New" pitchFamily="34" charset="0"/>
-                <a:ea typeface="Courier New" pitchFamily="34" charset="-122"/>
-                <a:cs typeface="Courier New" pitchFamily="34" charset="-120"/>
-              </a:rPr>
-              <a:t>07-modules-et-organisation/</a:t>
-            </a:r>
-            <a:endParaRPr lang="en-US" sz="1200" dirty="0"/>
-          </a:p>
-          <a:p>
-            <a:pPr indent="0" marL="0">
-              <a:lnSpc>
-                <a:spcPct val="116000"/>
-              </a:lnSpc>
-              <a:buNone/>
-            </a:pPr>
-            <a:r>
-              <a:rPr lang="en-US" sz="1200" dirty="0">
-                <a:solidFill>
-                  <a:srgbClr val="E8F0EA"/>
-                </a:solidFill>
-                <a:latin typeface="Courier New" pitchFamily="34" charset="0"/>
-                <a:ea typeface="Courier New" pitchFamily="34" charset="-122"/>
-                <a:cs typeface="Courier New" pitchFamily="34" charset="-120"/>
-              </a:rPr>
-              <a:t>├── fiscalite/</a:t>
-            </a:r>
-            <a:pPr indent="0" marL="0">
-              <a:lnSpc>
-                <a:spcPct val="116000"/>
-              </a:lnSpc>
-              <a:buNone/>
-            </a:pPr>
-            <a:r>
-              <a:rPr lang="en-US" sz="1200" dirty="0">
-                <a:solidFill>
-                  <a:srgbClr val="7C9488"/>
-                </a:solidFill>
-                <a:latin typeface="Courier New" pitchFamily="34" charset="0"/>
-                <a:ea typeface="Courier New" pitchFamily="34" charset="-122"/>
-                <a:cs typeface="Courier New" pitchFamily="34" charset="-120"/>
-              </a:rPr>
-              <a:t>        # le paquet</a:t>
-            </a:r>
-            <a:endParaRPr lang="en-US" sz="1200" dirty="0"/>
-          </a:p>
-          <a:p>
-            <a:pPr indent="0" marL="0">
-              <a:lnSpc>
-                <a:spcPct val="116000"/>
-              </a:lnSpc>
-              <a:buNone/>
-            </a:pPr>
-            <a:r>
-              <a:rPr lang="en-US" sz="1200" dirty="0">
-                <a:solidFill>
-                  <a:srgbClr val="E8F0EA"/>
-                </a:solidFill>
-                <a:latin typeface="Courier New" pitchFamily="34" charset="0"/>
-                <a:ea typeface="Courier New" pitchFamily="34" charset="-122"/>
-                <a:cs typeface="Courier New" pitchFamily="34" charset="-120"/>
-              </a:rPr>
-              <a:t>│   ├── __init__.py</a:t>
-            </a:r>
-            <a:endParaRPr lang="en-US" sz="1200" dirty="0"/>
-          </a:p>
-          <a:p>
-            <a:pPr indent="0" marL="0">
-              <a:lnSpc>
-                <a:spcPct val="116000"/>
-              </a:lnSpc>
-              <a:buNone/>
-            </a:pPr>
-            <a:r>
-              <a:rPr lang="en-US" sz="1200" dirty="0">
-                <a:solidFill>
-                  <a:srgbClr val="E8F0EA"/>
-                </a:solidFill>
-                <a:latin typeface="Courier New" pitchFamily="34" charset="0"/>
-                <a:ea typeface="Courier New" pitchFamily="34" charset="-122"/>
-                <a:cs typeface="Courier New" pitchFamily="34" charset="-120"/>
-              </a:rPr>
-              <a:t>│   ├── dates.py</a:t>
-            </a:r>
-            <a:pPr indent="0" marL="0">
-              <a:lnSpc>
-                <a:spcPct val="116000"/>
-              </a:lnSpc>
-              <a:buNone/>
-            </a:pPr>
-            <a:r>
-              <a:rPr lang="en-US" sz="1200" dirty="0">
-                <a:solidFill>
-                  <a:srgbClr val="7C9488"/>
-                </a:solidFill>
-                <a:latin typeface="Courier New" pitchFamily="34" charset="0"/>
-                <a:ea typeface="Courier New" pitchFamily="34" charset="-122"/>
-                <a:cs typeface="Courier New" pitchFamily="34" charset="-120"/>
-              </a:rPr>
-              <a:t>      # normaliser()</a:t>
-            </a:r>
-            <a:endParaRPr lang="en-US" sz="1200" dirty="0"/>
-          </a:p>
-          <a:p>
-            <a:pPr indent="0" marL="0">
-              <a:lnSpc>
-                <a:spcPct val="116000"/>
-              </a:lnSpc>
-              <a:buNone/>
-            </a:pPr>
-            <a:r>
-              <a:rPr lang="en-US" sz="1200" dirty="0">
-                <a:solidFill>
-                  <a:srgbClr val="E8F0EA"/>
-                </a:solidFill>
-                <a:latin typeface="Courier New" pitchFamily="34" charset="0"/>
-                <a:ea typeface="Courier New" pitchFamily="34" charset="-122"/>
-                <a:cs typeface="Courier New" pitchFamily="34" charset="-120"/>
-              </a:rPr>
-              <a:t>│   └── penalites.py</a:t>
-            </a:r>
-            <a:pPr indent="0" marL="0">
-              <a:lnSpc>
-                <a:spcPct val="116000"/>
-              </a:lnSpc>
-              <a:buNone/>
-            </a:pPr>
-            <a:r>
-              <a:rPr lang="en-US" sz="1200" dirty="0">
-                <a:solidFill>
-                  <a:srgbClr val="7C9488"/>
-                </a:solidFill>
-                <a:latin typeface="Courier New" pitchFamily="34" charset="0"/>
-                <a:ea typeface="Courier New" pitchFamily="34" charset="-122"/>
-                <a:cs typeface="Courier New" pitchFamily="34" charset="-120"/>
-              </a:rPr>
-              <a:t>  # penalite()</a:t>
-            </a:r>
-            <a:endParaRPr lang="en-US" sz="1200" dirty="0"/>
-          </a:p>
-          <a:p>
-            <a:pPr indent="0" marL="0">
-              <a:lnSpc>
-                <a:spcPct val="116000"/>
-              </a:lnSpc>
-              <a:buNone/>
-            </a:pPr>
-            <a:r>
-              <a:rPr lang="en-US" sz="1200" dirty="0">
-                <a:solidFill>
-                  <a:srgbClr val="E8F0EA"/>
-                </a:solidFill>
-                <a:latin typeface="Courier New" pitchFamily="34" charset="0"/>
-                <a:ea typeface="Courier New" pitchFamily="34" charset="-122"/>
-                <a:cs typeface="Courier New" pitchFamily="34" charset="-120"/>
-              </a:rPr>
-              <a:t>└── tp_utiliser_paquet.py</a:t>
-            </a:r>
-            <a:endParaRPr lang="en-US" sz="1200" dirty="0"/>
-          </a:p>
-        </p:txBody>
-      </p:sp>
-      <p:sp>
-        <p:nvSpPr>
-          <p:cNvPr id="10" name="Shape 8"/>
-          <p:cNvSpPr/>
-          <p:nvPr/>
-        </p:nvSpPr>
-        <p:spPr>
-          <a:xfrm>
-            <a:off x="640080" y="5120640"/>
-            <a:ext cx="5120640" cy="1234440"/>
-          </a:xfrm>
-          <a:prstGeom prst="roundRect">
-            <a:avLst>
-              <a:gd name="adj" fmla="val 5926"/>
-            </a:avLst>
-          </a:prstGeom>
-          <a:solidFill>
-            <a:srgbClr val="10241B"/>
-          </a:solidFill>
-          <a:ln/>
-        </p:spPr>
-      </p:sp>
-      <p:sp>
-        <p:nvSpPr>
-          <p:cNvPr id="11" name="Shape 9"/>
-          <p:cNvSpPr/>
-          <p:nvPr/>
-        </p:nvSpPr>
-        <p:spPr>
-          <a:xfrm>
-            <a:off x="841248" y="5285232"/>
-            <a:ext cx="109728" cy="109728"/>
-          </a:xfrm>
-          <a:prstGeom prst="ellipse">
-            <a:avLst/>
-          </a:prstGeom>
-          <a:solidFill>
-            <a:srgbClr val="E06C60"/>
-          </a:solidFill>
-          <a:ln/>
-        </p:spPr>
-      </p:sp>
-      <p:sp>
-        <p:nvSpPr>
-          <p:cNvPr id="12" name="Shape 10"/>
-          <p:cNvSpPr/>
-          <p:nvPr/>
-        </p:nvSpPr>
-        <p:spPr>
-          <a:xfrm>
-            <a:off x="1024128" y="5285232"/>
-            <a:ext cx="109728" cy="109728"/>
-          </a:xfrm>
-          <a:prstGeom prst="ellipse">
-            <a:avLst/>
-          </a:prstGeom>
-          <a:solidFill>
-            <a:srgbClr val="C9A227"/>
-          </a:solidFill>
-          <a:ln/>
-        </p:spPr>
-      </p:sp>
-      <p:sp>
-        <p:nvSpPr>
-          <p:cNvPr id="13" name="Shape 11"/>
-          <p:cNvSpPr/>
-          <p:nvPr/>
-        </p:nvSpPr>
-        <p:spPr>
-          <a:xfrm>
-            <a:off x="1207008" y="5285232"/>
-            <a:ext cx="109728" cy="109728"/>
-          </a:xfrm>
-          <a:prstGeom prst="ellipse">
-            <a:avLst/>
-          </a:prstGeom>
-          <a:solidFill>
-            <a:srgbClr val="61B888"/>
-          </a:solidFill>
-          <a:ln/>
-        </p:spPr>
-      </p:sp>
-      <p:sp>
-        <p:nvSpPr>
-          <p:cNvPr id="14" name="Text 12"/>
-          <p:cNvSpPr/>
-          <p:nvPr/>
-        </p:nvSpPr>
-        <p:spPr>
-          <a:xfrm>
-            <a:off x="914400" y="5504688"/>
-            <a:ext cx="4572000" cy="685800"/>
-          </a:xfrm>
-          <a:prstGeom prst="rect">
-            <a:avLst/>
-          </a:prstGeom>
-          <a:noFill/>
-          <a:ln/>
-        </p:spPr>
-        <p:txBody>
-          <a:bodyPr wrap="square" lIns="0" tIns="0" rIns="0" bIns="0" rtlCol="0" anchor="t"/>
-          <a:lstStyle/>
-          <a:p>
-            <a:pPr indent="0" marL="0">
-              <a:lnSpc>
-                <a:spcPct val="116000"/>
-              </a:lnSpc>
-              <a:buNone/>
-            </a:pPr>
-            <a:r>
-              <a:rPr lang="en-US" sz="1150" b="1" dirty="0">
-                <a:solidFill>
-                  <a:srgbClr val="F2C46D"/>
-                </a:solidFill>
-                <a:latin typeface="Courier New" pitchFamily="34" charset="0"/>
-                <a:ea typeface="Courier New" pitchFamily="34" charset="-122"/>
-                <a:cs typeface="Courier New" pitchFamily="34" charset="-120"/>
-              </a:rPr>
-              <a:t>from</a:t>
-            </a:r>
-            <a:pPr indent="0" marL="0">
-              <a:lnSpc>
-                <a:spcPct val="116000"/>
-              </a:lnSpc>
-              <a:buNone/>
-            </a:pPr>
-            <a:r>
-              <a:rPr lang="en-US" sz="1150" dirty="0">
-                <a:solidFill>
-                  <a:srgbClr val="E8F0EA"/>
-                </a:solidFill>
-                <a:latin typeface="Courier New" pitchFamily="34" charset="0"/>
-                <a:ea typeface="Courier New" pitchFamily="34" charset="-122"/>
-                <a:cs typeface="Courier New" pitchFamily="34" charset="-120"/>
-              </a:rPr>
-              <a:t> fiscalite </a:t>
-            </a:r>
-            <a:pPr indent="0" marL="0">
-              <a:lnSpc>
-                <a:spcPct val="116000"/>
-              </a:lnSpc>
-              <a:buNone/>
-            </a:pPr>
-            <a:r>
-              <a:rPr lang="en-US" sz="1150" b="1" dirty="0">
-                <a:solidFill>
-                  <a:srgbClr val="F2C46D"/>
-                </a:solidFill>
-                <a:latin typeface="Courier New" pitchFamily="34" charset="0"/>
-                <a:ea typeface="Courier New" pitchFamily="34" charset="-122"/>
-                <a:cs typeface="Courier New" pitchFamily="34" charset="-120"/>
-              </a:rPr>
-              <a:t>import</a:t>
-            </a:r>
-            <a:pPr indent="0" marL="0">
-              <a:lnSpc>
-                <a:spcPct val="116000"/>
-              </a:lnSpc>
-              <a:buNone/>
-            </a:pPr>
-            <a:r>
-              <a:rPr lang="en-US" sz="1150" dirty="0">
-                <a:solidFill>
-                  <a:srgbClr val="E8F0EA"/>
-                </a:solidFill>
-                <a:latin typeface="Courier New" pitchFamily="34" charset="0"/>
-                <a:ea typeface="Courier New" pitchFamily="34" charset="-122"/>
-                <a:cs typeface="Courier New" pitchFamily="34" charset="-120"/>
-              </a:rPr>
-              <a:t> normaliser, penalite</a:t>
-            </a:r>
-            <a:endParaRPr lang="en-US" sz="1150" dirty="0"/>
-          </a:p>
-          <a:p>
-            <a:pPr indent="0" marL="0">
-              <a:lnSpc>
-                <a:spcPct val="116000"/>
-              </a:lnSpc>
-              <a:buNone/>
-            </a:pPr>
-            <a:r>
-              <a:rPr lang="en-US" sz="1150" dirty="0">
-                <a:solidFill>
-                  <a:srgbClr val="E8F0EA"/>
-                </a:solidFill>
-                <a:latin typeface="Courier New" pitchFamily="34" charset="0"/>
-                <a:ea typeface="Courier New" pitchFamily="34" charset="-122"/>
-                <a:cs typeface="Courier New" pitchFamily="34" charset="-120"/>
-              </a:rPr>
-              <a:t>penalite(</a:t>
-            </a:r>
-            <a:pPr indent="0" marL="0">
-              <a:lnSpc>
-                <a:spcPct val="116000"/>
-              </a:lnSpc>
-              <a:buNone/>
-            </a:pPr>
-            <a:r>
-              <a:rPr lang="en-US" sz="1150" dirty="0">
-                <a:solidFill>
-                  <a:srgbClr val="E8D48A"/>
-                </a:solidFill>
-                <a:latin typeface="Courier New" pitchFamily="34" charset="0"/>
-                <a:ea typeface="Courier New" pitchFamily="34" charset="-122"/>
-                <a:cs typeface="Courier New" pitchFamily="34" charset="-120"/>
-              </a:rPr>
-              <a:t>8_100_000</a:t>
-            </a:r>
-            <a:pPr indent="0" marL="0">
-              <a:lnSpc>
-                <a:spcPct val="116000"/>
-              </a:lnSpc>
-              <a:buNone/>
-            </a:pPr>
-            <a:r>
-              <a:rPr lang="en-US" sz="1150" dirty="0">
-                <a:solidFill>
-                  <a:srgbClr val="E8F0EA"/>
-                </a:solidFill>
-                <a:latin typeface="Courier New" pitchFamily="34" charset="0"/>
-                <a:ea typeface="Courier New" pitchFamily="34" charset="-122"/>
-                <a:cs typeface="Courier New" pitchFamily="34" charset="-120"/>
-              </a:rPr>
-              <a:t>, </a:t>
-            </a:r>
-            <a:pPr indent="0" marL="0">
-              <a:lnSpc>
-                <a:spcPct val="116000"/>
-              </a:lnSpc>
-              <a:buNone/>
-            </a:pPr>
-            <a:r>
-              <a:rPr lang="en-US" sz="1150" dirty="0">
-                <a:solidFill>
-                  <a:srgbClr val="E8D48A"/>
-                </a:solidFill>
-                <a:latin typeface="Courier New" pitchFamily="34" charset="0"/>
-                <a:ea typeface="Courier New" pitchFamily="34" charset="-122"/>
-                <a:cs typeface="Courier New" pitchFamily="34" charset="-120"/>
-              </a:rPr>
-              <a:t>45</a:t>
-            </a:r>
-            <a:pPr indent="0" marL="0">
-              <a:lnSpc>
-                <a:spcPct val="116000"/>
-              </a:lnSpc>
-              <a:buNone/>
-            </a:pPr>
-            <a:r>
-              <a:rPr lang="en-US" sz="1150" dirty="0">
-                <a:solidFill>
-                  <a:srgbClr val="E8F0EA"/>
-                </a:solidFill>
-                <a:latin typeface="Courier New" pitchFamily="34" charset="0"/>
-                <a:ea typeface="Courier New" pitchFamily="34" charset="-122"/>
-                <a:cs typeface="Courier New" pitchFamily="34" charset="-120"/>
-              </a:rPr>
-              <a:t>)</a:t>
-            </a:r>
-            <a:pPr indent="0" marL="0">
-              <a:lnSpc>
-                <a:spcPct val="116000"/>
-              </a:lnSpc>
-              <a:buNone/>
-            </a:pPr>
-            <a:r>
-              <a:rPr lang="en-US" sz="1150" dirty="0">
-                <a:solidFill>
-                  <a:srgbClr val="7C9488"/>
-                </a:solidFill>
-                <a:latin typeface="Courier New" pitchFamily="34" charset="0"/>
-                <a:ea typeface="Courier New" pitchFamily="34" charset="-122"/>
-                <a:cs typeface="Courier New" pitchFamily="34" charset="-120"/>
-              </a:rPr>
-              <a:t>  # → 972000</a:t>
-            </a:r>
-            <a:endParaRPr lang="en-US" sz="1150" dirty="0"/>
-          </a:p>
-        </p:txBody>
-      </p:sp>
-      <p:sp>
-        <p:nvSpPr>
-          <p:cNvPr id="15" name="Shape 13"/>
-          <p:cNvSpPr/>
-          <p:nvPr/>
-        </p:nvSpPr>
-        <p:spPr>
-          <a:xfrm>
-            <a:off x="6309360" y="1965960"/>
-            <a:ext cx="411480" cy="411480"/>
-          </a:xfrm>
-          <a:prstGeom prst="ellipse">
-            <a:avLst/>
-          </a:prstGeom>
-          <a:solidFill>
-            <a:srgbClr val="1E7A50"/>
-          </a:solidFill>
-          <a:ln/>
-        </p:spPr>
-      </p:sp>
       <p:pic>
         <p:nvPicPr>
-          <p:cNvPr id="16" name="Image 0" descr="icons/check.png">    </p:cNvPr>
+          <p:cNvPr id="4" name="Image 0" descr="logo-dgi.png">    </p:cNvPr>
           <p:cNvPicPr>
             <a:picLocks noChangeAspect="1"/>
           </p:cNvPicPr>
@@ -11378,8 +10976,8 @@
         </p:blipFill>
         <p:spPr>
           <a:xfrm>
-            <a:off x="6416345" y="2072945"/>
-            <a:ext cx="197510" cy="197510"/>
+            <a:off x="10744200" y="384048"/>
+            <a:ext cx="1051560" cy="795528"/>
           </a:xfrm>
           <a:prstGeom prst="rect">
             <a:avLst/>
@@ -11388,14 +10986,96 @@
       </p:pic>
       <p:sp>
         <p:nvSpPr>
-          <p:cNvPr id="17" name="Text 14"/>
-          <p:cNvSpPr/>
-          <p:nvPr/>
-        </p:nvSpPr>
-        <p:spPr>
-          <a:xfrm>
-            <a:off x="6903720" y="1892808"/>
-            <a:ext cx="4800600" cy="1188720"/>
+          <p:cNvPr id="5" name="Shape 2"/>
+          <p:cNvSpPr/>
+          <p:nvPr/>
+        </p:nvSpPr>
+        <p:spPr>
+          <a:xfrm>
+            <a:off x="640080" y="1783080"/>
+            <a:ext cx="5120640" cy="3108960"/>
+          </a:xfrm>
+          <a:prstGeom prst="roundRect">
+            <a:avLst>
+              <a:gd name="adj" fmla="val 2353"/>
+            </a:avLst>
+          </a:prstGeom>
+          <a:solidFill>
+            <a:srgbClr val="0F2418"/>
+          </a:solidFill>
+          <a:ln/>
+        </p:spPr>
+      </p:sp>
+      <p:sp>
+        <p:nvSpPr>
+          <p:cNvPr id="6" name="Shape 3"/>
+          <p:cNvSpPr/>
+          <p:nvPr/>
+        </p:nvSpPr>
+        <p:spPr>
+          <a:xfrm>
+            <a:off x="841248" y="1947672"/>
+            <a:ext cx="109728" cy="109728"/>
+          </a:xfrm>
+          <a:prstGeom prst="ellipse">
+            <a:avLst/>
+          </a:prstGeom>
+          <a:solidFill>
+            <a:srgbClr val="E06C60"/>
+          </a:solidFill>
+          <a:ln/>
+        </p:spPr>
+      </p:sp>
+      <p:sp>
+        <p:nvSpPr>
+          <p:cNvPr id="7" name="Shape 4"/>
+          <p:cNvSpPr/>
+          <p:nvPr/>
+        </p:nvSpPr>
+        <p:spPr>
+          <a:xfrm>
+            <a:off x="1024128" y="1947672"/>
+            <a:ext cx="109728" cy="109728"/>
+          </a:xfrm>
+          <a:prstGeom prst="ellipse">
+            <a:avLst/>
+          </a:prstGeom>
+          <a:solidFill>
+            <a:srgbClr val="C79100"/>
+          </a:solidFill>
+          <a:ln/>
+        </p:spPr>
+      </p:sp>
+      <p:sp>
+        <p:nvSpPr>
+          <p:cNvPr id="8" name="Shape 5"/>
+          <p:cNvSpPr/>
+          <p:nvPr/>
+        </p:nvSpPr>
+        <p:spPr>
+          <a:xfrm>
+            <a:off x="1207008" y="1947672"/>
+            <a:ext cx="109728" cy="109728"/>
+          </a:xfrm>
+          <a:prstGeom prst="ellipse">
+            <a:avLst/>
+          </a:prstGeom>
+          <a:solidFill>
+            <a:srgbClr val="61B888"/>
+          </a:solidFill>
+          <a:ln/>
+        </p:spPr>
+      </p:sp>
+      <p:sp>
+        <p:nvSpPr>
+          <p:cNvPr id="9" name="Text 6"/>
+          <p:cNvSpPr/>
+          <p:nvPr/>
+        </p:nvSpPr>
+        <p:spPr>
+          <a:xfrm>
+            <a:off x="1417320" y="1874520"/>
+            <a:ext cx="4206240" cy="274320"/>
           </a:xfrm>
           <a:prstGeom prst="rect">
             <a:avLst/>
@@ -11407,70 +11087,520 @@
           <a:bodyPr wrap="square" lIns="0" tIns="0" rIns="0" bIns="0" rtlCol="0" anchor="ctr"/>
           <a:lstStyle/>
           <a:p>
-            <a:pPr indent="0" marL="0">
-              <a:lnSpc>
-                <a:spcPct val="105000"/>
-              </a:lnSpc>
-              <a:buNone/>
-            </a:pPr>
-            <a:r>
-              <a:rPr lang="en-US" sz="1450" b="1" dirty="0">
-                <a:solidFill>
-                  <a:srgbClr val="1C2A24"/>
-                </a:solidFill>
-                <a:latin typeface="Calibri" pitchFamily="34" charset="0"/>
-                <a:ea typeface="Calibri" pitchFamily="34" charset="-122"/>
-                <a:cs typeface="Calibri" pitchFamily="34" charset="-120"/>
-              </a:rPr>
-              <a:t>Un module = une responsabilité</a:t>
-            </a:r>
-            <a:endParaRPr lang="en-US" sz="1450" dirty="0"/>
-          </a:p>
-          <a:p>
-            <a:pPr indent="0" marL="0">
-              <a:lnSpc>
-                <a:spcPct val="105000"/>
-              </a:lnSpc>
-              <a:buNone/>
-            </a:pPr>
-            <a:r>
-              <a:rPr lang="en-US" sz="1250" dirty="0">
-                <a:solidFill>
-                  <a:srgbClr val="5C6B63"/>
-                </a:solidFill>
-                <a:latin typeface="Calibri" pitchFamily="34" charset="0"/>
-                <a:ea typeface="Calibri" pitchFamily="34" charset="-122"/>
-                <a:cs typeface="Calibri" pitchFamily="34" charset="-120"/>
-              </a:rPr>
-              <a:t>dates.py ne parle que de dates ; penalites.py que de pénalités.</a:t>
-            </a:r>
-            <a:endParaRPr lang="en-US" sz="1450" dirty="0"/>
+            <a:pPr algn="r" indent="0" marL="0">
+              <a:buNone/>
+            </a:pPr>
+            <a:r>
+              <a:rPr lang="en-US" sz="1050" dirty="0">
+                <a:solidFill>
+                  <a:srgbClr val="9FBFAF"/>
+                </a:solidFill>
+                <a:latin typeface="Courier New" pitchFamily="34" charset="0"/>
+                <a:ea typeface="Courier New" pitchFamily="34" charset="-122"/>
+                <a:cs typeface="Courier New" pitchFamily="34" charset="-120"/>
+              </a:rPr>
+              <a:t>arborescence</a:t>
+            </a:r>
+            <a:endParaRPr lang="en-US" sz="1050" dirty="0"/>
           </a:p>
         </p:txBody>
       </p:sp>
       <p:sp>
         <p:nvSpPr>
-          <p:cNvPr id="18" name="Shape 15"/>
-          <p:cNvSpPr/>
-          <p:nvPr/>
-        </p:nvSpPr>
-        <p:spPr>
-          <a:xfrm>
-            <a:off x="6309360" y="3246120"/>
+          <p:cNvPr id="10" name="Text 7"/>
+          <p:cNvSpPr/>
+          <p:nvPr/>
+        </p:nvSpPr>
+        <p:spPr>
+          <a:xfrm>
+            <a:off x="914400" y="2167128"/>
+            <a:ext cx="4572000" cy="2560320"/>
+          </a:xfrm>
+          <a:prstGeom prst="rect">
+            <a:avLst/>
+          </a:prstGeom>
+          <a:noFill/>
+          <a:ln/>
+        </p:spPr>
+        <p:txBody>
+          <a:bodyPr wrap="square" lIns="0" tIns="0" rIns="0" bIns="0" rtlCol="0" anchor="t"/>
+          <a:lstStyle/>
+          <a:p>
+            <a:pPr indent="0" marL="0">
+              <a:lnSpc>
+                <a:spcPct val="116000"/>
+              </a:lnSpc>
+              <a:buNone/>
+            </a:pPr>
+            <a:r>
+              <a:rPr lang="en-US" sz="1200" dirty="0">
+                <a:solidFill>
+                  <a:srgbClr val="E8F0EA"/>
+                </a:solidFill>
+                <a:latin typeface="Courier New" pitchFamily="34" charset="0"/>
+                <a:ea typeface="Courier New" pitchFamily="34" charset="-122"/>
+                <a:cs typeface="Courier New" pitchFamily="34" charset="-120"/>
+              </a:rPr>
+              <a:t>07-modules-et-organisation/</a:t>
+            </a:r>
+            <a:endParaRPr lang="en-US" sz="1200" dirty="0"/>
+          </a:p>
+          <a:p>
+            <a:pPr indent="0" marL="0">
+              <a:lnSpc>
+                <a:spcPct val="116000"/>
+              </a:lnSpc>
+              <a:buNone/>
+            </a:pPr>
+            <a:r>
+              <a:rPr lang="en-US" sz="1200" dirty="0">
+                <a:solidFill>
+                  <a:srgbClr val="E8F0EA"/>
+                </a:solidFill>
+                <a:latin typeface="Courier New" pitchFamily="34" charset="0"/>
+                <a:ea typeface="Courier New" pitchFamily="34" charset="-122"/>
+                <a:cs typeface="Courier New" pitchFamily="34" charset="-120"/>
+              </a:rPr>
+              <a:t>├── fiscalite/</a:t>
+            </a:r>
+            <a:pPr indent="0" marL="0">
+              <a:lnSpc>
+                <a:spcPct val="116000"/>
+              </a:lnSpc>
+              <a:buNone/>
+            </a:pPr>
+            <a:r>
+              <a:rPr lang="en-US" sz="1200" dirty="0">
+                <a:solidFill>
+                  <a:srgbClr val="7C9488"/>
+                </a:solidFill>
+                <a:latin typeface="Courier New" pitchFamily="34" charset="0"/>
+                <a:ea typeface="Courier New" pitchFamily="34" charset="-122"/>
+                <a:cs typeface="Courier New" pitchFamily="34" charset="-120"/>
+              </a:rPr>
+              <a:t>        # le paquet</a:t>
+            </a:r>
+            <a:endParaRPr lang="en-US" sz="1200" dirty="0"/>
+          </a:p>
+          <a:p>
+            <a:pPr indent="0" marL="0">
+              <a:lnSpc>
+                <a:spcPct val="116000"/>
+              </a:lnSpc>
+              <a:buNone/>
+            </a:pPr>
+            <a:r>
+              <a:rPr lang="en-US" sz="1200" dirty="0">
+                <a:solidFill>
+                  <a:srgbClr val="E8F0EA"/>
+                </a:solidFill>
+                <a:latin typeface="Courier New" pitchFamily="34" charset="0"/>
+                <a:ea typeface="Courier New" pitchFamily="34" charset="-122"/>
+                <a:cs typeface="Courier New" pitchFamily="34" charset="-120"/>
+              </a:rPr>
+              <a:t>│   ├── __init__.py</a:t>
+            </a:r>
+            <a:endParaRPr lang="en-US" sz="1200" dirty="0"/>
+          </a:p>
+          <a:p>
+            <a:pPr indent="0" marL="0">
+              <a:lnSpc>
+                <a:spcPct val="116000"/>
+              </a:lnSpc>
+              <a:buNone/>
+            </a:pPr>
+            <a:r>
+              <a:rPr lang="en-US" sz="1200" dirty="0">
+                <a:solidFill>
+                  <a:srgbClr val="E8F0EA"/>
+                </a:solidFill>
+                <a:latin typeface="Courier New" pitchFamily="34" charset="0"/>
+                <a:ea typeface="Courier New" pitchFamily="34" charset="-122"/>
+                <a:cs typeface="Courier New" pitchFamily="34" charset="-120"/>
+              </a:rPr>
+              <a:t>│   ├── dates.py</a:t>
+            </a:r>
+            <a:pPr indent="0" marL="0">
+              <a:lnSpc>
+                <a:spcPct val="116000"/>
+              </a:lnSpc>
+              <a:buNone/>
+            </a:pPr>
+            <a:r>
+              <a:rPr lang="en-US" sz="1200" dirty="0">
+                <a:solidFill>
+                  <a:srgbClr val="7C9488"/>
+                </a:solidFill>
+                <a:latin typeface="Courier New" pitchFamily="34" charset="0"/>
+                <a:ea typeface="Courier New" pitchFamily="34" charset="-122"/>
+                <a:cs typeface="Courier New" pitchFamily="34" charset="-120"/>
+              </a:rPr>
+              <a:t>      # normaliser()</a:t>
+            </a:r>
+            <a:endParaRPr lang="en-US" sz="1200" dirty="0"/>
+          </a:p>
+          <a:p>
+            <a:pPr indent="0" marL="0">
+              <a:lnSpc>
+                <a:spcPct val="116000"/>
+              </a:lnSpc>
+              <a:buNone/>
+            </a:pPr>
+            <a:r>
+              <a:rPr lang="en-US" sz="1200" dirty="0">
+                <a:solidFill>
+                  <a:srgbClr val="E8F0EA"/>
+                </a:solidFill>
+                <a:latin typeface="Courier New" pitchFamily="34" charset="0"/>
+                <a:ea typeface="Courier New" pitchFamily="34" charset="-122"/>
+                <a:cs typeface="Courier New" pitchFamily="34" charset="-120"/>
+              </a:rPr>
+              <a:t>│   └── penalites.py</a:t>
+            </a:r>
+            <a:pPr indent="0" marL="0">
+              <a:lnSpc>
+                <a:spcPct val="116000"/>
+              </a:lnSpc>
+              <a:buNone/>
+            </a:pPr>
+            <a:r>
+              <a:rPr lang="en-US" sz="1200" dirty="0">
+                <a:solidFill>
+                  <a:srgbClr val="7C9488"/>
+                </a:solidFill>
+                <a:latin typeface="Courier New" pitchFamily="34" charset="0"/>
+                <a:ea typeface="Courier New" pitchFamily="34" charset="-122"/>
+                <a:cs typeface="Courier New" pitchFamily="34" charset="-120"/>
+              </a:rPr>
+              <a:t>  # penalite()</a:t>
+            </a:r>
+            <a:endParaRPr lang="en-US" sz="1200" dirty="0"/>
+          </a:p>
+          <a:p>
+            <a:pPr indent="0" marL="0">
+              <a:lnSpc>
+                <a:spcPct val="116000"/>
+              </a:lnSpc>
+              <a:buNone/>
+            </a:pPr>
+            <a:r>
+              <a:rPr lang="en-US" sz="1200" dirty="0">
+                <a:solidFill>
+                  <a:srgbClr val="E8F0EA"/>
+                </a:solidFill>
+                <a:latin typeface="Courier New" pitchFamily="34" charset="0"/>
+                <a:ea typeface="Courier New" pitchFamily="34" charset="-122"/>
+                <a:cs typeface="Courier New" pitchFamily="34" charset="-120"/>
+              </a:rPr>
+              <a:t>└── tp_utiliser_paquet.py</a:t>
+            </a:r>
+            <a:endParaRPr lang="en-US" sz="1200" dirty="0"/>
+          </a:p>
+        </p:txBody>
+      </p:sp>
+      <p:sp>
+        <p:nvSpPr>
+          <p:cNvPr id="11" name="Shape 8"/>
+          <p:cNvSpPr/>
+          <p:nvPr/>
+        </p:nvSpPr>
+        <p:spPr>
+          <a:xfrm>
+            <a:off x="640080" y="5120640"/>
+            <a:ext cx="5120640" cy="1234440"/>
+          </a:xfrm>
+          <a:prstGeom prst="roundRect">
+            <a:avLst>
+              <a:gd name="adj" fmla="val 5926"/>
+            </a:avLst>
+          </a:prstGeom>
+          <a:solidFill>
+            <a:srgbClr val="0F2418"/>
+          </a:solidFill>
+          <a:ln/>
+        </p:spPr>
+      </p:sp>
+      <p:sp>
+        <p:nvSpPr>
+          <p:cNvPr id="12" name="Shape 9"/>
+          <p:cNvSpPr/>
+          <p:nvPr/>
+        </p:nvSpPr>
+        <p:spPr>
+          <a:xfrm>
+            <a:off x="841248" y="5285232"/>
+            <a:ext cx="109728" cy="109728"/>
+          </a:xfrm>
+          <a:prstGeom prst="ellipse">
+            <a:avLst/>
+          </a:prstGeom>
+          <a:solidFill>
+            <a:srgbClr val="E06C60"/>
+          </a:solidFill>
+          <a:ln/>
+        </p:spPr>
+      </p:sp>
+      <p:sp>
+        <p:nvSpPr>
+          <p:cNvPr id="13" name="Shape 10"/>
+          <p:cNvSpPr/>
+          <p:nvPr/>
+        </p:nvSpPr>
+        <p:spPr>
+          <a:xfrm>
+            <a:off x="1024128" y="5285232"/>
+            <a:ext cx="109728" cy="109728"/>
+          </a:xfrm>
+          <a:prstGeom prst="ellipse">
+            <a:avLst/>
+          </a:prstGeom>
+          <a:solidFill>
+            <a:srgbClr val="C79100"/>
+          </a:solidFill>
+          <a:ln/>
+        </p:spPr>
+      </p:sp>
+      <p:sp>
+        <p:nvSpPr>
+          <p:cNvPr id="14" name="Shape 11"/>
+          <p:cNvSpPr/>
+          <p:nvPr/>
+        </p:nvSpPr>
+        <p:spPr>
+          <a:xfrm>
+            <a:off x="1207008" y="5285232"/>
+            <a:ext cx="109728" cy="109728"/>
+          </a:xfrm>
+          <a:prstGeom prst="ellipse">
+            <a:avLst/>
+          </a:prstGeom>
+          <a:solidFill>
+            <a:srgbClr val="61B888"/>
+          </a:solidFill>
+          <a:ln/>
+        </p:spPr>
+      </p:sp>
+      <p:sp>
+        <p:nvSpPr>
+          <p:cNvPr id="15" name="Text 12"/>
+          <p:cNvSpPr/>
+          <p:nvPr/>
+        </p:nvSpPr>
+        <p:spPr>
+          <a:xfrm>
+            <a:off x="914400" y="5504688"/>
+            <a:ext cx="4572000" cy="685800"/>
+          </a:xfrm>
+          <a:prstGeom prst="rect">
+            <a:avLst/>
+          </a:prstGeom>
+          <a:noFill/>
+          <a:ln/>
+        </p:spPr>
+        <p:txBody>
+          <a:bodyPr wrap="square" lIns="0" tIns="0" rIns="0" bIns="0" rtlCol="0" anchor="t"/>
+          <a:lstStyle/>
+          <a:p>
+            <a:pPr indent="0" marL="0">
+              <a:lnSpc>
+                <a:spcPct val="116000"/>
+              </a:lnSpc>
+              <a:buNone/>
+            </a:pPr>
+            <a:r>
+              <a:rPr lang="en-US" sz="1150" b="1" dirty="0">
+                <a:solidFill>
+                  <a:srgbClr val="F2C46D"/>
+                </a:solidFill>
+                <a:latin typeface="Courier New" pitchFamily="34" charset="0"/>
+                <a:ea typeface="Courier New" pitchFamily="34" charset="-122"/>
+                <a:cs typeface="Courier New" pitchFamily="34" charset="-120"/>
+              </a:rPr>
+              <a:t>from</a:t>
+            </a:r>
+            <a:pPr indent="0" marL="0">
+              <a:lnSpc>
+                <a:spcPct val="116000"/>
+              </a:lnSpc>
+              <a:buNone/>
+            </a:pPr>
+            <a:r>
+              <a:rPr lang="en-US" sz="1150" dirty="0">
+                <a:solidFill>
+                  <a:srgbClr val="E8F0EA"/>
+                </a:solidFill>
+                <a:latin typeface="Courier New" pitchFamily="34" charset="0"/>
+                <a:ea typeface="Courier New" pitchFamily="34" charset="-122"/>
+                <a:cs typeface="Courier New" pitchFamily="34" charset="-120"/>
+              </a:rPr>
+              <a:t> fiscalite </a:t>
+            </a:r>
+            <a:pPr indent="0" marL="0">
+              <a:lnSpc>
+                <a:spcPct val="116000"/>
+              </a:lnSpc>
+              <a:buNone/>
+            </a:pPr>
+            <a:r>
+              <a:rPr lang="en-US" sz="1150" b="1" dirty="0">
+                <a:solidFill>
+                  <a:srgbClr val="F2C46D"/>
+                </a:solidFill>
+                <a:latin typeface="Courier New" pitchFamily="34" charset="0"/>
+                <a:ea typeface="Courier New" pitchFamily="34" charset="-122"/>
+                <a:cs typeface="Courier New" pitchFamily="34" charset="-120"/>
+              </a:rPr>
+              <a:t>import</a:t>
+            </a:r>
+            <a:pPr indent="0" marL="0">
+              <a:lnSpc>
+                <a:spcPct val="116000"/>
+              </a:lnSpc>
+              <a:buNone/>
+            </a:pPr>
+            <a:r>
+              <a:rPr lang="en-US" sz="1150" dirty="0">
+                <a:solidFill>
+                  <a:srgbClr val="E8F0EA"/>
+                </a:solidFill>
+                <a:latin typeface="Courier New" pitchFamily="34" charset="0"/>
+                <a:ea typeface="Courier New" pitchFamily="34" charset="-122"/>
+                <a:cs typeface="Courier New" pitchFamily="34" charset="-120"/>
+              </a:rPr>
+              <a:t> normaliser, penalite</a:t>
+            </a:r>
+            <a:endParaRPr lang="en-US" sz="1150" dirty="0"/>
+          </a:p>
+          <a:p>
+            <a:pPr indent="0" marL="0">
+              <a:lnSpc>
+                <a:spcPct val="116000"/>
+              </a:lnSpc>
+              <a:buNone/>
+            </a:pPr>
+            <a:r>
+              <a:rPr lang="en-US" sz="1150" dirty="0">
+                <a:solidFill>
+                  <a:srgbClr val="E8F0EA"/>
+                </a:solidFill>
+                <a:latin typeface="Courier New" pitchFamily="34" charset="0"/>
+                <a:ea typeface="Courier New" pitchFamily="34" charset="-122"/>
+                <a:cs typeface="Courier New" pitchFamily="34" charset="-120"/>
+              </a:rPr>
+              <a:t>penalite(</a:t>
+            </a:r>
+            <a:pPr indent="0" marL="0">
+              <a:lnSpc>
+                <a:spcPct val="116000"/>
+              </a:lnSpc>
+              <a:buNone/>
+            </a:pPr>
+            <a:r>
+              <a:rPr lang="en-US" sz="1150" dirty="0">
+                <a:solidFill>
+                  <a:srgbClr val="E8D48A"/>
+                </a:solidFill>
+                <a:latin typeface="Courier New" pitchFamily="34" charset="0"/>
+                <a:ea typeface="Courier New" pitchFamily="34" charset="-122"/>
+                <a:cs typeface="Courier New" pitchFamily="34" charset="-120"/>
+              </a:rPr>
+              <a:t>8_100_000</a:t>
+            </a:r>
+            <a:pPr indent="0" marL="0">
+              <a:lnSpc>
+                <a:spcPct val="116000"/>
+              </a:lnSpc>
+              <a:buNone/>
+            </a:pPr>
+            <a:r>
+              <a:rPr lang="en-US" sz="1150" dirty="0">
+                <a:solidFill>
+                  <a:srgbClr val="E8F0EA"/>
+                </a:solidFill>
+                <a:latin typeface="Courier New" pitchFamily="34" charset="0"/>
+                <a:ea typeface="Courier New" pitchFamily="34" charset="-122"/>
+                <a:cs typeface="Courier New" pitchFamily="34" charset="-120"/>
+              </a:rPr>
+              <a:t>, </a:t>
+            </a:r>
+            <a:pPr indent="0" marL="0">
+              <a:lnSpc>
+                <a:spcPct val="116000"/>
+              </a:lnSpc>
+              <a:buNone/>
+            </a:pPr>
+            <a:r>
+              <a:rPr lang="en-US" sz="1150" dirty="0">
+                <a:solidFill>
+                  <a:srgbClr val="E8D48A"/>
+                </a:solidFill>
+                <a:latin typeface="Courier New" pitchFamily="34" charset="0"/>
+                <a:ea typeface="Courier New" pitchFamily="34" charset="-122"/>
+                <a:cs typeface="Courier New" pitchFamily="34" charset="-120"/>
+              </a:rPr>
+              <a:t>45</a:t>
+            </a:r>
+            <a:pPr indent="0" marL="0">
+              <a:lnSpc>
+                <a:spcPct val="116000"/>
+              </a:lnSpc>
+              <a:buNone/>
+            </a:pPr>
+            <a:r>
+              <a:rPr lang="en-US" sz="1150" dirty="0">
+                <a:solidFill>
+                  <a:srgbClr val="E8F0EA"/>
+                </a:solidFill>
+                <a:latin typeface="Courier New" pitchFamily="34" charset="0"/>
+                <a:ea typeface="Courier New" pitchFamily="34" charset="-122"/>
+                <a:cs typeface="Courier New" pitchFamily="34" charset="-120"/>
+              </a:rPr>
+              <a:t>)</a:t>
+            </a:r>
+            <a:pPr indent="0" marL="0">
+              <a:lnSpc>
+                <a:spcPct val="116000"/>
+              </a:lnSpc>
+              <a:buNone/>
+            </a:pPr>
+            <a:r>
+              <a:rPr lang="en-US" sz="1150" dirty="0">
+                <a:solidFill>
+                  <a:srgbClr val="7C9488"/>
+                </a:solidFill>
+                <a:latin typeface="Courier New" pitchFamily="34" charset="0"/>
+                <a:ea typeface="Courier New" pitchFamily="34" charset="-122"/>
+                <a:cs typeface="Courier New" pitchFamily="34" charset="-120"/>
+              </a:rPr>
+              <a:t>  # → 972000</a:t>
+            </a:r>
+            <a:endParaRPr lang="en-US" sz="1150" dirty="0"/>
+          </a:p>
+        </p:txBody>
+      </p:sp>
+      <p:sp>
+        <p:nvSpPr>
+          <p:cNvPr id="16" name="Shape 13"/>
+          <p:cNvSpPr/>
+          <p:nvPr/>
+        </p:nvSpPr>
+        <p:spPr>
+          <a:xfrm>
+            <a:off x="6309360" y="1965960"/>
             <a:ext cx="411480" cy="411480"/>
           </a:xfrm>
           <a:prstGeom prst="ellipse">
             <a:avLst/>
           </a:prstGeom>
           <a:solidFill>
-            <a:srgbClr val="1E7A50"/>
+            <a:srgbClr val="2E9E4F"/>
           </a:solidFill>
           <a:ln/>
         </p:spPr>
       </p:sp>
       <p:pic>
         <p:nvPicPr>
-          <p:cNvPr id="19" name="Image 1" descr="icons/check.png">    </p:cNvPr>
+          <p:cNvPr id="17" name="Image 1" descr="icons/check.png">    </p:cNvPr>
           <p:cNvPicPr>
             <a:picLocks noChangeAspect="1"/>
           </p:cNvPicPr>
@@ -11484,7 +11614,7 @@
         </p:blipFill>
         <p:spPr>
           <a:xfrm>
-            <a:off x="6416345" y="3353105"/>
+            <a:off x="6416345" y="2072945"/>
             <a:ext cx="197510" cy="197510"/>
           </a:xfrm>
           <a:prstGeom prst="rect">
@@ -11494,13 +11624,13 @@
       </p:pic>
       <p:sp>
         <p:nvSpPr>
-          <p:cNvPr id="20" name="Text 16"/>
-          <p:cNvSpPr/>
-          <p:nvPr/>
-        </p:nvSpPr>
-        <p:spPr>
-          <a:xfrm>
-            <a:off x="6903720" y="3172968"/>
+          <p:cNvPr id="18" name="Text 14"/>
+          <p:cNvSpPr/>
+          <p:nvPr/>
+        </p:nvSpPr>
+        <p:spPr>
+          <a:xfrm>
+            <a:off x="6903720" y="1892808"/>
             <a:ext cx="4800600" cy="1188720"/>
           </a:xfrm>
           <a:prstGeom prst="rect">
@@ -11528,7 +11658,7 @@
                 <a:ea typeface="Calibri" pitchFamily="34" charset="-122"/>
                 <a:cs typeface="Calibri" pitchFamily="34" charset="-120"/>
               </a:rPr>
-              <a:t>__init__.py expose l’essentiel</a:t>
+              <a:t>Un module = une responsabilité</a:t>
             </a:r>
             <a:endParaRPr lang="en-US" sz="1450" dirty="0"/>
           </a:p>
@@ -11548,7 +11678,7 @@
                 <a:ea typeface="Calibri" pitchFamily="34" charset="-122"/>
                 <a:cs typeface="Calibri" pitchFamily="34" charset="-120"/>
               </a:rPr>
-              <a:t>from fiscalite import penalite — l’utilisateur ignore l’interne.</a:t>
+              <a:t>dates.py ne parle que de dates ; penalites.py que de pénalités.</a:t>
             </a:r>
             <a:endParaRPr lang="en-US" sz="1450" dirty="0"/>
           </a:p>
@@ -11556,27 +11686,27 @@
       </p:sp>
       <p:sp>
         <p:nvSpPr>
-          <p:cNvPr id="21" name="Shape 17"/>
-          <p:cNvSpPr/>
-          <p:nvPr/>
-        </p:nvSpPr>
-        <p:spPr>
-          <a:xfrm>
-            <a:off x="6309360" y="4526280"/>
+          <p:cNvPr id="19" name="Shape 15"/>
+          <p:cNvSpPr/>
+          <p:nvPr/>
+        </p:nvSpPr>
+        <p:spPr>
+          <a:xfrm>
+            <a:off x="6309360" y="3246120"/>
             <a:ext cx="411480" cy="411480"/>
           </a:xfrm>
           <a:prstGeom prst="ellipse">
             <a:avLst/>
           </a:prstGeom>
           <a:solidFill>
-            <a:srgbClr val="1E7A50"/>
+            <a:srgbClr val="2E9E4F"/>
           </a:solidFill>
           <a:ln/>
         </p:spPr>
       </p:sp>
       <p:pic>
         <p:nvPicPr>
-          <p:cNvPr id="22" name="Image 2" descr="icons/check.png">    </p:cNvPr>
+          <p:cNvPr id="20" name="Image 2" descr="icons/check.png">    </p:cNvPr>
           <p:cNvPicPr>
             <a:picLocks noChangeAspect="1"/>
           </p:cNvPicPr>
@@ -11590,6 +11720,112 @@
         </p:blipFill>
         <p:spPr>
           <a:xfrm>
+            <a:off x="6416345" y="3353105"/>
+            <a:ext cx="197510" cy="197510"/>
+          </a:xfrm>
+          <a:prstGeom prst="rect">
+            <a:avLst/>
+          </a:prstGeom>
+        </p:spPr>
+      </p:pic>
+      <p:sp>
+        <p:nvSpPr>
+          <p:cNvPr id="21" name="Text 16"/>
+          <p:cNvSpPr/>
+          <p:nvPr/>
+        </p:nvSpPr>
+        <p:spPr>
+          <a:xfrm>
+            <a:off x="6903720" y="3172968"/>
+            <a:ext cx="4800600" cy="1188720"/>
+          </a:xfrm>
+          <a:prstGeom prst="rect">
+            <a:avLst/>
+          </a:prstGeom>
+          <a:noFill/>
+          <a:ln/>
+        </p:spPr>
+        <p:txBody>
+          <a:bodyPr wrap="square" lIns="0" tIns="0" rIns="0" bIns="0" rtlCol="0" anchor="ctr"/>
+          <a:lstStyle/>
+          <a:p>
+            <a:pPr indent="0" marL="0">
+              <a:lnSpc>
+                <a:spcPct val="105000"/>
+              </a:lnSpc>
+              <a:buNone/>
+            </a:pPr>
+            <a:r>
+              <a:rPr lang="en-US" sz="1450" b="1" dirty="0">
+                <a:solidFill>
+                  <a:srgbClr val="1C2A24"/>
+                </a:solidFill>
+                <a:latin typeface="Calibri" pitchFamily="34" charset="0"/>
+                <a:ea typeface="Calibri" pitchFamily="34" charset="-122"/>
+                <a:cs typeface="Calibri" pitchFamily="34" charset="-120"/>
+              </a:rPr>
+              <a:t>__init__.py expose l’essentiel</a:t>
+            </a:r>
+            <a:endParaRPr lang="en-US" sz="1450" dirty="0"/>
+          </a:p>
+          <a:p>
+            <a:pPr indent="0" marL="0">
+              <a:lnSpc>
+                <a:spcPct val="105000"/>
+              </a:lnSpc>
+              <a:buNone/>
+            </a:pPr>
+            <a:r>
+              <a:rPr lang="en-US" sz="1250" dirty="0">
+                <a:solidFill>
+                  <a:srgbClr val="5C6B63"/>
+                </a:solidFill>
+                <a:latin typeface="Calibri" pitchFamily="34" charset="0"/>
+                <a:ea typeface="Calibri" pitchFamily="34" charset="-122"/>
+                <a:cs typeface="Calibri" pitchFamily="34" charset="-120"/>
+              </a:rPr>
+              <a:t>from fiscalite import penalite — l’utilisateur ignore l’interne.</a:t>
+            </a:r>
+            <a:endParaRPr lang="en-US" sz="1450" dirty="0"/>
+          </a:p>
+        </p:txBody>
+      </p:sp>
+      <p:sp>
+        <p:nvSpPr>
+          <p:cNvPr id="22" name="Shape 17"/>
+          <p:cNvSpPr/>
+          <p:nvPr/>
+        </p:nvSpPr>
+        <p:spPr>
+          <a:xfrm>
+            <a:off x="6309360" y="4526280"/>
+            <a:ext cx="411480" cy="411480"/>
+          </a:xfrm>
+          <a:prstGeom prst="ellipse">
+            <a:avLst/>
+          </a:prstGeom>
+          <a:solidFill>
+            <a:srgbClr val="2E9E4F"/>
+          </a:solidFill>
+          <a:ln/>
+        </p:spPr>
+      </p:sp>
+      <p:pic>
+        <p:nvPicPr>
+          <p:cNvPr id="23" name="Image 3" descr="icons/check.png">    </p:cNvPr>
+          <p:cNvPicPr>
+            <a:picLocks noChangeAspect="1"/>
+          </p:cNvPicPr>
+          <p:nvPr/>
+        </p:nvPicPr>
+        <p:blipFill>
+          <a:blip r:embed="rId4"/>
+          <a:stretch>
+            <a:fillRect/>
+          </a:stretch>
+        </p:blipFill>
+        <p:spPr>
+          <a:xfrm>
             <a:off x="6416345" y="4633265"/>
             <a:ext cx="197510" cy="197510"/>
           </a:xfrm>
@@ -11600,7 +11836,7 @@
       </p:pic>
       <p:sp>
         <p:nvSpPr>
-          <p:cNvPr id="23" name="Text 18"/>
+          <p:cNvPr id="24" name="Text 18"/>
           <p:cNvSpPr/>
           <p:nvPr/>
         </p:nvSpPr>
@@ -11701,7 +11937,7 @@
         <p:spPr>
           <a:xfrm>
             <a:off x="548640" y="384048"/>
-            <a:ext cx="10972800" cy="320040"/>
+            <a:ext cx="9601200" cy="320040"/>
           </a:xfrm>
           <a:prstGeom prst="rect">
             <a:avLst/>
@@ -11719,7 +11955,7 @@
             <a:r>
               <a:rPr lang="en-US" sz="1300" b="1" spc="200" kern="0" dirty="0">
                 <a:solidFill>
-                  <a:srgbClr val="C9A227"/>
+                  <a:srgbClr val="C79100"/>
                 </a:solidFill>
                 <a:latin typeface="Calibri" pitchFamily="34" charset="0"/>
                 <a:ea typeface="Calibri" pitchFamily="34" charset="-122"/>
@@ -11740,7 +11976,7 @@
         <p:spPr>
           <a:xfrm>
             <a:off x="548640" y="658368"/>
-            <a:ext cx="11064240" cy="731520"/>
+            <a:ext cx="9966960" cy="731520"/>
           </a:xfrm>
           <a:prstGeom prst="rect">
             <a:avLst/>
@@ -11758,7 +11994,7 @@
             <a:r>
               <a:rPr lang="en-US" sz="3400" b="1" dirty="0">
                 <a:solidFill>
-                  <a:srgbClr val="14563C"/>
+                  <a:srgbClr val="0E7A3D"/>
                 </a:solidFill>
                 <a:latin typeface="Cambria" pitchFamily="34" charset="0"/>
                 <a:ea typeface="Cambria" pitchFamily="34" charset="-122"/>
@@ -11770,499 +12006,9 @@
           </a:p>
         </p:txBody>
       </p:sp>
-      <p:sp>
-        <p:nvSpPr>
-          <p:cNvPr id="4" name="Shape 2"/>
-          <p:cNvSpPr/>
-          <p:nvPr/>
-        </p:nvSpPr>
-        <p:spPr>
-          <a:xfrm>
-            <a:off x="640080" y="1783080"/>
-            <a:ext cx="457200" cy="457200"/>
-          </a:xfrm>
-          <a:prstGeom prst="ellipse">
-            <a:avLst/>
-          </a:prstGeom>
-          <a:solidFill>
-            <a:srgbClr val="14563C"/>
-          </a:solidFill>
-          <a:ln/>
-        </p:spPr>
-      </p:sp>
-      <p:sp>
-        <p:nvSpPr>
-          <p:cNvPr id="5" name="Text 3"/>
-          <p:cNvSpPr/>
-          <p:nvPr/>
-        </p:nvSpPr>
-        <p:spPr>
-          <a:xfrm>
-            <a:off x="640080" y="1783080"/>
-            <a:ext cx="457200" cy="457200"/>
-          </a:xfrm>
-          <a:prstGeom prst="rect">
-            <a:avLst/>
-          </a:prstGeom>
-          <a:noFill/>
-          <a:ln/>
-        </p:spPr>
-        <p:txBody>
-          <a:bodyPr wrap="square" lIns="0" tIns="0" rIns="0" bIns="0" rtlCol="0" anchor="ctr"/>
-          <a:lstStyle/>
-          <a:p>
-            <a:pPr algn="ctr" indent="0" marL="0">
-              <a:buNone/>
-            </a:pPr>
-            <a:r>
-              <a:rPr lang="en-US" sz="1400" b="1" dirty="0">
-                <a:solidFill>
-                  <a:srgbClr val="FFFFFF"/>
-                </a:solidFill>
-                <a:latin typeface="Calibri" pitchFamily="34" charset="0"/>
-                <a:ea typeface="Calibri" pitchFamily="34" charset="-122"/>
-                <a:cs typeface="Calibri" pitchFamily="34" charset="-120"/>
-              </a:rPr>
-              <a:t>1</a:t>
-            </a:r>
-            <a:endParaRPr lang="en-US" sz="1400" dirty="0"/>
-          </a:p>
-        </p:txBody>
-      </p:sp>
-      <p:sp>
-        <p:nvSpPr>
-          <p:cNvPr id="6" name="Text 4"/>
-          <p:cNvSpPr/>
-          <p:nvPr/>
-        </p:nvSpPr>
-        <p:spPr>
-          <a:xfrm>
-            <a:off x="1234440" y="1764792"/>
-            <a:ext cx="6309360" cy="548640"/>
-          </a:xfrm>
-          <a:prstGeom prst="rect">
-            <a:avLst/>
-          </a:prstGeom>
-          <a:noFill/>
-          <a:ln/>
-        </p:spPr>
-        <p:txBody>
-          <a:bodyPr wrap="square" lIns="0" tIns="0" rIns="0" bIns="0" rtlCol="0" anchor="ctr"/>
-          <a:lstStyle/>
-          <a:p>
-            <a:pPr indent="0" marL="0">
-              <a:buNone/>
-            </a:pPr>
-            <a:r>
-              <a:rPr lang="en-US" sz="1400" b="1" dirty="0">
-                <a:solidFill>
-                  <a:srgbClr val="1C2A24"/>
-                </a:solidFill>
-                <a:latin typeface="Calibri" pitchFamily="34" charset="0"/>
-                <a:ea typeface="Calibri" pitchFamily="34" charset="-122"/>
-                <a:cs typeface="Calibri" pitchFamily="34" charset="-120"/>
-              </a:rPr>
-              <a:t>tp_lecture.py</a:t>
-            </a:r>
-            <a:pPr indent="0" marL="0">
-              <a:buNone/>
-            </a:pPr>
-            <a:r>
-              <a:rPr lang="en-US" sz="1400" dirty="0">
-                <a:solidFill>
-                  <a:srgbClr val="5C6B63"/>
-                </a:solidFill>
-                <a:latin typeface="Calibri" pitchFamily="34" charset="0"/>
-                <a:ea typeface="Calibri" pitchFamily="34" charset="-122"/>
-                <a:cs typeface="Calibri" pitchFamily="34" charset="-120"/>
-              </a:rPr>
-              <a:t>  —  référentiel, comptage par région, extrait Conakry, JSON</a:t>
-            </a:r>
-            <a:endParaRPr lang="en-US" sz="1400" dirty="0"/>
-          </a:p>
-        </p:txBody>
-      </p:sp>
-      <p:sp>
-        <p:nvSpPr>
-          <p:cNvPr id="7" name="Shape 5"/>
-          <p:cNvSpPr/>
-          <p:nvPr/>
-        </p:nvSpPr>
-        <p:spPr>
-          <a:xfrm>
-            <a:off x="640080" y="2532888"/>
-            <a:ext cx="457200" cy="457200"/>
-          </a:xfrm>
-          <a:prstGeom prst="ellipse">
-            <a:avLst/>
-          </a:prstGeom>
-          <a:solidFill>
-            <a:srgbClr val="14563C"/>
-          </a:solidFill>
-          <a:ln/>
-        </p:spPr>
-      </p:sp>
-      <p:sp>
-        <p:nvSpPr>
-          <p:cNvPr id="8" name="Text 6"/>
-          <p:cNvSpPr/>
-          <p:nvPr/>
-        </p:nvSpPr>
-        <p:spPr>
-          <a:xfrm>
-            <a:off x="640080" y="2532888"/>
-            <a:ext cx="457200" cy="457200"/>
-          </a:xfrm>
-          <a:prstGeom prst="rect">
-            <a:avLst/>
-          </a:prstGeom>
-          <a:noFill/>
-          <a:ln/>
-        </p:spPr>
-        <p:txBody>
-          <a:bodyPr wrap="square" lIns="0" tIns="0" rIns="0" bIns="0" rtlCol="0" anchor="ctr"/>
-          <a:lstStyle/>
-          <a:p>
-            <a:pPr algn="ctr" indent="0" marL="0">
-              <a:buNone/>
-            </a:pPr>
-            <a:r>
-              <a:rPr lang="en-US" sz="1400" b="1" dirty="0">
-                <a:solidFill>
-                  <a:srgbClr val="FFFFFF"/>
-                </a:solidFill>
-                <a:latin typeface="Calibri" pitchFamily="34" charset="0"/>
-                <a:ea typeface="Calibri" pitchFamily="34" charset="-122"/>
-                <a:cs typeface="Calibri" pitchFamily="34" charset="-120"/>
-              </a:rPr>
-              <a:t>2</a:t>
-            </a:r>
-            <a:endParaRPr lang="en-US" sz="1400" dirty="0"/>
-          </a:p>
-        </p:txBody>
-      </p:sp>
-      <p:sp>
-        <p:nvSpPr>
-          <p:cNvPr id="9" name="Text 7"/>
-          <p:cNvSpPr/>
-          <p:nvPr/>
-        </p:nvSpPr>
-        <p:spPr>
-          <a:xfrm>
-            <a:off x="1234440" y="2514600"/>
-            <a:ext cx="6309360" cy="548640"/>
-          </a:xfrm>
-          <a:prstGeom prst="rect">
-            <a:avLst/>
-          </a:prstGeom>
-          <a:noFill/>
-          <a:ln/>
-        </p:spPr>
-        <p:txBody>
-          <a:bodyPr wrap="square" lIns="0" tIns="0" rIns="0" bIns="0" rtlCol="0" anchor="ctr"/>
-          <a:lstStyle/>
-          <a:p>
-            <a:pPr indent="0" marL="0">
-              <a:buNone/>
-            </a:pPr>
-            <a:r>
-              <a:rPr lang="en-US" sz="1400" b="1" dirty="0">
-                <a:solidFill>
-                  <a:srgbClr val="1C2A24"/>
-                </a:solidFill>
-                <a:latin typeface="Calibri" pitchFamily="34" charset="0"/>
-                <a:ea typeface="Calibri" pitchFamily="34" charset="-122"/>
-                <a:cs typeface="Calibri" pitchFamily="34" charset="-120"/>
-              </a:rPr>
-              <a:t>tp_dates_sales.py</a:t>
-            </a:r>
-            <a:pPr indent="0" marL="0">
-              <a:buNone/>
-            </a:pPr>
-            <a:r>
-              <a:rPr lang="en-US" sz="1400" dirty="0">
-                <a:solidFill>
-                  <a:srgbClr val="5C6B63"/>
-                </a:solidFill>
-                <a:latin typeface="Calibri" pitchFamily="34" charset="0"/>
-                <a:ea typeface="Calibri" pitchFamily="34" charset="-122"/>
-                <a:cs typeface="Calibri" pitchFamily="34" charset="-120"/>
-              </a:rPr>
-              <a:t>  —  normaliser 4 formats + compter les montants invalides</a:t>
-            </a:r>
-            <a:endParaRPr lang="en-US" sz="1400" dirty="0"/>
-          </a:p>
-        </p:txBody>
-      </p:sp>
-      <p:sp>
-        <p:nvSpPr>
-          <p:cNvPr id="10" name="Shape 8"/>
-          <p:cNvSpPr/>
-          <p:nvPr/>
-        </p:nvSpPr>
-        <p:spPr>
-          <a:xfrm>
-            <a:off x="640080" y="3282696"/>
-            <a:ext cx="457200" cy="457200"/>
-          </a:xfrm>
-          <a:prstGeom prst="ellipse">
-            <a:avLst/>
-          </a:prstGeom>
-          <a:solidFill>
-            <a:srgbClr val="14563C"/>
-          </a:solidFill>
-          <a:ln/>
-        </p:spPr>
-      </p:sp>
-      <p:sp>
-        <p:nvSpPr>
-          <p:cNvPr id="11" name="Text 9"/>
-          <p:cNvSpPr/>
-          <p:nvPr/>
-        </p:nvSpPr>
-        <p:spPr>
-          <a:xfrm>
-            <a:off x="640080" y="3282696"/>
-            <a:ext cx="457200" cy="457200"/>
-          </a:xfrm>
-          <a:prstGeom prst="rect">
-            <a:avLst/>
-          </a:prstGeom>
-          <a:noFill/>
-          <a:ln/>
-        </p:spPr>
-        <p:txBody>
-          <a:bodyPr wrap="square" lIns="0" tIns="0" rIns="0" bIns="0" rtlCol="0" anchor="ctr"/>
-          <a:lstStyle/>
-          <a:p>
-            <a:pPr algn="ctr" indent="0" marL="0">
-              <a:buNone/>
-            </a:pPr>
-            <a:r>
-              <a:rPr lang="en-US" sz="1400" b="1" dirty="0">
-                <a:solidFill>
-                  <a:srgbClr val="FFFFFF"/>
-                </a:solidFill>
-                <a:latin typeface="Calibri" pitchFamily="34" charset="0"/>
-                <a:ea typeface="Calibri" pitchFamily="34" charset="-122"/>
-                <a:cs typeface="Calibri" pitchFamily="34" charset="-120"/>
-              </a:rPr>
-              <a:t>3</a:t>
-            </a:r>
-            <a:endParaRPr lang="en-US" sz="1400" dirty="0"/>
-          </a:p>
-        </p:txBody>
-      </p:sp>
-      <p:sp>
-        <p:nvSpPr>
-          <p:cNvPr id="12" name="Text 10"/>
-          <p:cNvSpPr/>
-          <p:nvPr/>
-        </p:nvSpPr>
-        <p:spPr>
-          <a:xfrm>
-            <a:off x="1234440" y="3264408"/>
-            <a:ext cx="6309360" cy="548640"/>
-          </a:xfrm>
-          <a:prstGeom prst="rect">
-            <a:avLst/>
-          </a:prstGeom>
-          <a:noFill/>
-          <a:ln/>
-        </p:spPr>
-        <p:txBody>
-          <a:bodyPr wrap="square" lIns="0" tIns="0" rIns="0" bIns="0" rtlCol="0" anchor="ctr"/>
-          <a:lstStyle/>
-          <a:p>
-            <a:pPr indent="0" marL="0">
-              <a:buNone/>
-            </a:pPr>
-            <a:r>
-              <a:rPr lang="en-US" sz="1400" b="1" dirty="0">
-                <a:solidFill>
-                  <a:srgbClr val="1C2A24"/>
-                </a:solidFill>
-                <a:latin typeface="Calibri" pitchFamily="34" charset="0"/>
-                <a:ea typeface="Calibri" pitchFamily="34" charset="-122"/>
-                <a:cs typeface="Calibri" pitchFamily="34" charset="-120"/>
-              </a:rPr>
-              <a:t>fiscalite/penalites.py</a:t>
-            </a:r>
-            <a:pPr indent="0" marL="0">
-              <a:buNone/>
-            </a:pPr>
-            <a:r>
-              <a:rPr lang="en-US" sz="1400" dirty="0">
-                <a:solidFill>
-                  <a:srgbClr val="5C6B63"/>
-                </a:solidFill>
-                <a:latin typeface="Calibri" pitchFamily="34" charset="0"/>
-                <a:ea typeface="Calibri" pitchFamily="34" charset="-122"/>
-                <a:cs typeface="Calibri" pitchFamily="34" charset="-120"/>
-              </a:rPr>
-              <a:t>  —  transférer vos fonctions du J2 dans le paquet</a:t>
-            </a:r>
-            <a:endParaRPr lang="en-US" sz="1400" dirty="0"/>
-          </a:p>
-        </p:txBody>
-      </p:sp>
-      <p:sp>
-        <p:nvSpPr>
-          <p:cNvPr id="13" name="Shape 11"/>
-          <p:cNvSpPr/>
-          <p:nvPr/>
-        </p:nvSpPr>
-        <p:spPr>
-          <a:xfrm>
-            <a:off x="640080" y="4032504"/>
-            <a:ext cx="457200" cy="457200"/>
-          </a:xfrm>
-          <a:prstGeom prst="ellipse">
-            <a:avLst/>
-          </a:prstGeom>
-          <a:solidFill>
-            <a:srgbClr val="14563C"/>
-          </a:solidFill>
-          <a:ln/>
-        </p:spPr>
-      </p:sp>
-      <p:sp>
-        <p:nvSpPr>
-          <p:cNvPr id="14" name="Text 12"/>
-          <p:cNvSpPr/>
-          <p:nvPr/>
-        </p:nvSpPr>
-        <p:spPr>
-          <a:xfrm>
-            <a:off x="640080" y="4032504"/>
-            <a:ext cx="457200" cy="457200"/>
-          </a:xfrm>
-          <a:prstGeom prst="rect">
-            <a:avLst/>
-          </a:prstGeom>
-          <a:noFill/>
-          <a:ln/>
-        </p:spPr>
-        <p:txBody>
-          <a:bodyPr wrap="square" lIns="0" tIns="0" rIns="0" bIns="0" rtlCol="0" anchor="ctr"/>
-          <a:lstStyle/>
-          <a:p>
-            <a:pPr algn="ctr" indent="0" marL="0">
-              <a:buNone/>
-            </a:pPr>
-            <a:r>
-              <a:rPr lang="en-US" sz="1400" b="1" dirty="0">
-                <a:solidFill>
-                  <a:srgbClr val="FFFFFF"/>
-                </a:solidFill>
-                <a:latin typeface="Calibri" pitchFamily="34" charset="0"/>
-                <a:ea typeface="Calibri" pitchFamily="34" charset="-122"/>
-                <a:cs typeface="Calibri" pitchFamily="34" charset="-120"/>
-              </a:rPr>
-              <a:t>4</a:t>
-            </a:r>
-            <a:endParaRPr lang="en-US" sz="1400" dirty="0"/>
-          </a:p>
-        </p:txBody>
-      </p:sp>
-      <p:sp>
-        <p:nvSpPr>
-          <p:cNvPr id="15" name="Text 13"/>
-          <p:cNvSpPr/>
-          <p:nvPr/>
-        </p:nvSpPr>
-        <p:spPr>
-          <a:xfrm>
-            <a:off x="1234440" y="4014216"/>
-            <a:ext cx="6309360" cy="548640"/>
-          </a:xfrm>
-          <a:prstGeom prst="rect">
-            <a:avLst/>
-          </a:prstGeom>
-          <a:noFill/>
-          <a:ln/>
-        </p:spPr>
-        <p:txBody>
-          <a:bodyPr wrap="square" lIns="0" tIns="0" rIns="0" bIns="0" rtlCol="0" anchor="ctr"/>
-          <a:lstStyle/>
-          <a:p>
-            <a:pPr indent="0" marL="0">
-              <a:buNone/>
-            </a:pPr>
-            <a:r>
-              <a:rPr lang="en-US" sz="1400" b="1" dirty="0">
-                <a:solidFill>
-                  <a:srgbClr val="1C2A24"/>
-                </a:solidFill>
-                <a:latin typeface="Calibri" pitchFamily="34" charset="0"/>
-                <a:ea typeface="Calibri" pitchFamily="34" charset="-122"/>
-                <a:cs typeface="Calibri" pitchFamily="34" charset="-120"/>
-              </a:rPr>
-              <a:t>tp_utiliser_paquet.py</a:t>
-            </a:r>
-            <a:pPr indent="0" marL="0">
-              <a:buNone/>
-            </a:pPr>
-            <a:r>
-              <a:rPr lang="en-US" sz="1400" dirty="0">
-                <a:solidFill>
-                  <a:srgbClr val="5C6B63"/>
-                </a:solidFill>
-                <a:latin typeface="Calibri" pitchFamily="34" charset="0"/>
-                <a:ea typeface="Calibri" pitchFamily="34" charset="-122"/>
-                <a:cs typeface="Calibri" pitchFamily="34" charset="-120"/>
-              </a:rPr>
-              <a:t>  —  importer et utiliser votre propre paquet</a:t>
-            </a:r>
-            <a:endParaRPr lang="en-US" sz="1400" dirty="0"/>
-          </a:p>
-        </p:txBody>
-      </p:sp>
-      <p:sp>
-        <p:nvSpPr>
-          <p:cNvPr id="16" name="Shape 14"/>
-          <p:cNvSpPr/>
-          <p:nvPr/>
-        </p:nvSpPr>
-        <p:spPr>
-          <a:xfrm>
-            <a:off x="7863840" y="1737360"/>
-            <a:ext cx="3749040" cy="3017520"/>
-          </a:xfrm>
-          <a:prstGeom prst="roundRect">
-            <a:avLst>
-              <a:gd name="adj" fmla="val 3030"/>
-            </a:avLst>
-          </a:prstGeom>
-          <a:solidFill>
-            <a:srgbClr val="EEF4F0"/>
-          </a:solidFill>
-          <a:ln/>
-        </p:spPr>
-      </p:sp>
-      <p:sp>
-        <p:nvSpPr>
-          <p:cNvPr id="17" name="Shape 15"/>
-          <p:cNvSpPr/>
-          <p:nvPr/>
-        </p:nvSpPr>
-        <p:spPr>
-          <a:xfrm>
-            <a:off x="8138160" y="1965960"/>
-            <a:ext cx="457200" cy="457200"/>
-          </a:xfrm>
-          <a:prstGeom prst="ellipse">
-            <a:avLst/>
-          </a:prstGeom>
-          <a:solidFill>
-            <a:srgbClr val="C9A227"/>
-          </a:solidFill>
-          <a:ln/>
-        </p:spPr>
-      </p:sp>
       <p:pic>
         <p:nvPicPr>
-          <p:cNvPr id="18" name="Image 0" descr="icons/folder.png">    </p:cNvPr>
+          <p:cNvPr id="4" name="Image 0" descr="logo-dgi.png">    </p:cNvPr>
           <p:cNvPicPr>
             <a:picLocks noChangeAspect="1"/>
           </p:cNvPicPr>
@@ -12276,8 +12022,8 @@
         </p:blipFill>
         <p:spPr>
           <a:xfrm>
-            <a:off x="8257032" y="2084832"/>
-            <a:ext cx="219456" cy="219456"/>
+            <a:off x="10744200" y="384048"/>
+            <a:ext cx="1051560" cy="795528"/>
           </a:xfrm>
           <a:prstGeom prst="rect">
             <a:avLst/>
@@ -12286,14 +12032,34 @@
       </p:pic>
       <p:sp>
         <p:nvSpPr>
-          <p:cNvPr id="19" name="Text 16"/>
-          <p:cNvSpPr/>
-          <p:nvPr/>
-        </p:nvSpPr>
-        <p:spPr>
-          <a:xfrm>
-            <a:off x="8732520" y="2011680"/>
-            <a:ext cx="2743200" cy="365760"/>
+          <p:cNvPr id="5" name="Shape 2"/>
+          <p:cNvSpPr/>
+          <p:nvPr/>
+        </p:nvSpPr>
+        <p:spPr>
+          <a:xfrm>
+            <a:off x="640080" y="1783080"/>
+            <a:ext cx="457200" cy="457200"/>
+          </a:xfrm>
+          <a:prstGeom prst="ellipse">
+            <a:avLst/>
+          </a:prstGeom>
+          <a:solidFill>
+            <a:srgbClr val="0E7A3D"/>
+          </a:solidFill>
+          <a:ln/>
+        </p:spPr>
+      </p:sp>
+      <p:sp>
+        <p:nvSpPr>
+          <p:cNvPr id="6" name="Text 3"/>
+          <p:cNvSpPr/>
+          <p:nvPr/>
+        </p:nvSpPr>
+        <p:spPr>
+          <a:xfrm>
+            <a:off x="640080" y="1783080"/>
+            <a:ext cx="457200" cy="457200"/>
           </a:xfrm>
           <a:prstGeom prst="rect">
             <a:avLst/>
@@ -12305,19 +12071,19 @@
           <a:bodyPr wrap="square" lIns="0" tIns="0" rIns="0" bIns="0" rtlCol="0" anchor="ctr"/>
           <a:lstStyle/>
           <a:p>
-            <a:pPr indent="0" marL="0">
+            <a:pPr algn="ctr" indent="0" marL="0">
               <a:buNone/>
             </a:pPr>
             <a:r>
               <a:rPr lang="en-US" sz="1400" b="1" dirty="0">
                 <a:solidFill>
-                  <a:srgbClr val="14563C"/>
+                  <a:srgbClr val="FFFFFF"/>
                 </a:solidFill>
                 <a:latin typeface="Calibri" pitchFamily="34" charset="0"/>
                 <a:ea typeface="Calibri" pitchFamily="34" charset="-122"/>
                 <a:cs typeface="Calibri" pitchFamily="34" charset="-120"/>
               </a:rPr>
-              <a:t>Fichiers du jour</a:t>
+              <a:t>1</a:t>
             </a:r>
             <a:endParaRPr lang="en-US" sz="1400" dirty="0"/>
           </a:p>
@@ -12325,14 +12091,14 @@
       </p:sp>
       <p:sp>
         <p:nvSpPr>
-          <p:cNvPr id="20" name="Text 17"/>
-          <p:cNvSpPr/>
-          <p:nvPr/>
-        </p:nvSpPr>
-        <p:spPr>
-          <a:xfrm>
-            <a:off x="8138160" y="2606040"/>
-            <a:ext cx="3291840" cy="2011680"/>
+          <p:cNvPr id="7" name="Text 4"/>
+          <p:cNvSpPr/>
+          <p:nvPr/>
+        </p:nvSpPr>
+        <p:spPr>
+          <a:xfrm>
+            <a:off x="1234440" y="1764792"/>
+            <a:ext cx="6309360" cy="548640"/>
           </a:xfrm>
           <a:prstGeom prst="rect">
             <a:avLst/>
@@ -12341,135 +12107,422 @@
           <a:ln/>
         </p:spPr>
         <p:txBody>
-          <a:bodyPr wrap="square" lIns="0" tIns="0" rIns="0" bIns="0" rtlCol="0" anchor="t"/>
+          <a:bodyPr wrap="square" lIns="0" tIns="0" rIns="0" bIns="0" rtlCol="0" anchor="ctr"/>
           <a:lstStyle/>
           <a:p>
             <a:pPr indent="0" marL="0">
-              <a:lnSpc>
-                <a:spcPct val="135000"/>
-              </a:lnSpc>
-              <a:buNone/>
-            </a:pPr>
-            <a:r>
-              <a:rPr lang="en-US" sz="1150" dirty="0">
+              <a:buNone/>
+            </a:pPr>
+            <a:r>
+              <a:rPr lang="en-US" sz="1400" b="1" dirty="0">
                 <a:solidFill>
                   <a:srgbClr val="1C2A24"/>
                 </a:solidFill>
-                <a:latin typeface="Courier New" pitchFamily="34" charset="0"/>
-                <a:ea typeface="Courier New" pitchFamily="34" charset="-122"/>
-                <a:cs typeface="Courier New" pitchFamily="34" charset="-120"/>
-              </a:rPr>
-              <a:t>05-fichiers-et-formats/</a:t>
-            </a:r>
-            <a:endParaRPr lang="en-US" sz="1150" dirty="0"/>
-          </a:p>
-          <a:p>
-            <a:pPr indent="0" marL="0">
-              <a:lnSpc>
-                <a:spcPct val="135000"/>
-              </a:lnSpc>
-              <a:buNone/>
-            </a:pPr>
-            <a:r>
-              <a:rPr lang="en-US" sz="1150" dirty="0">
+                <a:latin typeface="Calibri" pitchFamily="34" charset="0"/>
+                <a:ea typeface="Calibri" pitchFamily="34" charset="-122"/>
+                <a:cs typeface="Calibri" pitchFamily="34" charset="-120"/>
+              </a:rPr>
+              <a:t>tp_lecture.py</a:t>
+            </a:r>
+            <a:pPr indent="0" marL="0">
+              <a:buNone/>
+            </a:pPr>
+            <a:r>
+              <a:rPr lang="en-US" sz="1400" dirty="0">
+                <a:solidFill>
+                  <a:srgbClr val="5C6B63"/>
+                </a:solidFill>
+                <a:latin typeface="Calibri" pitchFamily="34" charset="0"/>
+                <a:ea typeface="Calibri" pitchFamily="34" charset="-122"/>
+                <a:cs typeface="Calibri" pitchFamily="34" charset="-120"/>
+              </a:rPr>
+              <a:t>  —  référentiel, comptage par région, extrait Bissau, JSON</a:t>
+            </a:r>
+            <a:endParaRPr lang="en-US" sz="1400" dirty="0"/>
+          </a:p>
+        </p:txBody>
+      </p:sp>
+      <p:sp>
+        <p:nvSpPr>
+          <p:cNvPr id="8" name="Shape 5"/>
+          <p:cNvSpPr/>
+          <p:nvPr/>
+        </p:nvSpPr>
+        <p:spPr>
+          <a:xfrm>
+            <a:off x="640080" y="2532888"/>
+            <a:ext cx="457200" cy="457200"/>
+          </a:xfrm>
+          <a:prstGeom prst="ellipse">
+            <a:avLst/>
+          </a:prstGeom>
+          <a:solidFill>
+            <a:srgbClr val="0E7A3D"/>
+          </a:solidFill>
+          <a:ln/>
+        </p:spPr>
+      </p:sp>
+      <p:sp>
+        <p:nvSpPr>
+          <p:cNvPr id="9" name="Text 6"/>
+          <p:cNvSpPr/>
+          <p:nvPr/>
+        </p:nvSpPr>
+        <p:spPr>
+          <a:xfrm>
+            <a:off x="640080" y="2532888"/>
+            <a:ext cx="457200" cy="457200"/>
+          </a:xfrm>
+          <a:prstGeom prst="rect">
+            <a:avLst/>
+          </a:prstGeom>
+          <a:noFill/>
+          <a:ln/>
+        </p:spPr>
+        <p:txBody>
+          <a:bodyPr wrap="square" lIns="0" tIns="0" rIns="0" bIns="0" rtlCol="0" anchor="ctr"/>
+          <a:lstStyle/>
+          <a:p>
+            <a:pPr algn="ctr" indent="0" marL="0">
+              <a:buNone/>
+            </a:pPr>
+            <a:r>
+              <a:rPr lang="en-US" sz="1400" b="1" dirty="0">
+                <a:solidFill>
+                  <a:srgbClr val="FFFFFF"/>
+                </a:solidFill>
+                <a:latin typeface="Calibri" pitchFamily="34" charset="0"/>
+                <a:ea typeface="Calibri" pitchFamily="34" charset="-122"/>
+                <a:cs typeface="Calibri" pitchFamily="34" charset="-120"/>
+              </a:rPr>
+              <a:t>2</a:t>
+            </a:r>
+            <a:endParaRPr lang="en-US" sz="1400" dirty="0"/>
+          </a:p>
+        </p:txBody>
+      </p:sp>
+      <p:sp>
+        <p:nvSpPr>
+          <p:cNvPr id="10" name="Text 7"/>
+          <p:cNvSpPr/>
+          <p:nvPr/>
+        </p:nvSpPr>
+        <p:spPr>
+          <a:xfrm>
+            <a:off x="1234440" y="2514600"/>
+            <a:ext cx="6309360" cy="548640"/>
+          </a:xfrm>
+          <a:prstGeom prst="rect">
+            <a:avLst/>
+          </a:prstGeom>
+          <a:noFill/>
+          <a:ln/>
+        </p:spPr>
+        <p:txBody>
+          <a:bodyPr wrap="square" lIns="0" tIns="0" rIns="0" bIns="0" rtlCol="0" anchor="ctr"/>
+          <a:lstStyle/>
+          <a:p>
+            <a:pPr indent="0" marL="0">
+              <a:buNone/>
+            </a:pPr>
+            <a:r>
+              <a:rPr lang="en-US" sz="1400" b="1" dirty="0">
                 <a:solidFill>
                   <a:srgbClr val="1C2A24"/>
                 </a:solidFill>
-                <a:latin typeface="Courier New" pitchFamily="34" charset="0"/>
-                <a:ea typeface="Courier New" pitchFamily="34" charset="-122"/>
-                <a:cs typeface="Courier New" pitchFamily="34" charset="-120"/>
-              </a:rPr>
-              <a:t>06-erreurs-et-exceptions/</a:t>
-            </a:r>
-            <a:endParaRPr lang="en-US" sz="1150" dirty="0"/>
-          </a:p>
-          <a:p>
-            <a:pPr indent="0" marL="0">
-              <a:lnSpc>
-                <a:spcPct val="135000"/>
-              </a:lnSpc>
-              <a:buNone/>
-            </a:pPr>
-            <a:r>
-              <a:rPr lang="en-US" sz="1150" dirty="0">
+                <a:latin typeface="Calibri" pitchFamily="34" charset="0"/>
+                <a:ea typeface="Calibri" pitchFamily="34" charset="-122"/>
+                <a:cs typeface="Calibri" pitchFamily="34" charset="-120"/>
+              </a:rPr>
+              <a:t>tp_dates_sales.py</a:t>
+            </a:r>
+            <a:pPr indent="0" marL="0">
+              <a:buNone/>
+            </a:pPr>
+            <a:r>
+              <a:rPr lang="en-US" sz="1400" dirty="0">
+                <a:solidFill>
+                  <a:srgbClr val="5C6B63"/>
+                </a:solidFill>
+                <a:latin typeface="Calibri" pitchFamily="34" charset="0"/>
+                <a:ea typeface="Calibri" pitchFamily="34" charset="-122"/>
+                <a:cs typeface="Calibri" pitchFamily="34" charset="-120"/>
+              </a:rPr>
+              <a:t>  —  normaliser 4 formats + compter les montants invalides</a:t>
+            </a:r>
+            <a:endParaRPr lang="en-US" sz="1400" dirty="0"/>
+          </a:p>
+        </p:txBody>
+      </p:sp>
+      <p:sp>
+        <p:nvSpPr>
+          <p:cNvPr id="11" name="Shape 8"/>
+          <p:cNvSpPr/>
+          <p:nvPr/>
+        </p:nvSpPr>
+        <p:spPr>
+          <a:xfrm>
+            <a:off x="640080" y="3282696"/>
+            <a:ext cx="457200" cy="457200"/>
+          </a:xfrm>
+          <a:prstGeom prst="ellipse">
+            <a:avLst/>
+          </a:prstGeom>
+          <a:solidFill>
+            <a:srgbClr val="0E7A3D"/>
+          </a:solidFill>
+          <a:ln/>
+        </p:spPr>
+      </p:sp>
+      <p:sp>
+        <p:nvSpPr>
+          <p:cNvPr id="12" name="Text 9"/>
+          <p:cNvSpPr/>
+          <p:nvPr/>
+        </p:nvSpPr>
+        <p:spPr>
+          <a:xfrm>
+            <a:off x="640080" y="3282696"/>
+            <a:ext cx="457200" cy="457200"/>
+          </a:xfrm>
+          <a:prstGeom prst="rect">
+            <a:avLst/>
+          </a:prstGeom>
+          <a:noFill/>
+          <a:ln/>
+        </p:spPr>
+        <p:txBody>
+          <a:bodyPr wrap="square" lIns="0" tIns="0" rIns="0" bIns="0" rtlCol="0" anchor="ctr"/>
+          <a:lstStyle/>
+          <a:p>
+            <a:pPr algn="ctr" indent="0" marL="0">
+              <a:buNone/>
+            </a:pPr>
+            <a:r>
+              <a:rPr lang="en-US" sz="1400" b="1" dirty="0">
+                <a:solidFill>
+                  <a:srgbClr val="FFFFFF"/>
+                </a:solidFill>
+                <a:latin typeface="Calibri" pitchFamily="34" charset="0"/>
+                <a:ea typeface="Calibri" pitchFamily="34" charset="-122"/>
+                <a:cs typeface="Calibri" pitchFamily="34" charset="-120"/>
+              </a:rPr>
+              <a:t>3</a:t>
+            </a:r>
+            <a:endParaRPr lang="en-US" sz="1400" dirty="0"/>
+          </a:p>
+        </p:txBody>
+      </p:sp>
+      <p:sp>
+        <p:nvSpPr>
+          <p:cNvPr id="13" name="Text 10"/>
+          <p:cNvSpPr/>
+          <p:nvPr/>
+        </p:nvSpPr>
+        <p:spPr>
+          <a:xfrm>
+            <a:off x="1234440" y="3264408"/>
+            <a:ext cx="6309360" cy="548640"/>
+          </a:xfrm>
+          <a:prstGeom prst="rect">
+            <a:avLst/>
+          </a:prstGeom>
+          <a:noFill/>
+          <a:ln/>
+        </p:spPr>
+        <p:txBody>
+          <a:bodyPr wrap="square" lIns="0" tIns="0" rIns="0" bIns="0" rtlCol="0" anchor="ctr"/>
+          <a:lstStyle/>
+          <a:p>
+            <a:pPr indent="0" marL="0">
+              <a:buNone/>
+            </a:pPr>
+            <a:r>
+              <a:rPr lang="en-US" sz="1400" b="1" dirty="0">
                 <a:solidFill>
                   <a:srgbClr val="1C2A24"/>
                 </a:solidFill>
-                <a:latin typeface="Courier New" pitchFamily="34" charset="0"/>
-                <a:ea typeface="Courier New" pitchFamily="34" charset="-122"/>
-                <a:cs typeface="Courier New" pitchFamily="34" charset="-120"/>
-              </a:rPr>
-              <a:t>07-modules-et-organisation/</a:t>
-            </a:r>
-            <a:endParaRPr lang="en-US" sz="1150" dirty="0"/>
-          </a:p>
-          <a:p>
-            <a:pPr indent="0" marL="0">
-              <a:lnSpc>
-                <a:spcPct val="135000"/>
-              </a:lnSpc>
-              <a:buNone/>
-            </a:pPr>
-            <a:r>
-              <a:rPr lang="en-US" sz="1150" dirty="0">
+                <a:latin typeface="Calibri" pitchFamily="34" charset="0"/>
+                <a:ea typeface="Calibri" pitchFamily="34" charset="-122"/>
+                <a:cs typeface="Calibri" pitchFamily="34" charset="-120"/>
+              </a:rPr>
+              <a:t>fiscalite/penalites.py</a:t>
+            </a:r>
+            <a:pPr indent="0" marL="0">
+              <a:buNone/>
+            </a:pPr>
+            <a:r>
+              <a:rPr lang="en-US" sz="1400" dirty="0">
+                <a:solidFill>
+                  <a:srgbClr val="5C6B63"/>
+                </a:solidFill>
+                <a:latin typeface="Calibri" pitchFamily="34" charset="0"/>
+                <a:ea typeface="Calibri" pitchFamily="34" charset="-122"/>
+                <a:cs typeface="Calibri" pitchFamily="34" charset="-120"/>
+              </a:rPr>
+              <a:t>  —  transférer vos fonctions du J2 dans le paquet</a:t>
+            </a:r>
+            <a:endParaRPr lang="en-US" sz="1400" dirty="0"/>
+          </a:p>
+        </p:txBody>
+      </p:sp>
+      <p:sp>
+        <p:nvSpPr>
+          <p:cNvPr id="14" name="Shape 11"/>
+          <p:cNvSpPr/>
+          <p:nvPr/>
+        </p:nvSpPr>
+        <p:spPr>
+          <a:xfrm>
+            <a:off x="640080" y="4032504"/>
+            <a:ext cx="457200" cy="457200"/>
+          </a:xfrm>
+          <a:prstGeom prst="ellipse">
+            <a:avLst/>
+          </a:prstGeom>
+          <a:solidFill>
+            <a:srgbClr val="0E7A3D"/>
+          </a:solidFill>
+          <a:ln/>
+        </p:spPr>
+      </p:sp>
+      <p:sp>
+        <p:nvSpPr>
+          <p:cNvPr id="15" name="Text 12"/>
+          <p:cNvSpPr/>
+          <p:nvPr/>
+        </p:nvSpPr>
+        <p:spPr>
+          <a:xfrm>
+            <a:off x="640080" y="4032504"/>
+            <a:ext cx="457200" cy="457200"/>
+          </a:xfrm>
+          <a:prstGeom prst="rect">
+            <a:avLst/>
+          </a:prstGeom>
+          <a:noFill/>
+          <a:ln/>
+        </p:spPr>
+        <p:txBody>
+          <a:bodyPr wrap="square" lIns="0" tIns="0" rIns="0" bIns="0" rtlCol="0" anchor="ctr"/>
+          <a:lstStyle/>
+          <a:p>
+            <a:pPr algn="ctr" indent="0" marL="0">
+              <a:buNone/>
+            </a:pPr>
+            <a:r>
+              <a:rPr lang="en-US" sz="1400" b="1" dirty="0">
+                <a:solidFill>
+                  <a:srgbClr val="FFFFFF"/>
+                </a:solidFill>
+                <a:latin typeface="Calibri" pitchFamily="34" charset="0"/>
+                <a:ea typeface="Calibri" pitchFamily="34" charset="-122"/>
+                <a:cs typeface="Calibri" pitchFamily="34" charset="-120"/>
+              </a:rPr>
+              <a:t>4</a:t>
+            </a:r>
+            <a:endParaRPr lang="en-US" sz="1400" dirty="0"/>
+          </a:p>
+        </p:txBody>
+      </p:sp>
+      <p:sp>
+        <p:nvSpPr>
+          <p:cNvPr id="16" name="Text 13"/>
+          <p:cNvSpPr/>
+          <p:nvPr/>
+        </p:nvSpPr>
+        <p:spPr>
+          <a:xfrm>
+            <a:off x="1234440" y="4014216"/>
+            <a:ext cx="6309360" cy="548640"/>
+          </a:xfrm>
+          <a:prstGeom prst="rect">
+            <a:avLst/>
+          </a:prstGeom>
+          <a:noFill/>
+          <a:ln/>
+        </p:spPr>
+        <p:txBody>
+          <a:bodyPr wrap="square" lIns="0" tIns="0" rIns="0" bIns="0" rtlCol="0" anchor="ctr"/>
+          <a:lstStyle/>
+          <a:p>
+            <a:pPr indent="0" marL="0">
+              <a:buNone/>
+            </a:pPr>
+            <a:r>
+              <a:rPr lang="en-US" sz="1400" b="1" dirty="0">
                 <a:solidFill>
                   <a:srgbClr val="1C2A24"/>
                 </a:solidFill>
-                <a:latin typeface="Courier New" pitchFamily="34" charset="0"/>
-                <a:ea typeface="Courier New" pitchFamily="34" charset="-122"/>
-                <a:cs typeface="Courier New" pitchFamily="34" charset="-120"/>
-              </a:rPr>
-              <a:t>  fiscalite/</a:t>
-            </a:r>
-            <a:endParaRPr lang="en-US" sz="1150" dirty="0"/>
+                <a:latin typeface="Calibri" pitchFamily="34" charset="0"/>
+                <a:ea typeface="Calibri" pitchFamily="34" charset="-122"/>
+                <a:cs typeface="Calibri" pitchFamily="34" charset="-120"/>
+              </a:rPr>
+              <a:t>tp_utiliser_paquet.py</a:t>
+            </a:r>
+            <a:pPr indent="0" marL="0">
+              <a:buNone/>
+            </a:pPr>
+            <a:r>
+              <a:rPr lang="en-US" sz="1400" dirty="0">
+                <a:solidFill>
+                  <a:srgbClr val="5C6B63"/>
+                </a:solidFill>
+                <a:latin typeface="Calibri" pitchFamily="34" charset="0"/>
+                <a:ea typeface="Calibri" pitchFamily="34" charset="-122"/>
+                <a:cs typeface="Calibri" pitchFamily="34" charset="-120"/>
+              </a:rPr>
+              <a:t>  —  importer et utiliser votre propre paquet</a:t>
+            </a:r>
+            <a:endParaRPr lang="en-US" sz="1400" dirty="0"/>
           </a:p>
         </p:txBody>
       </p:sp>
       <p:sp>
         <p:nvSpPr>
-          <p:cNvPr id="21" name="Shape 18"/>
-          <p:cNvSpPr/>
-          <p:nvPr/>
-        </p:nvSpPr>
-        <p:spPr>
-          <a:xfrm>
-            <a:off x="7863840" y="4983480"/>
-            <a:ext cx="3749040" cy="1234440"/>
+          <p:cNvPr id="17" name="Shape 14"/>
+          <p:cNvSpPr/>
+          <p:nvPr/>
+        </p:nvSpPr>
+        <p:spPr>
+          <a:xfrm>
+            <a:off x="7863840" y="1737360"/>
+            <a:ext cx="3749040" cy="3017520"/>
           </a:xfrm>
           <a:prstGeom prst="roundRect">
             <a:avLst>
-              <a:gd name="adj" fmla="val 7407"/>
+              <a:gd name="adj" fmla="val 3030"/>
             </a:avLst>
           </a:prstGeom>
           <a:solidFill>
-            <a:srgbClr val="0D3325"/>
+            <a:srgbClr val="EEF5EF"/>
           </a:solidFill>
           <a:ln/>
         </p:spPr>
       </p:sp>
       <p:sp>
         <p:nvSpPr>
-          <p:cNvPr id="22" name="Shape 19"/>
-          <p:cNvSpPr/>
-          <p:nvPr/>
-        </p:nvSpPr>
-        <p:spPr>
-          <a:xfrm>
-            <a:off x="8138160" y="5212080"/>
+          <p:cNvPr id="18" name="Shape 15"/>
+          <p:cNvSpPr/>
+          <p:nvPr/>
+        </p:nvSpPr>
+        <p:spPr>
+          <a:xfrm>
+            <a:off x="8138160" y="1965960"/>
             <a:ext cx="457200" cy="457200"/>
           </a:xfrm>
           <a:prstGeom prst="ellipse">
             <a:avLst/>
           </a:prstGeom>
           <a:solidFill>
-            <a:srgbClr val="C9A227"/>
+            <a:srgbClr val="C79100"/>
           </a:solidFill>
           <a:ln/>
         </p:spPr>
       </p:sp>
       <p:pic>
         <p:nvPicPr>
-          <p:cNvPr id="23" name="Image 1" descr="icons/bulb.png">    </p:cNvPr>
+          <p:cNvPr id="19" name="Image 1" descr="icons/folder.png">    </p:cNvPr>
           <p:cNvPicPr>
             <a:picLocks noChangeAspect="1"/>
           </p:cNvPicPr>
@@ -12483,6 +12536,213 @@
         </p:blipFill>
         <p:spPr>
           <a:xfrm>
+            <a:off x="8257032" y="2084832"/>
+            <a:ext cx="219456" cy="219456"/>
+          </a:xfrm>
+          <a:prstGeom prst="rect">
+            <a:avLst/>
+          </a:prstGeom>
+        </p:spPr>
+      </p:pic>
+      <p:sp>
+        <p:nvSpPr>
+          <p:cNvPr id="20" name="Text 16"/>
+          <p:cNvSpPr/>
+          <p:nvPr/>
+        </p:nvSpPr>
+        <p:spPr>
+          <a:xfrm>
+            <a:off x="8732520" y="2011680"/>
+            <a:ext cx="2743200" cy="365760"/>
+          </a:xfrm>
+          <a:prstGeom prst="rect">
+            <a:avLst/>
+          </a:prstGeom>
+          <a:noFill/>
+          <a:ln/>
+        </p:spPr>
+        <p:txBody>
+          <a:bodyPr wrap="square" lIns="0" tIns="0" rIns="0" bIns="0" rtlCol="0" anchor="ctr"/>
+          <a:lstStyle/>
+          <a:p>
+            <a:pPr indent="0" marL="0">
+              <a:buNone/>
+            </a:pPr>
+            <a:r>
+              <a:rPr lang="en-US" sz="1400" b="1" dirty="0">
+                <a:solidFill>
+                  <a:srgbClr val="0E7A3D"/>
+                </a:solidFill>
+                <a:latin typeface="Calibri" pitchFamily="34" charset="0"/>
+                <a:ea typeface="Calibri" pitchFamily="34" charset="-122"/>
+                <a:cs typeface="Calibri" pitchFamily="34" charset="-120"/>
+              </a:rPr>
+              <a:t>Fichiers du jour</a:t>
+            </a:r>
+            <a:endParaRPr lang="en-US" sz="1400" dirty="0"/>
+          </a:p>
+        </p:txBody>
+      </p:sp>
+      <p:sp>
+        <p:nvSpPr>
+          <p:cNvPr id="21" name="Text 17"/>
+          <p:cNvSpPr/>
+          <p:nvPr/>
+        </p:nvSpPr>
+        <p:spPr>
+          <a:xfrm>
+            <a:off x="8138160" y="2606040"/>
+            <a:ext cx="3291840" cy="2011680"/>
+          </a:xfrm>
+          <a:prstGeom prst="rect">
+            <a:avLst/>
+          </a:prstGeom>
+          <a:noFill/>
+          <a:ln/>
+        </p:spPr>
+        <p:txBody>
+          <a:bodyPr wrap="square" lIns="0" tIns="0" rIns="0" bIns="0" rtlCol="0" anchor="t"/>
+          <a:lstStyle/>
+          <a:p>
+            <a:pPr indent="0" marL="0">
+              <a:lnSpc>
+                <a:spcPct val="135000"/>
+              </a:lnSpc>
+              <a:buNone/>
+            </a:pPr>
+            <a:r>
+              <a:rPr lang="en-US" sz="1150" dirty="0">
+                <a:solidFill>
+                  <a:srgbClr val="1C2A24"/>
+                </a:solidFill>
+                <a:latin typeface="Courier New" pitchFamily="34" charset="0"/>
+                <a:ea typeface="Courier New" pitchFamily="34" charset="-122"/>
+                <a:cs typeface="Courier New" pitchFamily="34" charset="-120"/>
+              </a:rPr>
+              <a:t>05-fichiers-et-formats/</a:t>
+            </a:r>
+            <a:endParaRPr lang="en-US" sz="1150" dirty="0"/>
+          </a:p>
+          <a:p>
+            <a:pPr indent="0" marL="0">
+              <a:lnSpc>
+                <a:spcPct val="135000"/>
+              </a:lnSpc>
+              <a:buNone/>
+            </a:pPr>
+            <a:r>
+              <a:rPr lang="en-US" sz="1150" dirty="0">
+                <a:solidFill>
+                  <a:srgbClr val="1C2A24"/>
+                </a:solidFill>
+                <a:latin typeface="Courier New" pitchFamily="34" charset="0"/>
+                <a:ea typeface="Courier New" pitchFamily="34" charset="-122"/>
+                <a:cs typeface="Courier New" pitchFamily="34" charset="-120"/>
+              </a:rPr>
+              <a:t>06-erreurs-et-exceptions/</a:t>
+            </a:r>
+            <a:endParaRPr lang="en-US" sz="1150" dirty="0"/>
+          </a:p>
+          <a:p>
+            <a:pPr indent="0" marL="0">
+              <a:lnSpc>
+                <a:spcPct val="135000"/>
+              </a:lnSpc>
+              <a:buNone/>
+            </a:pPr>
+            <a:r>
+              <a:rPr lang="en-US" sz="1150" dirty="0">
+                <a:solidFill>
+                  <a:srgbClr val="1C2A24"/>
+                </a:solidFill>
+                <a:latin typeface="Courier New" pitchFamily="34" charset="0"/>
+                <a:ea typeface="Courier New" pitchFamily="34" charset="-122"/>
+                <a:cs typeface="Courier New" pitchFamily="34" charset="-120"/>
+              </a:rPr>
+              <a:t>07-modules-et-organisation/</a:t>
+            </a:r>
+            <a:endParaRPr lang="en-US" sz="1150" dirty="0"/>
+          </a:p>
+          <a:p>
+            <a:pPr indent="0" marL="0">
+              <a:lnSpc>
+                <a:spcPct val="135000"/>
+              </a:lnSpc>
+              <a:buNone/>
+            </a:pPr>
+            <a:r>
+              <a:rPr lang="en-US" sz="1150" dirty="0">
+                <a:solidFill>
+                  <a:srgbClr val="1C2A24"/>
+                </a:solidFill>
+                <a:latin typeface="Courier New" pitchFamily="34" charset="0"/>
+                <a:ea typeface="Courier New" pitchFamily="34" charset="-122"/>
+                <a:cs typeface="Courier New" pitchFamily="34" charset="-120"/>
+              </a:rPr>
+              <a:t>  fiscalite/</a:t>
+            </a:r>
+            <a:endParaRPr lang="en-US" sz="1150" dirty="0"/>
+          </a:p>
+        </p:txBody>
+      </p:sp>
+      <p:sp>
+        <p:nvSpPr>
+          <p:cNvPr id="22" name="Shape 18"/>
+          <p:cNvSpPr/>
+          <p:nvPr/>
+        </p:nvSpPr>
+        <p:spPr>
+          <a:xfrm>
+            <a:off x="7863840" y="4983480"/>
+            <a:ext cx="3749040" cy="1234440"/>
+          </a:xfrm>
+          <a:prstGeom prst="roundRect">
+            <a:avLst>
+              <a:gd name="adj" fmla="val 7407"/>
+            </a:avLst>
+          </a:prstGeom>
+          <a:solidFill>
+            <a:srgbClr val="0A2E1A"/>
+          </a:solidFill>
+          <a:ln/>
+        </p:spPr>
+      </p:sp>
+      <p:sp>
+        <p:nvSpPr>
+          <p:cNvPr id="23" name="Shape 19"/>
+          <p:cNvSpPr/>
+          <p:nvPr/>
+        </p:nvSpPr>
+        <p:spPr>
+          <a:xfrm>
+            <a:off x="8138160" y="5212080"/>
+            <a:ext cx="457200" cy="457200"/>
+          </a:xfrm>
+          <a:prstGeom prst="ellipse">
+            <a:avLst/>
+          </a:prstGeom>
+          <a:solidFill>
+            <a:srgbClr val="C79100"/>
+          </a:solidFill>
+          <a:ln/>
+        </p:spPr>
+      </p:sp>
+      <p:pic>
+        <p:nvPicPr>
+          <p:cNvPr id="24" name="Image 2" descr="icons/bulb.png">    </p:cNvPr>
+          <p:cNvPicPr>
+            <a:picLocks noChangeAspect="1"/>
+          </p:cNvPicPr>
+          <p:nvPr/>
+        </p:nvPicPr>
+        <p:blipFill>
+          <a:blip r:embed="rId3"/>
+          <a:stretch>
+            <a:fillRect/>
+          </a:stretch>
+        </p:blipFill>
+        <p:spPr>
+          <a:xfrm>
             <a:off x="8257032" y="5330952"/>
             <a:ext cx="219456" cy="219456"/>
           </a:xfrm>
@@ -12493,7 +12753,7 @@
       </p:pic>
       <p:sp>
         <p:nvSpPr>
-          <p:cNvPr id="24" name="Text 20"/>
+          <p:cNvPr id="25" name="Text 20"/>
           <p:cNvSpPr/>
           <p:nvPr/>
         </p:nvSpPr>

--- a/slides/sources/J3-fichiers-robustesse.pptx
+++ b/slides/sources/J3-fichiers-robustesse.pptx
@@ -1658,7 +1658,7 @@
     <p:bg>
       <p:bgPr>
         <a:solidFill>
-          <a:srgbClr val="0A2E1A"/>
+          <a:srgbClr val="FFFFFF"/>
         </a:solidFill>
       </p:bgPr>
     </p:bg>
@@ -1684,14 +1684,14 @@
         </p:nvSpPr>
         <p:spPr>
           <a:xfrm>
-            <a:off x="9692640" y="-1463040"/>
-            <a:ext cx="4206240" cy="4206240"/>
+            <a:off x="10149840" y="4846320"/>
+            <a:ext cx="3291840" cy="3291840"/>
           </a:xfrm>
           <a:prstGeom prst="ellipse">
             <a:avLst/>
           </a:prstGeom>
           <a:solidFill>
-            <a:srgbClr val="0E7A3D"/>
+            <a:srgbClr val="EEF5EF"/>
           </a:solidFill>
           <a:ln/>
         </p:spPr>
@@ -1704,67 +1704,21 @@
         </p:nvSpPr>
         <p:spPr>
           <a:xfrm>
-            <a:off x="10698480" y="4480560"/>
-            <a:ext cx="3108960" cy="3108960"/>
+            <a:off x="-1188720" y="-1371600"/>
+            <a:ext cx="2743200" cy="2743200"/>
           </a:xfrm>
           <a:prstGeom prst="ellipse">
             <a:avLst/>
           </a:prstGeom>
           <a:solidFill>
-            <a:srgbClr val="FCD116">
-              <a:alpha val="55000"/>
-            </a:srgbClr>
-          </a:solidFill>
-          <a:ln/>
-        </p:spPr>
-      </p:sp>
-      <p:sp>
-        <p:nvSpPr>
-          <p:cNvPr id="4" name="Shape 2"/>
-          <p:cNvSpPr/>
-          <p:nvPr/>
-        </p:nvSpPr>
-        <p:spPr>
-          <a:xfrm>
-            <a:off x="-1097280" y="5120640"/>
-            <a:ext cx="2743200" cy="2743200"/>
-          </a:xfrm>
-          <a:prstGeom prst="ellipse">
-            <a:avLst/>
-          </a:prstGeom>
-          <a:solidFill>
-            <a:srgbClr val="CE1126">
-              <a:alpha val="65000"/>
-            </a:srgbClr>
-          </a:solidFill>
-          <a:ln/>
-        </p:spPr>
-      </p:sp>
-      <p:sp>
-        <p:nvSpPr>
-          <p:cNvPr id="5" name="Shape 3"/>
-          <p:cNvSpPr/>
-          <p:nvPr/>
-        </p:nvSpPr>
-        <p:spPr>
-          <a:xfrm>
-            <a:off x="9464040" y="502920"/>
-            <a:ext cx="2148840" cy="1828800"/>
-          </a:xfrm>
-          <a:prstGeom prst="roundRect">
-            <a:avLst>
-              <a:gd name="adj" fmla="val 6000"/>
-            </a:avLst>
-          </a:prstGeom>
-          <a:solidFill>
-            <a:srgbClr val="FFFFFF"/>
+            <a:srgbClr val="EEF5EF"/>
           </a:solidFill>
           <a:ln/>
         </p:spPr>
       </p:sp>
       <p:pic>
         <p:nvPicPr>
-          <p:cNvPr id="6" name="Image 0" descr="logo-dgi.png">    </p:cNvPr>
+          <p:cNvPr id="4" name="Image 0" descr="logo-ministere.png">    </p:cNvPr>
           <p:cNvPicPr>
             <a:picLocks noChangeAspect="1"/>
           </p:cNvPicPr>
@@ -1778,23 +1732,47 @@
         </p:blipFill>
         <p:spPr>
           <a:xfrm>
-            <a:off x="9646920" y="740664"/>
-            <a:ext cx="1783080" cy="1353312"/>
+            <a:off x="640080" y="457200"/>
+            <a:ext cx="4206240" cy="822960"/>
           </a:xfrm>
           <a:prstGeom prst="rect">
             <a:avLst/>
           </a:prstGeom>
         </p:spPr>
       </p:pic>
-      <p:sp>
-        <p:nvSpPr>
-          <p:cNvPr id="7" name="Text 4"/>
-          <p:cNvSpPr/>
-          <p:nvPr/>
-        </p:nvSpPr>
-        <p:spPr>
-          <a:xfrm>
-            <a:off x="640080" y="777240"/>
+      <p:pic>
+        <p:nvPicPr>
+          <p:cNvPr id="5" name="Image 1" descr="logo-dgci.png">    </p:cNvPr>
+          <p:cNvPicPr>
+            <a:picLocks noChangeAspect="1"/>
+          </p:cNvPicPr>
+          <p:nvPr/>
+        </p:nvPicPr>
+        <p:blipFill>
+          <a:blip r:embed="rId2"/>
+          <a:stretch>
+            <a:fillRect/>
+          </a:stretch>
+        </p:blipFill>
+        <p:spPr>
+          <a:xfrm>
+            <a:off x="9144000" y="475488"/>
+            <a:ext cx="2468880" cy="758952"/>
+          </a:xfrm>
+          <a:prstGeom prst="rect">
+            <a:avLst/>
+          </a:prstGeom>
+        </p:spPr>
+      </p:pic>
+      <p:sp>
+        <p:nvSpPr>
+          <p:cNvPr id="6" name="Text 2"/>
+          <p:cNvSpPr/>
+          <p:nvPr/>
+        </p:nvSpPr>
+        <p:spPr>
+          <a:xfrm>
+            <a:off x="640080" y="1874520"/>
             <a:ext cx="7315200" cy="365760"/>
           </a:xfrm>
           <a:prstGeom prst="rect">
@@ -1813,7 +1791,7 @@
             <a:r>
               <a:rPr lang="en-US" sz="1500" b="1" spc="300" kern="0" dirty="0">
                 <a:solidFill>
-                  <a:srgbClr val="FCD116"/>
+                  <a:srgbClr val="C79100"/>
                 </a:solidFill>
                 <a:latin typeface="Calibri" pitchFamily="34" charset="0"/>
                 <a:ea typeface="Calibri" pitchFamily="34" charset="-122"/>
@@ -1827,13 +1805,13 @@
       </p:sp>
       <p:sp>
         <p:nvSpPr>
-          <p:cNvPr id="8" name="Text 5"/>
-          <p:cNvSpPr/>
-          <p:nvPr/>
-        </p:nvSpPr>
-        <p:spPr>
-          <a:xfrm>
-            <a:off x="640080" y="1417320"/>
+          <p:cNvPr id="7" name="Text 3"/>
+          <p:cNvSpPr/>
+          <p:nvPr/>
+        </p:nvSpPr>
+        <p:spPr>
+          <a:xfrm>
+            <a:off x="640080" y="2286000"/>
             <a:ext cx="8686800" cy="1371600"/>
           </a:xfrm>
           <a:prstGeom prst="rect">
@@ -1850,9 +1828,9 @@
               <a:buNone/>
             </a:pPr>
             <a:r>
-              <a:rPr lang="en-US" sz="8400" b="1" dirty="0">
-                <a:solidFill>
-                  <a:srgbClr val="FFFFFF"/>
+              <a:rPr lang="en-US" sz="8000" b="1" dirty="0">
+                <a:solidFill>
+                  <a:srgbClr val="0E7A3D"/>
                 </a:solidFill>
                 <a:latin typeface="Cambria" pitchFamily="34" charset="0"/>
                 <a:ea typeface="Cambria" pitchFamily="34" charset="-122"/>
@@ -1860,20 +1838,20 @@
               </a:rPr>
               <a:t>J3</a:t>
             </a:r>
-            <a:endParaRPr lang="en-US" sz="8400" dirty="0"/>
+            <a:endParaRPr lang="en-US" sz="8000" dirty="0"/>
           </a:p>
         </p:txBody>
       </p:sp>
       <p:sp>
         <p:nvSpPr>
-          <p:cNvPr id="9" name="Text 6"/>
-          <p:cNvSpPr/>
-          <p:nvPr/>
-        </p:nvSpPr>
-        <p:spPr>
-          <a:xfrm>
-            <a:off x="640080" y="2880360"/>
-            <a:ext cx="9418320" cy="914400"/>
+          <p:cNvPr id="8" name="Text 4"/>
+          <p:cNvSpPr/>
+          <p:nvPr/>
+        </p:nvSpPr>
+        <p:spPr>
+          <a:xfrm>
+            <a:off x="640080" y="3657600"/>
+            <a:ext cx="10058400" cy="914400"/>
           </a:xfrm>
           <a:prstGeom prst="rect">
             <a:avLst/>
@@ -1889,9 +1867,9 @@
               <a:buNone/>
             </a:pPr>
             <a:r>
-              <a:rPr lang="en-US" sz="3500" b="1" dirty="0">
-                <a:solidFill>
-                  <a:srgbClr val="FCD116"/>
+              <a:rPr lang="en-US" sz="3400" b="1" dirty="0">
+                <a:solidFill>
+                  <a:srgbClr val="1C2A24"/>
                 </a:solidFill>
                 <a:latin typeface="Cambria" pitchFamily="34" charset="0"/>
                 <a:ea typeface="Cambria" pitchFamily="34" charset="-122"/>
@@ -1899,20 +1877,20 @@
               </a:rPr>
               <a:t>Fichiers, formats et robustesse</a:t>
             </a:r>
-            <a:endParaRPr lang="en-US" sz="3500" dirty="0"/>
+            <a:endParaRPr lang="en-US" sz="3400" dirty="0"/>
           </a:p>
         </p:txBody>
       </p:sp>
       <p:sp>
         <p:nvSpPr>
-          <p:cNvPr id="10" name="Text 7"/>
-          <p:cNvSpPr/>
-          <p:nvPr/>
-        </p:nvSpPr>
-        <p:spPr>
-          <a:xfrm>
-            <a:off x="640080" y="3794760"/>
-            <a:ext cx="8778240" cy="822960"/>
+          <p:cNvPr id="9" name="Text 5"/>
+          <p:cNvSpPr/>
+          <p:nvPr/>
+        </p:nvSpPr>
+        <p:spPr>
+          <a:xfrm>
+            <a:off x="640080" y="4526280"/>
+            <a:ext cx="9326880" cy="822960"/>
           </a:xfrm>
           <a:prstGeom prst="rect">
             <a:avLst/>
@@ -1931,9 +1909,9 @@
               <a:buNone/>
             </a:pPr>
             <a:r>
-              <a:rPr lang="en-US" sz="1600" dirty="0">
-                <a:solidFill>
-                  <a:srgbClr val="CADFD2"/>
+              <a:rPr lang="en-US" sz="1550" dirty="0">
+                <a:solidFill>
+                  <a:srgbClr val="5C6B63"/>
                 </a:solidFill>
                 <a:latin typeface="Calibri" pitchFamily="34" charset="0"/>
                 <a:ea typeface="Calibri" pitchFamily="34" charset="-122"/>
@@ -1941,7 +1919,7 @@
               </a:rPr>
               <a:t>Lire les vrais fichiers du dépôt — CSV et JSON —, encaisser les</a:t>
             </a:r>
-            <a:endParaRPr lang="en-US" sz="1600" dirty="0"/>
+            <a:endParaRPr lang="en-US" sz="1550" dirty="0"/>
           </a:p>
           <a:p>
             <a:pPr indent="0" marL="0">
@@ -1951,9 +1929,9 @@
               <a:buNone/>
             </a:pPr>
             <a:r>
-              <a:rPr lang="en-US" sz="1600" dirty="0">
-                <a:solidFill>
-                  <a:srgbClr val="CADFD2"/>
+              <a:rPr lang="en-US" sz="1550" dirty="0">
+                <a:solidFill>
+                  <a:srgbClr val="5C6B63"/>
                 </a:solidFill>
                 <a:latin typeface="Calibri" pitchFamily="34" charset="0"/>
                 <a:ea typeface="Calibri" pitchFamily="34" charset="-122"/>
@@ -1961,19 +1939,19 @@
               </a:rPr>
               <a:t>données sales avec les exceptions, organiser son code en paquet.</a:t>
             </a:r>
-            <a:endParaRPr lang="en-US" sz="1600" dirty="0"/>
+            <a:endParaRPr lang="en-US" sz="1550" dirty="0"/>
           </a:p>
         </p:txBody>
       </p:sp>
       <p:sp>
         <p:nvSpPr>
-          <p:cNvPr id="11" name="Shape 8"/>
-          <p:cNvSpPr/>
-          <p:nvPr/>
-        </p:nvSpPr>
-        <p:spPr>
-          <a:xfrm>
-            <a:off x="640080" y="5120640"/>
+          <p:cNvPr id="10" name="Shape 6"/>
+          <p:cNvSpPr/>
+          <p:nvPr/>
+        </p:nvSpPr>
+        <p:spPr>
+          <a:xfrm>
+            <a:off x="640080" y="5440680"/>
             <a:ext cx="2496312" cy="475488"/>
           </a:xfrm>
           <a:prstGeom prst="roundRect">
@@ -1989,13 +1967,13 @@
       </p:sp>
       <p:sp>
         <p:nvSpPr>
-          <p:cNvPr id="12" name="Text 9"/>
-          <p:cNvSpPr/>
-          <p:nvPr/>
-        </p:nvSpPr>
-        <p:spPr>
-          <a:xfrm>
-            <a:off x="640080" y="5120640"/>
+          <p:cNvPr id="11" name="Text 7"/>
+          <p:cNvSpPr/>
+          <p:nvPr/>
+        </p:nvSpPr>
+        <p:spPr>
+          <a:xfrm>
+            <a:off x="640080" y="5440680"/>
             <a:ext cx="2496312" cy="475488"/>
           </a:xfrm>
           <a:prstGeom prst="rect">
@@ -2028,13 +2006,13 @@
       </p:sp>
       <p:sp>
         <p:nvSpPr>
-          <p:cNvPr id="13" name="Shape 10"/>
-          <p:cNvSpPr/>
-          <p:nvPr/>
-        </p:nvSpPr>
-        <p:spPr>
-          <a:xfrm>
-            <a:off x="3364992" y="5120640"/>
+          <p:cNvPr id="12" name="Shape 8"/>
+          <p:cNvSpPr/>
+          <p:nvPr/>
+        </p:nvSpPr>
+        <p:spPr>
+          <a:xfrm>
+            <a:off x="3364992" y="5440680"/>
             <a:ext cx="2688336" cy="475488"/>
           </a:xfrm>
           <a:prstGeom prst="roundRect">
@@ -2050,13 +2028,13 @@
       </p:sp>
       <p:sp>
         <p:nvSpPr>
-          <p:cNvPr id="14" name="Text 11"/>
-          <p:cNvSpPr/>
-          <p:nvPr/>
-        </p:nvSpPr>
-        <p:spPr>
-          <a:xfrm>
-            <a:off x="3364992" y="5120640"/>
+          <p:cNvPr id="13" name="Text 9"/>
+          <p:cNvSpPr/>
+          <p:nvPr/>
+        </p:nvSpPr>
+        <p:spPr>
+          <a:xfrm>
+            <a:off x="3364992" y="5440680"/>
             <a:ext cx="2688336" cy="475488"/>
           </a:xfrm>
           <a:prstGeom prst="rect">
@@ -2089,13 +2067,13 @@
       </p:sp>
       <p:sp>
         <p:nvSpPr>
-          <p:cNvPr id="15" name="Shape 12"/>
-          <p:cNvSpPr/>
-          <p:nvPr/>
-        </p:nvSpPr>
-        <p:spPr>
-          <a:xfrm>
-            <a:off x="6281928" y="5120640"/>
+          <p:cNvPr id="14" name="Shape 10"/>
+          <p:cNvSpPr/>
+          <p:nvPr/>
+        </p:nvSpPr>
+        <p:spPr>
+          <a:xfrm>
+            <a:off x="6281928" y="5440680"/>
             <a:ext cx="2880360" cy="475488"/>
           </a:xfrm>
           <a:prstGeom prst="roundRect">
@@ -2111,13 +2089,13 @@
       </p:sp>
       <p:sp>
         <p:nvSpPr>
-          <p:cNvPr id="16" name="Text 13"/>
-          <p:cNvSpPr/>
-          <p:nvPr/>
-        </p:nvSpPr>
-        <p:spPr>
-          <a:xfrm>
-            <a:off x="6281928" y="5120640"/>
+          <p:cNvPr id="15" name="Text 11"/>
+          <p:cNvSpPr/>
+          <p:nvPr/>
+        </p:nvSpPr>
+        <p:spPr>
+          <a:xfrm>
+            <a:off x="6281928" y="5440680"/>
             <a:ext cx="2880360" cy="475488"/>
           </a:xfrm>
           <a:prstGeom prst="rect">
@@ -2150,14 +2128,14 @@
       </p:sp>
       <p:sp>
         <p:nvSpPr>
-          <p:cNvPr id="17" name="Text 14"/>
-          <p:cNvSpPr/>
-          <p:nvPr/>
-        </p:nvSpPr>
-        <p:spPr>
-          <a:xfrm>
-            <a:off x="640080" y="6172200"/>
-            <a:ext cx="10058400" cy="320040"/>
+          <p:cNvPr id="16" name="Text 12"/>
+          <p:cNvSpPr/>
+          <p:nvPr/>
+        </p:nvSpPr>
+        <p:spPr>
+          <a:xfrm>
+            <a:off x="640080" y="6263640"/>
+            <a:ext cx="10972800" cy="320040"/>
           </a:xfrm>
           <a:prstGeom prst="rect">
             <a:avLst/>
@@ -2173,17 +2151,17 @@
               <a:buNone/>
             </a:pPr>
             <a:r>
-              <a:rPr lang="en-US" sz="1200" dirty="0">
-                <a:solidFill>
-                  <a:srgbClr val="8FAF9F"/>
+              <a:rPr lang="en-US" sz="1150" dirty="0">
+                <a:solidFill>
+                  <a:srgbClr val="5C6B63"/>
                 </a:solidFill>
                 <a:latin typeface="Calibri" pitchFamily="34" charset="0"/>
                 <a:ea typeface="Calibri" pitchFamily="34" charset="-122"/>
                 <a:cs typeface="Calibri" pitchFamily="34" charset="-120"/>
               </a:rPr>
-              <a:t>DGI — Direction Générale des Impôts · Guinée-Bissau · données pédagogiques fictives</a:t>
-            </a:r>
-            <a:endParaRPr lang="en-US" sz="1200" dirty="0"/>
+              <a:t>DGCI — Direção Geral das Contribuições e Impostos · Guinée-Bissau · données pédagogiques fictives</a:t>
+            </a:r>
+            <a:endParaRPr lang="en-US" sz="1150" dirty="0"/>
           </a:p>
         </p:txBody>
       </p:sp>
@@ -3080,7 +3058,7 @@
       </p:sp>
       <p:pic>
         <p:nvPicPr>
-          <p:cNvPr id="4" name="Image 0" descr="logo-dgi.png">    </p:cNvPr>
+          <p:cNvPr id="4" name="Image 0" descr="logo-dgci.png">    </p:cNvPr>
           <p:cNvPicPr>
             <a:picLocks noChangeAspect="1"/>
           </p:cNvPicPr>
@@ -3094,8 +3072,8 @@
         </p:blipFill>
         <p:spPr>
           <a:xfrm>
-            <a:off x="10744200" y="384048"/>
-            <a:ext cx="1051560" cy="795528"/>
+            <a:off x="10287000" y="475488"/>
+            <a:ext cx="1481328" cy="457200"/>
           </a:xfrm>
           <a:prstGeom prst="rect">
             <a:avLst/>
@@ -4292,7 +4270,7 @@
       </p:sp>
       <p:pic>
         <p:nvPicPr>
-          <p:cNvPr id="4" name="Image 0" descr="logo-dgi.png">    </p:cNvPr>
+          <p:cNvPr id="4" name="Image 0" descr="logo-dgci.png">    </p:cNvPr>
           <p:cNvPicPr>
             <a:picLocks noChangeAspect="1"/>
           </p:cNvPicPr>
@@ -4306,8 +4284,8 @@
         </p:blipFill>
         <p:spPr>
           <a:xfrm>
-            <a:off x="10744200" y="384048"/>
-            <a:ext cx="1051560" cy="795528"/>
+            <a:off x="10287000" y="475488"/>
+            <a:ext cx="1481328" cy="457200"/>
           </a:xfrm>
           <a:prstGeom prst="rect">
             <a:avLst/>
@@ -5536,7 +5514,7 @@
       </p:sp>
       <p:pic>
         <p:nvPicPr>
-          <p:cNvPr id="4" name="Image 0" descr="logo-dgi.png">    </p:cNvPr>
+          <p:cNvPr id="4" name="Image 0" descr="logo-dgci.png">    </p:cNvPr>
           <p:cNvPicPr>
             <a:picLocks noChangeAspect="1"/>
           </p:cNvPicPr>
@@ -5550,8 +5528,8 @@
         </p:blipFill>
         <p:spPr>
           <a:xfrm>
-            <a:off x="10744200" y="384048"/>
-            <a:ext cx="1051560" cy="795528"/>
+            <a:off x="10287000" y="475488"/>
+            <a:ext cx="1481328" cy="457200"/>
           </a:xfrm>
           <a:prstGeom prst="rect">
             <a:avLst/>
@@ -6760,7 +6738,7 @@
       </p:sp>
       <p:pic>
         <p:nvPicPr>
-          <p:cNvPr id="4" name="Image 0" descr="logo-dgi.png">    </p:cNvPr>
+          <p:cNvPr id="4" name="Image 0" descr="logo-dgci.png">    </p:cNvPr>
           <p:cNvPicPr>
             <a:picLocks noChangeAspect="1"/>
           </p:cNvPicPr>
@@ -6774,8 +6752,8 @@
         </p:blipFill>
         <p:spPr>
           <a:xfrm>
-            <a:off x="10744200" y="384048"/>
-            <a:ext cx="1051560" cy="795528"/>
+            <a:off x="10287000" y="475488"/>
+            <a:ext cx="1481328" cy="457200"/>
           </a:xfrm>
           <a:prstGeom prst="rect">
             <a:avLst/>
@@ -8171,7 +8149,7 @@
       </p:sp>
       <p:pic>
         <p:nvPicPr>
-          <p:cNvPr id="4" name="Image 0" descr="logo-dgi.png">    </p:cNvPr>
+          <p:cNvPr id="4" name="Image 0" descr="logo-dgci.png">    </p:cNvPr>
           <p:cNvPicPr>
             <a:picLocks noChangeAspect="1"/>
           </p:cNvPicPr>
@@ -8185,8 +8163,8 @@
         </p:blipFill>
         <p:spPr>
           <a:xfrm>
-            <a:off x="10744200" y="384048"/>
-            <a:ext cx="1051560" cy="795528"/>
+            <a:off x="10287000" y="475488"/>
+            <a:ext cx="1481328" cy="457200"/>
           </a:xfrm>
           <a:prstGeom prst="rect">
             <a:avLst/>
@@ -9599,7 +9577,7 @@
       </p:sp>
       <p:pic>
         <p:nvPicPr>
-          <p:cNvPr id="4" name="Image 0" descr="logo-dgi.png">    </p:cNvPr>
+          <p:cNvPr id="4" name="Image 0" descr="logo-dgci.png">    </p:cNvPr>
           <p:cNvPicPr>
             <a:picLocks noChangeAspect="1"/>
           </p:cNvPicPr>
@@ -9613,8 +9591,8 @@
         </p:blipFill>
         <p:spPr>
           <a:xfrm>
-            <a:off x="10744200" y="384048"/>
-            <a:ext cx="1051560" cy="795528"/>
+            <a:off x="10287000" y="475488"/>
+            <a:ext cx="1481328" cy="457200"/>
           </a:xfrm>
           <a:prstGeom prst="rect">
             <a:avLst/>
@@ -10962,7 +10940,7 @@
       </p:sp>
       <p:pic>
         <p:nvPicPr>
-          <p:cNvPr id="4" name="Image 0" descr="logo-dgi.png">    </p:cNvPr>
+          <p:cNvPr id="4" name="Image 0" descr="logo-dgci.png">    </p:cNvPr>
           <p:cNvPicPr>
             <a:picLocks noChangeAspect="1"/>
           </p:cNvPicPr>
@@ -10976,8 +10954,8 @@
         </p:blipFill>
         <p:spPr>
           <a:xfrm>
-            <a:off x="10744200" y="384048"/>
-            <a:ext cx="1051560" cy="795528"/>
+            <a:off x="10287000" y="475488"/>
+            <a:ext cx="1481328" cy="457200"/>
           </a:xfrm>
           <a:prstGeom prst="rect">
             <a:avLst/>
@@ -12008,7 +11986,7 @@
       </p:sp>
       <p:pic>
         <p:nvPicPr>
-          <p:cNvPr id="4" name="Image 0" descr="logo-dgi.png">    </p:cNvPr>
+          <p:cNvPr id="4" name="Image 0" descr="logo-dgci.png">    </p:cNvPr>
           <p:cNvPicPr>
             <a:picLocks noChangeAspect="1"/>
           </p:cNvPicPr>
@@ -12022,8 +12000,8 @@
         </p:blipFill>
         <p:spPr>
           <a:xfrm>
-            <a:off x="10744200" y="384048"/>
-            <a:ext cx="1051560" cy="795528"/>
+            <a:off x="10287000" y="475488"/>
+            <a:ext cx="1481328" cy="457200"/>
           </a:xfrm>
           <a:prstGeom prst="rect">
             <a:avLst/>
